--- a/файлы/Высоцкий.pptx
+++ b/файлы/Высоцкий.pptx
@@ -5,29 +5,36 @@
     <p:sldMasterId id="2147483648" r:id="rId1"/>
   </p:sldMasterIdLst>
   <p:notesMasterIdLst>
-    <p:notesMasterId r:id="rId11"/>
+    <p:notesMasterId r:id="rId12"/>
   </p:notesMasterIdLst>
+  <p:handoutMasterIdLst>
+    <p:handoutMasterId r:id="rId13"/>
+  </p:handoutMasterIdLst>
   <p:sldIdLst>
     <p:sldId id="256" r:id="rId2"/>
     <p:sldId id="257" r:id="rId3"/>
-    <p:sldId id="258" r:id="rId4"/>
+    <p:sldId id="266" r:id="rId4"/>
     <p:sldId id="259" r:id="rId5"/>
     <p:sldId id="260" r:id="rId6"/>
     <p:sldId id="261" r:id="rId7"/>
     <p:sldId id="262" r:id="rId8"/>
     <p:sldId id="263" r:id="rId9"/>
-    <p:sldId id="264" r:id="rId10"/>
+    <p:sldId id="265" r:id="rId10"/>
+    <p:sldId id="264" r:id="rId11"/>
   </p:sldIdLst>
   <p:sldSz cx="14630400" cy="8229600"/>
   <p:notesSz cx="8229600" cy="14630400"/>
   <p:embeddedFontLst>
     <p:embeddedFont>
-      <p:font typeface="Montserrat" panose="00000500000000000000" pitchFamily="2" charset="-52"/>
-      <p:regular r:id="rId12"/>
+      <p:font typeface="Barlow Bold" panose="020B0604020202020204" charset="0"/>
+      <p:bold r:id="rId14"/>
     </p:embeddedFont>
     <p:embeddedFont>
-      <p:font typeface="Montserrat Bold" panose="020B0604020202020204" charset="-52"/>
-      <p:bold r:id="rId13"/>
+      <p:font typeface="Montserrat" panose="00000500000000000000" pitchFamily="2" charset="-52"/>
+      <p:regular r:id="rId15"/>
+      <p:bold r:id="rId16"/>
+      <p:italic r:id="rId17"/>
+      <p:boldItalic r:id="rId18"/>
     </p:embeddedFont>
   </p:embeddedFontLst>
   <p:defaultTextStyle>
@@ -133,6 +140,196 @@
 </p:presentation>
 </file>
 
+<file path=ppt/handoutMasters/handoutMaster1.xml><?xml version="1.0" encoding="utf-8"?>
+<p:handoutMaster xmlns:a="http://schemas.openxmlformats.org/drawingml/2006/main" xmlns:r="http://schemas.openxmlformats.org/officeDocument/2006/relationships" xmlns:p="http://schemas.openxmlformats.org/presentationml/2006/main">
+  <p:cSld>
+    <p:bg>
+      <p:bgRef idx="1001">
+        <a:schemeClr val="bg1"/>
+      </p:bgRef>
+    </p:bg>
+    <p:spTree>
+      <p:nvGrpSpPr>
+        <p:cNvPr id="1" name=""/>
+        <p:cNvGrpSpPr/>
+        <p:nvPr/>
+      </p:nvGrpSpPr>
+      <p:grpSpPr>
+        <a:xfrm>
+          <a:off x="0" y="0"/>
+          <a:ext cx="0" cy="0"/>
+          <a:chOff x="0" y="0"/>
+          <a:chExt cx="0" cy="0"/>
+        </a:xfrm>
+      </p:grpSpPr>
+      <p:sp>
+        <p:nvSpPr>
+          <p:cNvPr id="2" name="Верхний колонтитул 1">
+            <a:extLst>
+              <a:ext uri="{FF2B5EF4-FFF2-40B4-BE49-F238E27FC236}">
+                <a16:creationId xmlns:a16="http://schemas.microsoft.com/office/drawing/2014/main" id="{CC0721B5-A21B-5FA5-6B99-0E02FCEC7570}"/>
+              </a:ext>
+            </a:extLst>
+          </p:cNvPr>
+          <p:cNvSpPr>
+            <a:spLocks noGrp="1"/>
+          </p:cNvSpPr>
+          <p:nvPr>
+            <p:ph type="hdr" sz="quarter"/>
+          </p:nvPr>
+        </p:nvSpPr>
+        <p:spPr>
+          <a:xfrm>
+            <a:off x="0" y="0"/>
+            <a:ext cx="3565525" cy="733425"/>
+          </a:xfrm>
+          <a:prstGeom prst="rect">
+            <a:avLst/>
+          </a:prstGeom>
+        </p:spPr>
+        <p:txBody>
+          <a:bodyPr vert="horz" lIns="91440" tIns="45720" rIns="91440" bIns="45720" rtlCol="0"/>
+          <a:lstStyle>
+            <a:lvl1pPr algn="l">
+              <a:defRPr sz="1200"/>
+            </a:lvl1pPr>
+          </a:lstStyle>
+          <a:p>
+            <a:endParaRPr lang="ru-RU"/>
+          </a:p>
+        </p:txBody>
+      </p:sp>
+      <p:sp>
+        <p:nvSpPr>
+          <p:cNvPr id="3" name="Дата 2">
+            <a:extLst>
+              <a:ext uri="{FF2B5EF4-FFF2-40B4-BE49-F238E27FC236}">
+                <a16:creationId xmlns:a16="http://schemas.microsoft.com/office/drawing/2014/main" id="{8E7538D3-9C3C-BE40-5E12-11CE8F852333}"/>
+              </a:ext>
+            </a:extLst>
+          </p:cNvPr>
+          <p:cNvSpPr>
+            <a:spLocks noGrp="1"/>
+          </p:cNvSpPr>
+          <p:nvPr>
+            <p:ph type="dt" sz="quarter" idx="1"/>
+          </p:nvPr>
+        </p:nvSpPr>
+        <p:spPr>
+          <a:xfrm>
+            <a:off x="4660900" y="0"/>
+            <a:ext cx="3567113" cy="733425"/>
+          </a:xfrm>
+          <a:prstGeom prst="rect">
+            <a:avLst/>
+          </a:prstGeom>
+        </p:spPr>
+        <p:txBody>
+          <a:bodyPr vert="horz" lIns="91440" tIns="45720" rIns="91440" bIns="45720" rtlCol="0"/>
+          <a:lstStyle>
+            <a:lvl1pPr algn="r">
+              <a:defRPr sz="1200"/>
+            </a:lvl1pPr>
+          </a:lstStyle>
+          <a:p>
+            <a:fld id="{DDD8EA51-91C7-4E71-9BBE-1308E0D83792}" type="datetimeFigureOut">
+              <a:rPr lang="ru-RU" smtClean="0"/>
+              <a:t>20.05.2025</a:t>
+            </a:fld>
+            <a:endParaRPr lang="ru-RU"/>
+          </a:p>
+        </p:txBody>
+      </p:sp>
+      <p:sp>
+        <p:nvSpPr>
+          <p:cNvPr id="4" name="Нижний колонтитул 3">
+            <a:extLst>
+              <a:ext uri="{FF2B5EF4-FFF2-40B4-BE49-F238E27FC236}">
+                <a16:creationId xmlns:a16="http://schemas.microsoft.com/office/drawing/2014/main" id="{F5AC34A0-EE3A-D61F-F1B3-E27147713DC1}"/>
+              </a:ext>
+            </a:extLst>
+          </p:cNvPr>
+          <p:cNvSpPr>
+            <a:spLocks noGrp="1"/>
+          </p:cNvSpPr>
+          <p:nvPr>
+            <p:ph type="ftr" sz="quarter" idx="2"/>
+          </p:nvPr>
+        </p:nvSpPr>
+        <p:spPr>
+          <a:xfrm>
+            <a:off x="0" y="13896975"/>
+            <a:ext cx="3565525" cy="733425"/>
+          </a:xfrm>
+          <a:prstGeom prst="rect">
+            <a:avLst/>
+          </a:prstGeom>
+        </p:spPr>
+        <p:txBody>
+          <a:bodyPr vert="horz" lIns="91440" tIns="45720" rIns="91440" bIns="45720" rtlCol="0" anchor="b"/>
+          <a:lstStyle>
+            <a:lvl1pPr algn="l">
+              <a:defRPr sz="1200"/>
+            </a:lvl1pPr>
+          </a:lstStyle>
+          <a:p>
+            <a:endParaRPr lang="ru-RU"/>
+          </a:p>
+        </p:txBody>
+      </p:sp>
+      <p:sp>
+        <p:nvSpPr>
+          <p:cNvPr id="5" name="Номер слайда 4">
+            <a:extLst>
+              <a:ext uri="{FF2B5EF4-FFF2-40B4-BE49-F238E27FC236}">
+                <a16:creationId xmlns:a16="http://schemas.microsoft.com/office/drawing/2014/main" id="{12CD7D82-DDB0-91EB-1DC5-CFB12C555F1B}"/>
+              </a:ext>
+            </a:extLst>
+          </p:cNvPr>
+          <p:cNvSpPr>
+            <a:spLocks noGrp="1"/>
+          </p:cNvSpPr>
+          <p:nvPr>
+            <p:ph type="sldNum" sz="quarter" idx="3"/>
+          </p:nvPr>
+        </p:nvSpPr>
+        <p:spPr>
+          <a:xfrm>
+            <a:off x="4660900" y="13896975"/>
+            <a:ext cx="3567113" cy="733425"/>
+          </a:xfrm>
+          <a:prstGeom prst="rect">
+            <a:avLst/>
+          </a:prstGeom>
+        </p:spPr>
+        <p:txBody>
+          <a:bodyPr vert="horz" lIns="91440" tIns="45720" rIns="91440" bIns="45720" rtlCol="0" anchor="b"/>
+          <a:lstStyle>
+            <a:lvl1pPr algn="r">
+              <a:defRPr sz="1200"/>
+            </a:lvl1pPr>
+          </a:lstStyle>
+          <a:p>
+            <a:fld id="{C1E8F592-CDE7-4DE7-9EA3-E9EB83A4CB81}" type="slidenum">
+              <a:rPr lang="ru-RU" smtClean="0"/>
+              <a:t>‹#›</a:t>
+            </a:fld>
+            <a:endParaRPr lang="ru-RU"/>
+          </a:p>
+        </p:txBody>
+      </p:sp>
+    </p:spTree>
+    <p:extLst>
+      <p:ext uri="{BB962C8B-B14F-4D97-AF65-F5344CB8AC3E}">
+        <p14:creationId xmlns:p14="http://schemas.microsoft.com/office/powerpoint/2010/main" val="4031090547"/>
+      </p:ext>
+    </p:extLst>
+  </p:cSld>
+  <p:clrMap bg1="lt1" tx1="dk1" bg2="lt2" tx2="dk2" accent1="accent1" accent2="accent2" accent3="accent3" accent4="accent4" accent5="accent5" accent6="accent6" hlink="hlink" folHlink="folHlink"/>
+  <p:hf hdr="0" ftr="0" dt="0"/>
+</p:handoutMaster>
+</file>
+
 <file path=ppt/notesMasters/notesMaster1.xml><?xml version="1.0" encoding="utf-8"?>
 <p:notesMaster xmlns:a="http://schemas.openxmlformats.org/drawingml/2006/main" xmlns:r="http://schemas.openxmlformats.org/officeDocument/2006/relationships" xmlns:p="http://schemas.openxmlformats.org/presentationml/2006/main">
   <p:cSld>
@@ -163,6 +360,7 @@
     </p:extLst>
   </p:cSld>
   <p:clrMap bg1="lt1" tx1="dk1" bg2="lt2" tx2="dk2" accent1="accent1" accent2="accent2" accent3="accent3" accent4="accent4" accent5="accent5" accent6="accent6" hlink="hlink" folHlink="folHlink"/>
+  <p:hf hdr="0" ftr="0" dt="0"/>
   <p:notesStyle>
     <a:lvl1pPr marL="0" algn="l" defTabSz="914400" rtl="0" eaLnBrk="1" latinLnBrk="0" hangingPunct="1">
       <a:defRPr sz="1200" kern="1200">
@@ -342,6 +540,90 @@
 </p:notes>
 </file>
 
+<file path=ppt/notesSlides/notesSlide10.xml><?xml version="1.0" encoding="utf-8"?>
+<p:notes xmlns:a="http://schemas.openxmlformats.org/drawingml/2006/main" xmlns:r="http://schemas.openxmlformats.org/officeDocument/2006/relationships" xmlns:p="http://schemas.openxmlformats.org/presentationml/2006/main">
+  <p:cSld>
+    <p:spTree>
+      <p:nvGrpSpPr>
+        <p:cNvPr id="1" name=""/>
+        <p:cNvGrpSpPr/>
+        <p:nvPr/>
+      </p:nvGrpSpPr>
+      <p:grpSpPr>
+        <a:xfrm>
+          <a:off x="0" y="0"/>
+          <a:ext cx="0" cy="0"/>
+          <a:chOff x="0" y="0"/>
+          <a:chExt cx="0" cy="0"/>
+        </a:xfrm>
+      </p:grpSpPr>
+      <p:sp>
+        <p:nvSpPr>
+          <p:cNvPr id="2" name="Slide Image Placeholder 1"/>
+          <p:cNvSpPr>
+            <a:spLocks noGrp="1" noRot="1" noChangeAspect="1"/>
+          </p:cNvSpPr>
+          <p:nvPr>
+            <p:ph type="sldImg"/>
+          </p:nvPr>
+        </p:nvSpPr>
+        <p:spPr/>
+      </p:sp>
+      <p:sp>
+        <p:nvSpPr>
+          <p:cNvPr id="3" name="Notes Placeholder 2"/>
+          <p:cNvSpPr>
+            <a:spLocks noGrp="1"/>
+          </p:cNvSpPr>
+          <p:nvPr>
+            <p:ph type="body" idx="1"/>
+          </p:nvPr>
+        </p:nvSpPr>
+        <p:spPr/>
+        <p:txBody>
+          <a:bodyPr/>
+          <a:lstStyle/>
+          <a:p>
+            <a:endParaRPr lang="en-US" dirty="0"/>
+          </a:p>
+        </p:txBody>
+      </p:sp>
+      <p:sp>
+        <p:nvSpPr>
+          <p:cNvPr id="4" name="Slide Number Placeholder 3"/>
+          <p:cNvSpPr>
+            <a:spLocks noGrp="1"/>
+          </p:cNvSpPr>
+          <p:nvPr>
+            <p:ph type="sldNum" sz="quarter" idx="10"/>
+          </p:nvPr>
+        </p:nvSpPr>
+        <p:spPr/>
+        <p:txBody>
+          <a:bodyPr/>
+          <a:lstStyle/>
+          <a:p>
+            <a:fld id="{F7021451-1387-4CA6-816F-3879F97B5CBC}" type="slidenum">
+              <a:rPr lang="en-US"/>
+              <a:t>10</a:t>
+            </a:fld>
+            <a:endParaRPr lang="en-US"/>
+          </a:p>
+        </p:txBody>
+      </p:sp>
+    </p:spTree>
+    <p:extLst>
+      <p:ext uri="{BB962C8B-B14F-4D97-AF65-F5344CB8AC3E}">
+        <p14:creationId xmlns:p14="http://schemas.microsoft.com/office/powerpoint/2010/main" val="1024086991"/>
+      </p:ext>
+    </p:extLst>
+  </p:cSld>
+  <p:clrMapOvr>
+    <a:masterClrMapping/>
+  </p:clrMapOvr>
+</p:notes>
+</file>
+
 <file path=ppt/notesSlides/notesSlide2.xml><?xml version="1.0" encoding="utf-8"?>
 <p:notes xmlns:a="http://schemas.openxmlformats.org/drawingml/2006/main" xmlns:r="http://schemas.openxmlformats.org/officeDocument/2006/relationships" xmlns:p="http://schemas.openxmlformats.org/presentationml/2006/main">
   <p:cSld>
@@ -431,7 +713,13 @@
   <p:cSld>
     <p:spTree>
       <p:nvGrpSpPr>
-        <p:cNvPr id="1" name=""/>
+        <p:cNvPr id="1" name="">
+          <a:extLst>
+            <a:ext uri="{FF2B5EF4-FFF2-40B4-BE49-F238E27FC236}">
+              <a16:creationId xmlns:a16="http://schemas.microsoft.com/office/drawing/2014/main" id="{C9FF267E-A222-A789-85D4-C87C5B95184C}"/>
+            </a:ext>
+          </a:extLst>
+        </p:cNvPr>
         <p:cNvGrpSpPr/>
         <p:nvPr/>
       </p:nvGrpSpPr>
@@ -445,7 +733,13 @@
       </p:grpSpPr>
       <p:sp>
         <p:nvSpPr>
-          <p:cNvPr id="2" name="Slide Image Placeholder 1"/>
+          <p:cNvPr id="2" name="Slide Image Placeholder 1">
+            <a:extLst>
+              <a:ext uri="{FF2B5EF4-FFF2-40B4-BE49-F238E27FC236}">
+                <a16:creationId xmlns:a16="http://schemas.microsoft.com/office/drawing/2014/main" id="{566CEBD9-E5D4-38D7-3D39-EED8090E82E9}"/>
+              </a:ext>
+            </a:extLst>
+          </p:cNvPr>
           <p:cNvSpPr>
             <a:spLocks noGrp="1" noRot="1" noChangeAspect="1"/>
           </p:cNvSpPr>
@@ -457,7 +751,13 @@
       </p:sp>
       <p:sp>
         <p:nvSpPr>
-          <p:cNvPr id="3" name="Notes Placeholder 2"/>
+          <p:cNvPr id="3" name="Notes Placeholder 2">
+            <a:extLst>
+              <a:ext uri="{FF2B5EF4-FFF2-40B4-BE49-F238E27FC236}">
+                <a16:creationId xmlns:a16="http://schemas.microsoft.com/office/drawing/2014/main" id="{19DE1993-9EFE-C342-18CA-F9E6FF3ADE61}"/>
+              </a:ext>
+            </a:extLst>
+          </p:cNvPr>
           <p:cNvSpPr>
             <a:spLocks noGrp="1"/>
           </p:cNvSpPr>
@@ -476,7 +776,13 @@
       </p:sp>
       <p:sp>
         <p:nvSpPr>
-          <p:cNvPr id="4" name="Slide Number Placeholder 3"/>
+          <p:cNvPr id="4" name="Slide Number Placeholder 3">
+            <a:extLst>
+              <a:ext uri="{FF2B5EF4-FFF2-40B4-BE49-F238E27FC236}">
+                <a16:creationId xmlns:a16="http://schemas.microsoft.com/office/drawing/2014/main" id="{6C1F3753-55B6-D30A-B263-F271F7ECAC9B}"/>
+              </a:ext>
+            </a:extLst>
+          </p:cNvPr>
           <p:cNvSpPr>
             <a:spLocks noGrp="1"/>
           </p:cNvSpPr>
@@ -500,7 +806,7 @@
     </p:spTree>
     <p:extLst>
       <p:ext uri="{BB962C8B-B14F-4D97-AF65-F5344CB8AC3E}">
-        <p14:creationId xmlns:p14="http://schemas.microsoft.com/office/powerpoint/2010/main" val="1024086991"/>
+        <p14:creationId xmlns:p14="http://schemas.microsoft.com/office/powerpoint/2010/main" val="3427774082"/>
       </p:ext>
     </p:extLst>
   </p:cSld>
@@ -935,7 +1241,13 @@
   <p:cSld>
     <p:spTree>
       <p:nvGrpSpPr>
-        <p:cNvPr id="1" name=""/>
+        <p:cNvPr id="1" name="">
+          <a:extLst>
+            <a:ext uri="{FF2B5EF4-FFF2-40B4-BE49-F238E27FC236}">
+              <a16:creationId xmlns:a16="http://schemas.microsoft.com/office/drawing/2014/main" id="{CC1C47D3-10D2-1E70-B926-B285F00D5B9D}"/>
+            </a:ext>
+          </a:extLst>
+        </p:cNvPr>
         <p:cNvGrpSpPr/>
         <p:nvPr/>
       </p:nvGrpSpPr>
@@ -949,7 +1261,13 @@
       </p:grpSpPr>
       <p:sp>
         <p:nvSpPr>
-          <p:cNvPr id="2" name="Slide Image Placeholder 1"/>
+          <p:cNvPr id="2" name="Slide Image Placeholder 1">
+            <a:extLst>
+              <a:ext uri="{FF2B5EF4-FFF2-40B4-BE49-F238E27FC236}">
+                <a16:creationId xmlns:a16="http://schemas.microsoft.com/office/drawing/2014/main" id="{B74161DE-317E-92F1-B249-91D85DF634C1}"/>
+              </a:ext>
+            </a:extLst>
+          </p:cNvPr>
           <p:cNvSpPr>
             <a:spLocks noGrp="1" noRot="1" noChangeAspect="1"/>
           </p:cNvSpPr>
@@ -961,7 +1279,13 @@
       </p:sp>
       <p:sp>
         <p:nvSpPr>
-          <p:cNvPr id="3" name="Notes Placeholder 2"/>
+          <p:cNvPr id="3" name="Notes Placeholder 2">
+            <a:extLst>
+              <a:ext uri="{FF2B5EF4-FFF2-40B4-BE49-F238E27FC236}">
+                <a16:creationId xmlns:a16="http://schemas.microsoft.com/office/drawing/2014/main" id="{BF4F5E72-3C56-43DF-B453-AC23587410E2}"/>
+              </a:ext>
+            </a:extLst>
+          </p:cNvPr>
           <p:cNvSpPr>
             <a:spLocks noGrp="1"/>
           </p:cNvSpPr>
@@ -980,7 +1304,13 @@
       </p:sp>
       <p:sp>
         <p:nvSpPr>
-          <p:cNvPr id="4" name="Slide Number Placeholder 3"/>
+          <p:cNvPr id="4" name="Slide Number Placeholder 3">
+            <a:extLst>
+              <a:ext uri="{FF2B5EF4-FFF2-40B4-BE49-F238E27FC236}">
+                <a16:creationId xmlns:a16="http://schemas.microsoft.com/office/drawing/2014/main" id="{0DA42015-761C-9A86-7EA0-83A1B5993D02}"/>
+              </a:ext>
+            </a:extLst>
+          </p:cNvPr>
           <p:cNvSpPr>
             <a:spLocks noGrp="1"/>
           </p:cNvSpPr>
@@ -1004,7 +1334,7 @@
     </p:spTree>
     <p:extLst>
       <p:ext uri="{BB962C8B-B14F-4D97-AF65-F5344CB8AC3E}">
-        <p14:creationId xmlns:p14="http://schemas.microsoft.com/office/powerpoint/2010/main" val="1024086991"/>
+        <p14:creationId xmlns:p14="http://schemas.microsoft.com/office/powerpoint/2010/main" val="3039748658"/>
       </p:ext>
     </p:extLst>
   </p:cSld>
@@ -1936,7 +2266,7 @@
     <p:sldLayoutId id="2147483657" r:id="rId9"/>
     <p:sldLayoutId id="2147483658" r:id="rId10"/>
   </p:sldLayoutIdLst>
-  <p:hf sldNum="0" hdr="0" ftr="0" dt="0"/>
+  <p:hf hdr="0" ftr="0" dt="0"/>
   <p:txStyles>
     <p:titleStyle>
       <a:lvl1pPr algn="ctr" defTabSz="914400" rtl="0" eaLnBrk="1" latinLnBrk="0" hangingPunct="1">
@@ -2239,8 +2569,8 @@
         </p:nvSpPr>
         <p:spPr>
           <a:xfrm>
-            <a:off x="758309" y="1641456"/>
-            <a:ext cx="7627382" cy="1425416"/>
+            <a:off x="758309" y="435729"/>
+            <a:ext cx="7627382" cy="2873350"/>
           </a:xfrm>
           <a:prstGeom prst="rect">
             <a:avLst/>
@@ -2259,7 +2589,7 @@
               <a:buNone/>
             </a:pPr>
             <a:r>
-              <a:rPr lang="en-US" sz="4450" b="1" dirty="0">
+              <a:rPr lang="ru-RU" sz="4450" b="1" dirty="0">
                 <a:solidFill>
                   <a:srgbClr val="2E3C4E"/>
                 </a:solidFill>
@@ -2267,7 +2597,84 @@
                 <a:ea typeface="Barlow Bold" pitchFamily="34" charset="-122"/>
                 <a:cs typeface="Barlow Bold" pitchFamily="34" charset="-120"/>
               </a:rPr>
-              <a:t>Автоматизация учета успеваемости студентов</a:t>
+              <a:t>А</a:t>
+            </a:r>
+            <a:r>
+              <a:rPr lang="en-US" sz="4450" b="1" dirty="0" err="1">
+                <a:solidFill>
+                  <a:srgbClr val="2E3C4E"/>
+                </a:solidFill>
+                <a:latin typeface="Barlow Bold" pitchFamily="34" charset="0"/>
+                <a:ea typeface="Barlow Bold" pitchFamily="34" charset="-122"/>
+                <a:cs typeface="Barlow Bold" pitchFamily="34" charset="-120"/>
+              </a:rPr>
+              <a:t>втоматизаци</a:t>
+            </a:r>
+            <a:r>
+              <a:rPr lang="ru-RU" sz="4450" b="1" dirty="0">
+                <a:solidFill>
+                  <a:srgbClr val="2E3C4E"/>
+                </a:solidFill>
+                <a:latin typeface="Barlow Bold" pitchFamily="34" charset="0"/>
+                <a:ea typeface="Barlow Bold" pitchFamily="34" charset="-122"/>
+                <a:cs typeface="Barlow Bold" pitchFamily="34" charset="-120"/>
+              </a:rPr>
+              <a:t>я процессов</a:t>
+            </a:r>
+            <a:r>
+              <a:rPr lang="en-US" sz="4450" b="1" dirty="0">
+                <a:solidFill>
+                  <a:srgbClr val="2E3C4E"/>
+                </a:solidFill>
+                <a:latin typeface="Barlow Bold" pitchFamily="34" charset="0"/>
+                <a:ea typeface="Barlow Bold" pitchFamily="34" charset="-122"/>
+                <a:cs typeface="Barlow Bold" pitchFamily="34" charset="-120"/>
+              </a:rPr>
+              <a:t> </a:t>
+            </a:r>
+            <a:r>
+              <a:rPr lang="en-US" sz="4450" b="1" dirty="0" err="1">
+                <a:solidFill>
+                  <a:srgbClr val="2E3C4E"/>
+                </a:solidFill>
+                <a:latin typeface="Barlow Bold" pitchFamily="34" charset="0"/>
+                <a:ea typeface="Barlow Bold" pitchFamily="34" charset="-122"/>
+                <a:cs typeface="Barlow Bold" pitchFamily="34" charset="-120"/>
+              </a:rPr>
+              <a:t>учета</a:t>
+            </a:r>
+            <a:r>
+              <a:rPr lang="ru-RU" sz="4450" b="1" dirty="0">
+                <a:solidFill>
+                  <a:srgbClr val="2E3C4E"/>
+                </a:solidFill>
+                <a:latin typeface="Barlow Bold" pitchFamily="34" charset="0"/>
+                <a:ea typeface="Barlow Bold" pitchFamily="34" charset="-122"/>
+                <a:cs typeface="Barlow Bold" pitchFamily="34" charset="-120"/>
+              </a:rPr>
+              <a:t> и анализа </a:t>
+            </a:r>
+            <a:r>
+              <a:rPr lang="en-US" sz="4450" b="1" dirty="0" err="1">
+                <a:solidFill>
+                  <a:srgbClr val="2E3C4E"/>
+                </a:solidFill>
+                <a:latin typeface="Barlow Bold" pitchFamily="34" charset="0"/>
+                <a:ea typeface="Barlow Bold" pitchFamily="34" charset="-122"/>
+                <a:cs typeface="Barlow Bold" pitchFamily="34" charset="-120"/>
+              </a:rPr>
+              <a:t>успеваемости</a:t>
+            </a:r>
+            <a:r>
+              <a:rPr lang="en-US" sz="4450" b="1" dirty="0">
+                <a:solidFill>
+                  <a:srgbClr val="2E3C4E"/>
+                </a:solidFill>
+                <a:latin typeface="Barlow Bold" pitchFamily="34" charset="0"/>
+                <a:ea typeface="Barlow Bold" pitchFamily="34" charset="-122"/>
+                <a:cs typeface="Barlow Bold" pitchFamily="34" charset="-120"/>
+              </a:rPr>
+              <a:t> студентов</a:t>
             </a:r>
             <a:endParaRPr lang="en-US" sz="4450" dirty="0"/>
           </a:p>
@@ -2281,8 +2688,8 @@
         </p:nvSpPr>
         <p:spPr>
           <a:xfrm>
-            <a:off x="758309" y="3391794"/>
-            <a:ext cx="7627382" cy="346710"/>
+            <a:off x="758309" y="3655670"/>
+            <a:ext cx="7306191" cy="856040"/>
           </a:xfrm>
           <a:prstGeom prst="rect">
             <a:avLst/>
@@ -2294,108 +2701,32 @@
           <a:bodyPr wrap="none" lIns="0" tIns="0" rIns="0" bIns="0" rtlCol="0" anchor="t"/>
           <a:lstStyle/>
           <a:p>
-            <a:pPr marL="0" indent="0" algn="l">
-              <a:lnSpc>
-                <a:spcPts val="2700"/>
-              </a:lnSpc>
-              <a:buNone/>
-            </a:pPr>
-            <a:r>
-              <a:rPr lang="en-US" sz="1700" dirty="0">
+            <a:r>
+              <a:rPr lang="ru-RU" sz="2800" b="1" dirty="0">
                 <a:solidFill>
                   <a:srgbClr val="384653"/>
                 </a:solidFill>
                 <a:latin typeface="Montserrat" pitchFamily="34" charset="0"/>
-                <a:ea typeface="Montserrat" pitchFamily="34" charset="-122"/>
-                <a:cs typeface="Montserrat" pitchFamily="34" charset="-120"/>
-              </a:rPr>
-              <a:t>Веб-решение для образовательных учреждений</a:t>
-            </a:r>
-            <a:endParaRPr lang="en-US" sz="1700" dirty="0"/>
-          </a:p>
-        </p:txBody>
-      </p:sp>
-      <p:sp>
-        <p:nvSpPr>
-          <p:cNvPr id="5" name="Text 2"/>
-          <p:cNvSpPr/>
-          <p:nvPr/>
-        </p:nvSpPr>
-        <p:spPr>
-          <a:xfrm>
-            <a:off x="758309" y="3982225"/>
-            <a:ext cx="7627382" cy="346710"/>
-          </a:xfrm>
-          <a:prstGeom prst="rect">
-            <a:avLst/>
-          </a:prstGeom>
-          <a:noFill/>
-          <a:ln/>
-        </p:spPr>
-        <p:txBody>
-          <a:bodyPr wrap="none" lIns="0" tIns="0" rIns="0" bIns="0" rtlCol="0" anchor="t"/>
-          <a:lstStyle/>
-          <a:p>
-            <a:pPr marL="0" indent="0" algn="l">
-              <a:lnSpc>
-                <a:spcPts val="2700"/>
-              </a:lnSpc>
-              <a:buNone/>
-            </a:pPr>
-            <a:r>
-              <a:rPr lang="en-US" sz="1700" dirty="0">
+              </a:rPr>
+              <a:t>81-я студенческая научно – </a:t>
+            </a:r>
+          </a:p>
+          <a:p>
+            <a:r>
+              <a:rPr lang="ru-RU" sz="2800" b="1" dirty="0">
                 <a:solidFill>
                   <a:srgbClr val="384653"/>
                 </a:solidFill>
                 <a:latin typeface="Montserrat" pitchFamily="34" charset="0"/>
-                <a:ea typeface="Montserrat" pitchFamily="34" charset="-122"/>
-                <a:cs typeface="Montserrat" pitchFamily="34" charset="-120"/>
-              </a:rPr>
-              <a:t>Оптимизация мониторинга успеваемости</a:t>
-            </a:r>
-            <a:endParaRPr lang="en-US" sz="1700" dirty="0"/>
-          </a:p>
-        </p:txBody>
-      </p:sp>
-      <p:sp>
-        <p:nvSpPr>
-          <p:cNvPr id="6" name="Text 3"/>
-          <p:cNvSpPr/>
-          <p:nvPr/>
-        </p:nvSpPr>
-        <p:spPr>
-          <a:xfrm>
-            <a:off x="758309" y="4576109"/>
-            <a:ext cx="7627382" cy="346710"/>
-          </a:xfrm>
-          <a:prstGeom prst="rect">
-            <a:avLst/>
-          </a:prstGeom>
-          <a:noFill/>
-          <a:ln/>
-        </p:spPr>
-        <p:txBody>
-          <a:bodyPr wrap="none" lIns="0" tIns="0" rIns="0" bIns="0" rtlCol="0" anchor="t"/>
-          <a:lstStyle/>
-          <a:p>
-            <a:pPr marL="0" indent="0" algn="l">
-              <a:lnSpc>
-                <a:spcPts val="2700"/>
-              </a:lnSpc>
-              <a:buNone/>
-            </a:pPr>
-            <a:r>
-              <a:rPr lang="en-US" sz="1700" dirty="0">
-                <a:solidFill>
-                  <a:srgbClr val="384653"/>
-                </a:solidFill>
-                <a:latin typeface="Montserrat" pitchFamily="34" charset="0"/>
-                <a:ea typeface="Montserrat" pitchFamily="34" charset="-122"/>
-                <a:cs typeface="Montserrat" pitchFamily="34" charset="-120"/>
-              </a:rPr>
-              <a:t>Автоматизация административных задач</a:t>
-            </a:r>
-            <a:endParaRPr lang="en-US" sz="1700" dirty="0"/>
+              </a:rPr>
+              <a:t>техническая конференция БНТУ</a:t>
+            </a:r>
+            <a:endParaRPr lang="en-US" b="1" dirty="0">
+              <a:solidFill>
+                <a:srgbClr val="384653"/>
+              </a:solidFill>
+              <a:latin typeface="Montserrat" pitchFamily="34" charset="0"/>
+            </a:endParaRPr>
           </a:p>
         </p:txBody>
       </p:sp>
@@ -2432,8 +2763,8 @@
         </p:nvSpPr>
         <p:spPr>
           <a:xfrm>
-            <a:off x="758309" y="5875436"/>
-            <a:ext cx="5556766" cy="1552040"/>
+            <a:off x="653976" y="5812962"/>
+            <a:ext cx="7973709" cy="1552040"/>
           </a:xfrm>
           <a:prstGeom prst="rect">
             <a:avLst/>
@@ -2452,13 +2783,11 @@
               <a:buNone/>
             </a:pPr>
             <a:r>
-              <a:rPr lang="ru-RU" sz="1600" dirty="0">
+              <a:rPr lang="ru-RU" sz="2400" dirty="0">
                 <a:solidFill>
                   <a:srgbClr val="384653"/>
                 </a:solidFill>
-                <a:latin typeface="Montserrat Bold" pitchFamily="34" charset="0"/>
-                <a:ea typeface="Montserrat Bold" pitchFamily="34" charset="-122"/>
-                <a:cs typeface="Montserrat Bold" pitchFamily="34" charset="-120"/>
+                <a:latin typeface="Montserrat" pitchFamily="34" charset="0"/>
               </a:rPr>
               <a:t>Выполнил: Высоцкий Максим Леонидович,</a:t>
             </a:r>
@@ -2471,13 +2800,11 @@
               <a:buNone/>
             </a:pPr>
             <a:r>
-              <a:rPr lang="ru-RU" sz="1600" dirty="0">
+              <a:rPr lang="ru-RU" sz="2400" dirty="0">
                 <a:solidFill>
                   <a:srgbClr val="384653"/>
                 </a:solidFill>
-                <a:latin typeface="Montserrat Bold" pitchFamily="34" charset="0"/>
-                <a:ea typeface="Montserrat Bold" pitchFamily="34" charset="-122"/>
-                <a:cs typeface="Montserrat Bold" pitchFamily="34" charset="-120"/>
+                <a:latin typeface="Montserrat" pitchFamily="34" charset="0"/>
               </a:rPr>
               <a:t>студент группы 10702121</a:t>
             </a:r>
@@ -2490,35 +2817,29 @@
               <a:buNone/>
             </a:pPr>
             <a:r>
-              <a:rPr lang="ru-RU" sz="1600" dirty="0">
+              <a:rPr lang="ru-RU" sz="2400" dirty="0">
                 <a:solidFill>
                   <a:srgbClr val="384653"/>
                 </a:solidFill>
-                <a:latin typeface="Montserrat Bold" pitchFamily="34" charset="0"/>
-                <a:ea typeface="Montserrat Bold" pitchFamily="34" charset="-122"/>
-                <a:cs typeface="Montserrat Bold" pitchFamily="34" charset="-120"/>
+                <a:latin typeface="Montserrat" pitchFamily="34" charset="0"/>
               </a:rPr>
               <a:t>Руководитель: </a:t>
             </a:r>
             <a:r>
-              <a:rPr lang="ru-RU" sz="1600" dirty="0" err="1">
+              <a:rPr lang="ru-RU" sz="2400" dirty="0" err="1">
                 <a:solidFill>
                   <a:srgbClr val="384653"/>
                 </a:solidFill>
-                <a:latin typeface="Montserrat Bold" pitchFamily="34" charset="0"/>
-                <a:ea typeface="Montserrat Bold" pitchFamily="34" charset="-122"/>
-                <a:cs typeface="Montserrat Bold" pitchFamily="34" charset="-120"/>
+                <a:latin typeface="Montserrat" pitchFamily="34" charset="0"/>
               </a:rPr>
               <a:t>Сидорик</a:t>
             </a:r>
             <a:r>
-              <a:rPr lang="ru-RU" sz="1600" dirty="0">
+              <a:rPr lang="ru-RU" sz="2400" dirty="0">
                 <a:solidFill>
                   <a:srgbClr val="384653"/>
                 </a:solidFill>
-                <a:latin typeface="Montserrat Bold" pitchFamily="34" charset="0"/>
-                <a:ea typeface="Montserrat Bold" pitchFamily="34" charset="-122"/>
-                <a:cs typeface="Montserrat Bold" pitchFamily="34" charset="-120"/>
+                <a:latin typeface="Montserrat" pitchFamily="34" charset="0"/>
               </a:rPr>
               <a:t> Валерий Владимирович,</a:t>
             </a:r>
@@ -2531,16 +2852,767 @@
               <a:buNone/>
             </a:pPr>
             <a:r>
-              <a:rPr lang="ru-RU" sz="1600" dirty="0">
+              <a:rPr lang="ru-RU" sz="2400" dirty="0">
                 <a:solidFill>
                   <a:srgbClr val="384653"/>
                 </a:solidFill>
-                <a:latin typeface="Montserrat Bold" pitchFamily="34" charset="0"/>
-                <a:ea typeface="Montserrat Bold" pitchFamily="34" charset="-122"/>
-                <a:cs typeface="Montserrat Bold" pitchFamily="34" charset="-120"/>
+                <a:latin typeface="Montserrat" pitchFamily="34" charset="0"/>
               </a:rPr>
               <a:t>к.ф.-м.н., доцент</a:t>
             </a:r>
+          </a:p>
+        </p:txBody>
+      </p:sp>
+    </p:spTree>
+  </p:cSld>
+  <p:clrMapOvr>
+    <a:masterClrMapping/>
+  </p:clrMapOvr>
+</p:sld>
+</file>
+
+<file path=ppt/slides/slide10.xml><?xml version="1.0" encoding="utf-8"?>
+<p:sld xmlns:a="http://schemas.openxmlformats.org/drawingml/2006/main" xmlns:r="http://schemas.openxmlformats.org/officeDocument/2006/relationships" xmlns:p="http://schemas.openxmlformats.org/presentationml/2006/main">
+  <p:cSld name="Slide 9">
+    <p:spTree>
+      <p:nvGrpSpPr>
+        <p:cNvPr id="1" name=""/>
+        <p:cNvGrpSpPr/>
+        <p:nvPr/>
+      </p:nvGrpSpPr>
+      <p:grpSpPr>
+        <a:xfrm>
+          <a:off x="0" y="0"/>
+          <a:ext cx="0" cy="0"/>
+          <a:chOff x="0" y="0"/>
+          <a:chExt cx="0" cy="0"/>
+        </a:xfrm>
+      </p:grpSpPr>
+      <p:sp>
+        <p:nvSpPr>
+          <p:cNvPr id="2" name="Text 0"/>
+          <p:cNvSpPr/>
+          <p:nvPr/>
+        </p:nvSpPr>
+        <p:spPr>
+          <a:xfrm>
+            <a:off x="758309" y="1179671"/>
+            <a:ext cx="7374969" cy="712708"/>
+          </a:xfrm>
+          <a:prstGeom prst="rect">
+            <a:avLst/>
+          </a:prstGeom>
+          <a:noFill/>
+          <a:ln/>
+        </p:spPr>
+        <p:txBody>
+          <a:bodyPr wrap="none" lIns="0" tIns="0" rIns="0" bIns="0" rtlCol="0" anchor="t"/>
+          <a:lstStyle/>
+          <a:p>
+            <a:pPr marL="0" indent="0" algn="l">
+              <a:lnSpc>
+                <a:spcPts val="5600"/>
+              </a:lnSpc>
+              <a:buNone/>
+            </a:pPr>
+            <a:r>
+              <a:rPr lang="en-US" sz="4450" b="1" dirty="0" err="1">
+                <a:solidFill>
+                  <a:srgbClr val="2E3C4E"/>
+                </a:solidFill>
+                <a:latin typeface="Barlow Bold" pitchFamily="34" charset="0"/>
+                <a:ea typeface="Barlow Bold" pitchFamily="34" charset="-122"/>
+                <a:cs typeface="Barlow Bold" pitchFamily="34" charset="-120"/>
+              </a:rPr>
+              <a:t>Преимущества</a:t>
+            </a:r>
+            <a:r>
+              <a:rPr lang="en-US" sz="4450" b="1" dirty="0">
+                <a:solidFill>
+                  <a:srgbClr val="2E3C4E"/>
+                </a:solidFill>
+                <a:latin typeface="Barlow Bold" pitchFamily="34" charset="0"/>
+                <a:ea typeface="Barlow Bold" pitchFamily="34" charset="-122"/>
+                <a:cs typeface="Barlow Bold" pitchFamily="34" charset="-120"/>
+              </a:rPr>
+              <a:t> решения</a:t>
+            </a:r>
+            <a:endParaRPr lang="en-US" sz="4450" dirty="0"/>
+          </a:p>
+        </p:txBody>
+      </p:sp>
+      <p:pic>
+        <p:nvPicPr>
+          <p:cNvPr id="3" name="Image 0" descr="preencoded.png"/>
+          <p:cNvPicPr>
+            <a:picLocks noChangeAspect="1"/>
+          </p:cNvPicPr>
+          <p:nvPr/>
+        </p:nvPicPr>
+        <p:blipFill>
+          <a:blip r:embed="rId3"/>
+          <a:stretch>
+            <a:fillRect/>
+          </a:stretch>
+        </p:blipFill>
+        <p:spPr>
+          <a:xfrm>
+            <a:off x="758309" y="2662833"/>
+            <a:ext cx="4190762" cy="2590086"/>
+          </a:xfrm>
+          <a:prstGeom prst="rect">
+            <a:avLst/>
+          </a:prstGeom>
+        </p:spPr>
+      </p:pic>
+      <p:sp>
+        <p:nvSpPr>
+          <p:cNvPr id="4" name="Text 1"/>
+          <p:cNvSpPr/>
+          <p:nvPr/>
+        </p:nvSpPr>
+        <p:spPr>
+          <a:xfrm>
+            <a:off x="758309" y="5523667"/>
+            <a:ext cx="2910245" cy="356235"/>
+          </a:xfrm>
+          <a:prstGeom prst="rect">
+            <a:avLst/>
+          </a:prstGeom>
+          <a:noFill/>
+          <a:ln/>
+        </p:spPr>
+        <p:txBody>
+          <a:bodyPr wrap="none" lIns="0" tIns="0" rIns="0" bIns="0" rtlCol="0" anchor="t"/>
+          <a:lstStyle/>
+          <a:p>
+            <a:pPr marL="0" indent="0" algn="l">
+              <a:lnSpc>
+                <a:spcPts val="2800"/>
+              </a:lnSpc>
+              <a:buNone/>
+            </a:pPr>
+            <a:r>
+              <a:rPr lang="en-US" sz="3200" b="1" dirty="0" err="1">
+                <a:solidFill>
+                  <a:srgbClr val="384653"/>
+                </a:solidFill>
+                <a:latin typeface="Barlow Bold" pitchFamily="34" charset="0"/>
+                <a:ea typeface="Barlow Bold" pitchFamily="34" charset="-122"/>
+                <a:cs typeface="Barlow Bold" pitchFamily="34" charset="-120"/>
+              </a:rPr>
+              <a:t>Экономия</a:t>
+            </a:r>
+            <a:r>
+              <a:rPr lang="en-US" sz="3200" b="1" dirty="0">
+                <a:solidFill>
+                  <a:srgbClr val="384653"/>
+                </a:solidFill>
+                <a:latin typeface="Barlow Bold" pitchFamily="34" charset="0"/>
+                <a:ea typeface="Barlow Bold" pitchFamily="34" charset="-122"/>
+                <a:cs typeface="Barlow Bold" pitchFamily="34" charset="-120"/>
+              </a:rPr>
+              <a:t> </a:t>
+            </a:r>
+            <a:endParaRPr lang="ru-RU" sz="3200" b="1" dirty="0">
+              <a:solidFill>
+                <a:srgbClr val="384653"/>
+              </a:solidFill>
+              <a:latin typeface="Barlow Bold" pitchFamily="34" charset="0"/>
+              <a:ea typeface="Barlow Bold" pitchFamily="34" charset="-122"/>
+              <a:cs typeface="Barlow Bold" pitchFamily="34" charset="-120"/>
+            </a:endParaRPr>
+          </a:p>
+          <a:p>
+            <a:pPr marL="0" indent="0" algn="l">
+              <a:lnSpc>
+                <a:spcPts val="2800"/>
+              </a:lnSpc>
+              <a:buNone/>
+            </a:pPr>
+            <a:r>
+              <a:rPr lang="en-US" sz="3200" b="1" dirty="0" err="1">
+                <a:solidFill>
+                  <a:srgbClr val="384653"/>
+                </a:solidFill>
+                <a:latin typeface="Barlow Bold" pitchFamily="34" charset="0"/>
+                <a:ea typeface="Barlow Bold" pitchFamily="34" charset="-122"/>
+                <a:cs typeface="Barlow Bold" pitchFamily="34" charset="-120"/>
+              </a:rPr>
+              <a:t>времени</a:t>
+            </a:r>
+            <a:endParaRPr lang="en-US" sz="3200" dirty="0"/>
+          </a:p>
+        </p:txBody>
+      </p:sp>
+      <p:sp>
+        <p:nvSpPr>
+          <p:cNvPr id="5" name="Text 2"/>
+          <p:cNvSpPr/>
+          <p:nvPr/>
+        </p:nvSpPr>
+        <p:spPr>
+          <a:xfrm>
+            <a:off x="758309" y="6346982"/>
+            <a:ext cx="4190762" cy="702945"/>
+          </a:xfrm>
+          <a:prstGeom prst="rect">
+            <a:avLst/>
+          </a:prstGeom>
+          <a:noFill/>
+          <a:ln/>
+        </p:spPr>
+        <p:txBody>
+          <a:bodyPr wrap="none" lIns="0" tIns="0" rIns="0" bIns="0" rtlCol="0" anchor="t"/>
+          <a:lstStyle/>
+          <a:p>
+            <a:pPr marL="0" indent="0" algn="l">
+              <a:lnSpc>
+                <a:spcPts val="2700"/>
+              </a:lnSpc>
+              <a:buNone/>
+            </a:pPr>
+            <a:r>
+              <a:rPr lang="en-US" sz="2400" dirty="0" err="1">
+                <a:solidFill>
+                  <a:srgbClr val="384653"/>
+                </a:solidFill>
+                <a:latin typeface="Montserrat" pitchFamily="34" charset="0"/>
+                <a:ea typeface="Montserrat" pitchFamily="34" charset="-122"/>
+                <a:cs typeface="Montserrat" pitchFamily="34" charset="-120"/>
+              </a:rPr>
+              <a:t>Сокращение</a:t>
+            </a:r>
+            <a:r>
+              <a:rPr lang="en-US" sz="2400" dirty="0">
+                <a:solidFill>
+                  <a:srgbClr val="384653"/>
+                </a:solidFill>
+                <a:latin typeface="Montserrat" pitchFamily="34" charset="0"/>
+                <a:ea typeface="Montserrat" pitchFamily="34" charset="-122"/>
+                <a:cs typeface="Montserrat" pitchFamily="34" charset="-120"/>
+              </a:rPr>
+              <a:t> </a:t>
+            </a:r>
+            <a:endParaRPr lang="ru-RU" sz="2400" dirty="0">
+              <a:solidFill>
+                <a:srgbClr val="384653"/>
+              </a:solidFill>
+              <a:latin typeface="Montserrat" pitchFamily="34" charset="0"/>
+              <a:ea typeface="Montserrat" pitchFamily="34" charset="-122"/>
+              <a:cs typeface="Montserrat" pitchFamily="34" charset="-120"/>
+            </a:endParaRPr>
+          </a:p>
+          <a:p>
+            <a:pPr marL="0" indent="0" algn="l">
+              <a:lnSpc>
+                <a:spcPts val="2700"/>
+              </a:lnSpc>
+              <a:buNone/>
+            </a:pPr>
+            <a:r>
+              <a:rPr lang="en-US" sz="2400" dirty="0" err="1">
+                <a:solidFill>
+                  <a:srgbClr val="384653"/>
+                </a:solidFill>
+                <a:latin typeface="Montserrat" pitchFamily="34" charset="0"/>
+                <a:ea typeface="Montserrat" pitchFamily="34" charset="-122"/>
+                <a:cs typeface="Montserrat" pitchFamily="34" charset="-120"/>
+              </a:rPr>
+              <a:t>рутинных</a:t>
+            </a:r>
+            <a:r>
+              <a:rPr lang="en-US" sz="2400" dirty="0">
+                <a:solidFill>
+                  <a:srgbClr val="384653"/>
+                </a:solidFill>
+                <a:latin typeface="Montserrat" pitchFamily="34" charset="0"/>
+                <a:ea typeface="Montserrat" pitchFamily="34" charset="-122"/>
+                <a:cs typeface="Montserrat" pitchFamily="34" charset="-120"/>
+              </a:rPr>
+              <a:t> </a:t>
+            </a:r>
+            <a:r>
+              <a:rPr lang="en-US" sz="2400" dirty="0" err="1">
+                <a:solidFill>
+                  <a:srgbClr val="384653"/>
+                </a:solidFill>
+                <a:latin typeface="Montserrat" pitchFamily="34" charset="0"/>
+                <a:ea typeface="Montserrat" pitchFamily="34" charset="-122"/>
+                <a:cs typeface="Montserrat" pitchFamily="34" charset="-120"/>
+              </a:rPr>
+              <a:t>операций</a:t>
+            </a:r>
+            <a:endParaRPr lang="en-US" sz="2400" dirty="0"/>
+          </a:p>
+        </p:txBody>
+      </p:sp>
+      <p:pic>
+        <p:nvPicPr>
+          <p:cNvPr id="6" name="Image 1" descr="preencoded.png"/>
+          <p:cNvPicPr>
+            <a:picLocks noChangeAspect="1"/>
+          </p:cNvPicPr>
+          <p:nvPr/>
+        </p:nvPicPr>
+        <p:blipFill>
+          <a:blip r:embed="rId4"/>
+          <a:stretch>
+            <a:fillRect/>
+          </a:stretch>
+        </p:blipFill>
+        <p:spPr>
+          <a:xfrm>
+            <a:off x="5219819" y="2662833"/>
+            <a:ext cx="4190762" cy="2590086"/>
+          </a:xfrm>
+          <a:prstGeom prst="rect">
+            <a:avLst/>
+          </a:prstGeom>
+        </p:spPr>
+      </p:pic>
+      <p:sp>
+        <p:nvSpPr>
+          <p:cNvPr id="7" name="Text 3"/>
+          <p:cNvSpPr/>
+          <p:nvPr/>
+        </p:nvSpPr>
+        <p:spPr>
+          <a:xfrm>
+            <a:off x="5219819" y="5523667"/>
+            <a:ext cx="4039672" cy="356235"/>
+          </a:xfrm>
+          <a:prstGeom prst="rect">
+            <a:avLst/>
+          </a:prstGeom>
+          <a:noFill/>
+          <a:ln/>
+        </p:spPr>
+        <p:txBody>
+          <a:bodyPr wrap="none" lIns="0" tIns="0" rIns="0" bIns="0" rtlCol="0" anchor="t"/>
+          <a:lstStyle/>
+          <a:p>
+            <a:pPr marL="0" indent="0" algn="l">
+              <a:lnSpc>
+                <a:spcPts val="2800"/>
+              </a:lnSpc>
+              <a:buNone/>
+            </a:pPr>
+            <a:r>
+              <a:rPr lang="en-US" sz="3200" b="1" dirty="0" err="1">
+                <a:solidFill>
+                  <a:srgbClr val="384653"/>
+                </a:solidFill>
+                <a:latin typeface="Barlow Bold" pitchFamily="34" charset="0"/>
+                <a:ea typeface="Barlow Bold" pitchFamily="34" charset="-122"/>
+                <a:cs typeface="Barlow Bold" pitchFamily="34" charset="-120"/>
+              </a:rPr>
+              <a:t>Локальное</a:t>
+            </a:r>
+            <a:endParaRPr lang="ru-RU" sz="3200" b="1" dirty="0">
+              <a:solidFill>
+                <a:srgbClr val="384653"/>
+              </a:solidFill>
+              <a:latin typeface="Barlow Bold" pitchFamily="34" charset="0"/>
+              <a:ea typeface="Barlow Bold" pitchFamily="34" charset="-122"/>
+              <a:cs typeface="Barlow Bold" pitchFamily="34" charset="-120"/>
+            </a:endParaRPr>
+          </a:p>
+          <a:p>
+            <a:pPr marL="0" indent="0" algn="l">
+              <a:lnSpc>
+                <a:spcPts val="2800"/>
+              </a:lnSpc>
+              <a:buNone/>
+            </a:pPr>
+            <a:r>
+              <a:rPr lang="en-US" sz="3200" b="1" dirty="0" err="1">
+                <a:solidFill>
+                  <a:srgbClr val="384653"/>
+                </a:solidFill>
+                <a:latin typeface="Barlow Bold" pitchFamily="34" charset="0"/>
+                <a:ea typeface="Barlow Bold" pitchFamily="34" charset="-122"/>
+                <a:cs typeface="Barlow Bold" pitchFamily="34" charset="-120"/>
+              </a:rPr>
+              <a:t>развертывание</a:t>
+            </a:r>
+            <a:endParaRPr lang="en-US" sz="3200" dirty="0"/>
+          </a:p>
+        </p:txBody>
+      </p:sp>
+      <p:sp>
+        <p:nvSpPr>
+          <p:cNvPr id="8" name="Text 4"/>
+          <p:cNvSpPr/>
+          <p:nvPr/>
+        </p:nvSpPr>
+        <p:spPr>
+          <a:xfrm>
+            <a:off x="5219819" y="6356509"/>
+            <a:ext cx="4190762" cy="693420"/>
+          </a:xfrm>
+          <a:prstGeom prst="rect">
+            <a:avLst/>
+          </a:prstGeom>
+          <a:noFill/>
+          <a:ln/>
+        </p:spPr>
+        <p:txBody>
+          <a:bodyPr wrap="square" lIns="0" tIns="0" rIns="0" bIns="0" rtlCol="0" anchor="t"/>
+          <a:lstStyle/>
+          <a:p>
+            <a:pPr marL="0" indent="0" algn="l">
+              <a:lnSpc>
+                <a:spcPts val="2700"/>
+              </a:lnSpc>
+              <a:buNone/>
+            </a:pPr>
+            <a:r>
+              <a:rPr lang="en-US" sz="2400" dirty="0">
+                <a:solidFill>
+                  <a:srgbClr val="384653"/>
+                </a:solidFill>
+                <a:latin typeface="Montserrat" pitchFamily="34" charset="0"/>
+                <a:ea typeface="Montserrat" pitchFamily="34" charset="-122"/>
+                <a:cs typeface="Montserrat" pitchFamily="34" charset="-120"/>
+              </a:rPr>
+              <a:t>Независимость от внешних сервисов</a:t>
+            </a:r>
+            <a:endParaRPr lang="en-US" sz="2400" dirty="0"/>
+          </a:p>
+        </p:txBody>
+      </p:sp>
+      <p:pic>
+        <p:nvPicPr>
+          <p:cNvPr id="9" name="Image 2" descr="preencoded.png"/>
+          <p:cNvPicPr>
+            <a:picLocks noChangeAspect="1"/>
+          </p:cNvPicPr>
+          <p:nvPr/>
+        </p:nvPicPr>
+        <p:blipFill>
+          <a:blip r:embed="rId5"/>
+          <a:stretch>
+            <a:fillRect/>
+          </a:stretch>
+        </p:blipFill>
+        <p:spPr>
+          <a:xfrm>
+            <a:off x="9681329" y="2662833"/>
+            <a:ext cx="4190762" cy="2590086"/>
+          </a:xfrm>
+          <a:prstGeom prst="rect">
+            <a:avLst/>
+          </a:prstGeom>
+        </p:spPr>
+      </p:pic>
+      <p:sp>
+        <p:nvSpPr>
+          <p:cNvPr id="10" name="Text 5"/>
+          <p:cNvSpPr/>
+          <p:nvPr/>
+        </p:nvSpPr>
+        <p:spPr>
+          <a:xfrm>
+            <a:off x="9681329" y="5523667"/>
+            <a:ext cx="4190762" cy="486132"/>
+          </a:xfrm>
+          <a:prstGeom prst="rect">
+            <a:avLst/>
+          </a:prstGeom>
+          <a:noFill/>
+          <a:ln/>
+        </p:spPr>
+        <p:txBody>
+          <a:bodyPr wrap="square" lIns="0" tIns="0" rIns="0" bIns="0" rtlCol="0" anchor="t"/>
+          <a:lstStyle/>
+          <a:p>
+            <a:pPr marL="0" indent="0" algn="l">
+              <a:lnSpc>
+                <a:spcPts val="2800"/>
+              </a:lnSpc>
+              <a:buNone/>
+            </a:pPr>
+            <a:r>
+              <a:rPr lang="en-US" sz="3200" b="1" dirty="0">
+                <a:solidFill>
+                  <a:srgbClr val="384653"/>
+                </a:solidFill>
+                <a:latin typeface="Barlow Bold" pitchFamily="34" charset="0"/>
+                <a:ea typeface="Barlow Bold" pitchFamily="34" charset="-122"/>
+                <a:cs typeface="Barlow Bold" pitchFamily="34" charset="-120"/>
+              </a:rPr>
+              <a:t>Повышение эффективности</a:t>
+            </a:r>
+            <a:endParaRPr lang="en-US" sz="3200" dirty="0"/>
+          </a:p>
+        </p:txBody>
+      </p:sp>
+      <p:sp>
+        <p:nvSpPr>
+          <p:cNvPr id="11" name="Text 6"/>
+          <p:cNvSpPr/>
+          <p:nvPr/>
+        </p:nvSpPr>
+        <p:spPr>
+          <a:xfrm>
+            <a:off x="9681329" y="6356508"/>
+            <a:ext cx="4190762" cy="693419"/>
+          </a:xfrm>
+          <a:prstGeom prst="rect">
+            <a:avLst/>
+          </a:prstGeom>
+          <a:noFill/>
+          <a:ln/>
+        </p:spPr>
+        <p:txBody>
+          <a:bodyPr wrap="none" lIns="0" tIns="0" rIns="0" bIns="0" rtlCol="0" anchor="t"/>
+          <a:lstStyle/>
+          <a:p>
+            <a:pPr marL="0" indent="0" algn="l">
+              <a:lnSpc>
+                <a:spcPts val="2700"/>
+              </a:lnSpc>
+              <a:buNone/>
+            </a:pPr>
+            <a:r>
+              <a:rPr lang="en-US" sz="2400" dirty="0" err="1">
+                <a:solidFill>
+                  <a:srgbClr val="384653"/>
+                </a:solidFill>
+                <a:latin typeface="Montserrat" pitchFamily="34" charset="0"/>
+                <a:ea typeface="Montserrat" pitchFamily="34" charset="-122"/>
+                <a:cs typeface="Montserrat" pitchFamily="34" charset="-120"/>
+              </a:rPr>
+              <a:t>Минимизация</a:t>
+            </a:r>
+            <a:r>
+              <a:rPr lang="en-US" sz="2400" dirty="0">
+                <a:solidFill>
+                  <a:srgbClr val="384653"/>
+                </a:solidFill>
+                <a:latin typeface="Montserrat" pitchFamily="34" charset="0"/>
+                <a:ea typeface="Montserrat" pitchFamily="34" charset="-122"/>
+                <a:cs typeface="Montserrat" pitchFamily="34" charset="-120"/>
+              </a:rPr>
+              <a:t> </a:t>
+            </a:r>
+            <a:endParaRPr lang="ru-RU" sz="2400" dirty="0">
+              <a:solidFill>
+                <a:srgbClr val="384653"/>
+              </a:solidFill>
+              <a:latin typeface="Montserrat" pitchFamily="34" charset="0"/>
+              <a:ea typeface="Montserrat" pitchFamily="34" charset="-122"/>
+              <a:cs typeface="Montserrat" pitchFamily="34" charset="-120"/>
+            </a:endParaRPr>
+          </a:p>
+          <a:p>
+            <a:pPr marL="0" indent="0" algn="l">
+              <a:lnSpc>
+                <a:spcPts val="2700"/>
+              </a:lnSpc>
+              <a:buNone/>
+            </a:pPr>
+            <a:r>
+              <a:rPr lang="en-US" sz="2400" dirty="0" err="1">
+                <a:solidFill>
+                  <a:srgbClr val="384653"/>
+                </a:solidFill>
+                <a:latin typeface="Montserrat" pitchFamily="34" charset="0"/>
+                <a:ea typeface="Montserrat" pitchFamily="34" charset="-122"/>
+                <a:cs typeface="Montserrat" pitchFamily="34" charset="-120"/>
+              </a:rPr>
+              <a:t>ошибок</a:t>
+            </a:r>
+            <a:r>
+              <a:rPr lang="en-US" sz="2400" dirty="0">
+                <a:solidFill>
+                  <a:srgbClr val="384653"/>
+                </a:solidFill>
+                <a:latin typeface="Montserrat" pitchFamily="34" charset="0"/>
+                <a:ea typeface="Montserrat" pitchFamily="34" charset="-122"/>
+                <a:cs typeface="Montserrat" pitchFamily="34" charset="-120"/>
+              </a:rPr>
+              <a:t> </a:t>
+            </a:r>
+            <a:r>
+              <a:rPr lang="en-US" sz="2400" dirty="0" err="1">
+                <a:solidFill>
+                  <a:srgbClr val="384653"/>
+                </a:solidFill>
+                <a:latin typeface="Montserrat" pitchFamily="34" charset="0"/>
+                <a:ea typeface="Montserrat" pitchFamily="34" charset="-122"/>
+                <a:cs typeface="Montserrat" pitchFamily="34" charset="-120"/>
+              </a:rPr>
+              <a:t>при</a:t>
+            </a:r>
+            <a:r>
+              <a:rPr lang="en-US" sz="2400" dirty="0">
+                <a:solidFill>
+                  <a:srgbClr val="384653"/>
+                </a:solidFill>
+                <a:latin typeface="Montserrat" pitchFamily="34" charset="0"/>
+                <a:ea typeface="Montserrat" pitchFamily="34" charset="-122"/>
+                <a:cs typeface="Montserrat" pitchFamily="34" charset="-120"/>
+              </a:rPr>
+              <a:t> учете</a:t>
+            </a:r>
+            <a:endParaRPr lang="en-US" sz="2400" dirty="0"/>
+          </a:p>
+        </p:txBody>
+      </p:sp>
+      <p:sp>
+        <p:nvSpPr>
+          <p:cNvPr id="12" name="Прямоугольник 11">
+            <a:extLst>
+              <a:ext uri="{FF2B5EF4-FFF2-40B4-BE49-F238E27FC236}">
+                <a16:creationId xmlns:a16="http://schemas.microsoft.com/office/drawing/2014/main" id="{B48C373F-13EC-E30D-77FE-6C8059EB637E}"/>
+              </a:ext>
+            </a:extLst>
+          </p:cNvPr>
+          <p:cNvSpPr/>
+          <p:nvPr/>
+        </p:nvSpPr>
+        <p:spPr>
+          <a:xfrm>
+            <a:off x="12601575" y="7591425"/>
+            <a:ext cx="1933575" cy="531495"/>
+          </a:xfrm>
+          <a:prstGeom prst="rect">
+            <a:avLst/>
+          </a:prstGeom>
+          <a:solidFill>
+            <a:schemeClr val="bg1"/>
+          </a:solidFill>
+          <a:ln>
+            <a:solidFill>
+              <a:schemeClr val="bg1"/>
+            </a:solidFill>
+          </a:ln>
+        </p:spPr>
+        <p:style>
+          <a:lnRef idx="2">
+            <a:schemeClr val="dk1"/>
+          </a:lnRef>
+          <a:fillRef idx="1">
+            <a:schemeClr val="lt1"/>
+          </a:fillRef>
+          <a:effectRef idx="0">
+            <a:schemeClr val="dk1"/>
+          </a:effectRef>
+          <a:fontRef idx="minor">
+            <a:schemeClr val="dk1"/>
+          </a:fontRef>
+        </p:style>
+        <p:txBody>
+          <a:bodyPr rtlCol="0" anchor="ctr"/>
+          <a:lstStyle/>
+          <a:p>
+            <a:pPr algn="ctr"/>
+            <a:endParaRPr lang="ru-RU"/>
+          </a:p>
+        </p:txBody>
+      </p:sp>
+      <p:sp>
+        <p:nvSpPr>
+          <p:cNvPr id="14" name="TextBox 13">
+            <a:extLst>
+              <a:ext uri="{FF2B5EF4-FFF2-40B4-BE49-F238E27FC236}">
+                <a16:creationId xmlns:a16="http://schemas.microsoft.com/office/drawing/2014/main" id="{7A13F9F6-8A51-2CB9-DF12-8840B567AA63}"/>
+              </a:ext>
+            </a:extLst>
+          </p:cNvPr>
+          <p:cNvSpPr txBox="1"/>
+          <p:nvPr/>
+        </p:nvSpPr>
+        <p:spPr>
+          <a:xfrm>
+            <a:off x="758309" y="1828706"/>
+            <a:ext cx="11071018" cy="438582"/>
+          </a:xfrm>
+          <a:prstGeom prst="rect">
+            <a:avLst/>
+          </a:prstGeom>
+          <a:noFill/>
+        </p:spPr>
+        <p:txBody>
+          <a:bodyPr wrap="square">
+            <a:spAutoFit/>
+          </a:bodyPr>
+          <a:lstStyle/>
+          <a:p>
+            <a:pPr marL="0" indent="0" algn="l">
+              <a:lnSpc>
+                <a:spcPts val="2700"/>
+              </a:lnSpc>
+              <a:buNone/>
+            </a:pPr>
+            <a:r>
+              <a:rPr lang="ru-RU" sz="2400" dirty="0">
+                <a:solidFill>
+                  <a:srgbClr val="384653"/>
+                </a:solidFill>
+                <a:latin typeface="Montserrat" pitchFamily="34" charset="0"/>
+                <a:ea typeface="Montserrat" pitchFamily="34" charset="-122"/>
+                <a:cs typeface="Montserrat" pitchFamily="34" charset="-120"/>
+              </a:rPr>
+              <a:t>Реализованное приложение дает следующие преимущества:</a:t>
+            </a:r>
+            <a:endParaRPr lang="en-US" sz="2400" dirty="0"/>
+          </a:p>
+        </p:txBody>
+      </p:sp>
+      <p:sp>
+        <p:nvSpPr>
+          <p:cNvPr id="13" name="Овал 12">
+            <a:extLst>
+              <a:ext uri="{FF2B5EF4-FFF2-40B4-BE49-F238E27FC236}">
+                <a16:creationId xmlns:a16="http://schemas.microsoft.com/office/drawing/2014/main" id="{D3F47D8A-925D-2787-E045-3147E9F45205}"/>
+              </a:ext>
+            </a:extLst>
+          </p:cNvPr>
+          <p:cNvSpPr/>
+          <p:nvPr/>
+        </p:nvSpPr>
+        <p:spPr>
+          <a:xfrm>
+            <a:off x="13821273" y="7454726"/>
+            <a:ext cx="557917" cy="483472"/>
+          </a:xfrm>
+          <a:prstGeom prst="ellipse">
+            <a:avLst/>
+          </a:prstGeom>
+          <a:solidFill>
+            <a:srgbClr val="D4E9F7"/>
+          </a:solidFill>
+          <a:ln>
+            <a:noFill/>
+          </a:ln>
+        </p:spPr>
+        <p:style>
+          <a:lnRef idx="1">
+            <a:schemeClr val="accent5"/>
+          </a:lnRef>
+          <a:fillRef idx="2">
+            <a:schemeClr val="accent5"/>
+          </a:fillRef>
+          <a:effectRef idx="1">
+            <a:schemeClr val="accent5"/>
+          </a:effectRef>
+          <a:fontRef idx="minor">
+            <a:schemeClr val="dk1"/>
+          </a:fontRef>
+        </p:style>
+        <p:txBody>
+          <a:bodyPr rtlCol="0" anchor="ctr"/>
+          <a:lstStyle/>
+          <a:p>
+            <a:pPr algn="ctr"/>
+            <a:r>
+              <a:rPr lang="en-US" sz="1600" dirty="0"/>
+              <a:t>10</a:t>
+            </a:r>
+            <a:endParaRPr lang="ru-RU" dirty="0"/>
           </a:p>
         </p:txBody>
       </p:sp>
@@ -2714,7 +3786,7 @@
               <a:buNone/>
             </a:pPr>
             <a:r>
-              <a:rPr lang="en-US" sz="2200" b="1" dirty="0">
+              <a:rPr lang="en-US" sz="3200" b="1" dirty="0">
                 <a:solidFill>
                   <a:srgbClr val="384653"/>
                 </a:solidFill>
@@ -2724,7 +3796,7 @@
               </a:rPr>
               <a:t>Временные затраты</a:t>
             </a:r>
-            <a:endParaRPr lang="en-US" sz="2200" dirty="0"/>
+            <a:endParaRPr lang="en-US" sz="3200" dirty="0"/>
           </a:p>
         </p:txBody>
       </p:sp>
@@ -2737,7 +3809,7 @@
         <p:spPr>
           <a:xfrm>
             <a:off x="1462326" y="4431387"/>
-            <a:ext cx="2974300" cy="693420"/>
+            <a:ext cx="2974300" cy="1024868"/>
           </a:xfrm>
           <a:prstGeom prst="rect">
             <a:avLst/>
@@ -2756,7 +3828,7 @@
               <a:buNone/>
             </a:pPr>
             <a:r>
-              <a:rPr lang="en-US" sz="1700" dirty="0">
+              <a:rPr lang="en-US" sz="2400" dirty="0">
                 <a:solidFill>
                   <a:srgbClr val="384653"/>
                 </a:solidFill>
@@ -2766,7 +3838,7 @@
               </a:rPr>
               <a:t>Ручная обработка требует много времени</a:t>
             </a:r>
-            <a:endParaRPr lang="en-US" sz="1700" dirty="0"/>
+            <a:endParaRPr lang="en-US" sz="2400" dirty="0"/>
           </a:p>
         </p:txBody>
       </p:sp>
@@ -2849,7 +3921,7 @@
               <a:buNone/>
             </a:pPr>
             <a:r>
-              <a:rPr lang="en-US" sz="2200" b="1" dirty="0">
+              <a:rPr lang="en-US" sz="3200" b="1" dirty="0">
                 <a:solidFill>
                   <a:srgbClr val="384653"/>
                 </a:solidFill>
@@ -2859,7 +3931,7 @@
               </a:rPr>
               <a:t>Вероятность ошибок</a:t>
             </a:r>
-            <a:endParaRPr lang="en-US" sz="2200" dirty="0"/>
+            <a:endParaRPr lang="en-US" sz="3200" dirty="0"/>
           </a:p>
         </p:txBody>
       </p:sp>
@@ -2872,7 +3944,7 @@
         <p:spPr>
           <a:xfrm>
             <a:off x="5411391" y="4431387"/>
-            <a:ext cx="2974300" cy="693420"/>
+            <a:ext cx="2974300" cy="1024868"/>
           </a:xfrm>
           <a:prstGeom prst="rect">
             <a:avLst/>
@@ -2891,7 +3963,7 @@
               <a:buNone/>
             </a:pPr>
             <a:r>
-              <a:rPr lang="en-US" sz="1700" dirty="0">
+              <a:rPr lang="en-US" sz="2400" dirty="0">
                 <a:solidFill>
                   <a:srgbClr val="384653"/>
                 </a:solidFill>
@@ -2901,7 +3973,7 @@
               </a:rPr>
               <a:t>Человеческий фактор снижает точность</a:t>
             </a:r>
-            <a:endParaRPr lang="en-US" sz="1700" dirty="0"/>
+            <a:endParaRPr lang="en-US" sz="2400" dirty="0"/>
           </a:p>
         </p:txBody>
       </p:sp>
@@ -2913,7 +3985,7 @@
         </p:nvSpPr>
         <p:spPr>
           <a:xfrm>
-            <a:off x="758309" y="5558076"/>
+            <a:off x="758309" y="6118622"/>
             <a:ext cx="487442" cy="487442"/>
           </a:xfrm>
           <a:prstGeom prst="roundRect">
@@ -2948,7 +4020,7 @@
         </p:blipFill>
         <p:spPr>
           <a:xfrm>
-            <a:off x="830997" y="5588020"/>
+            <a:off x="830997" y="6148566"/>
             <a:ext cx="342067" cy="427553"/>
           </a:xfrm>
           <a:prstGeom prst="rect">
@@ -2964,7 +4036,7 @@
         </p:nvSpPr>
         <p:spPr>
           <a:xfrm>
-            <a:off x="1462326" y="5632490"/>
+            <a:off x="1462326" y="6193036"/>
             <a:ext cx="2944892" cy="356235"/>
           </a:xfrm>
           <a:prstGeom prst="rect">
@@ -2984,7 +4056,7 @@
               <a:buNone/>
             </a:pPr>
             <a:r>
-              <a:rPr lang="en-US" sz="2200" b="1" dirty="0">
+              <a:rPr lang="en-US" sz="3200" b="1" dirty="0">
                 <a:solidFill>
                   <a:srgbClr val="384653"/>
                 </a:solidFill>
@@ -2994,7 +4066,7 @@
               </a:rPr>
               <a:t>Сложность анализа</a:t>
             </a:r>
-            <a:endParaRPr lang="en-US" sz="2200" dirty="0"/>
+            <a:endParaRPr lang="en-US" sz="3200" dirty="0"/>
           </a:p>
         </p:txBody>
       </p:sp>
@@ -3006,7 +4078,7 @@
         </p:nvSpPr>
         <p:spPr>
           <a:xfrm>
-            <a:off x="1462326" y="6118622"/>
+            <a:off x="1462326" y="6679168"/>
             <a:ext cx="6923365" cy="346710"/>
           </a:xfrm>
           <a:prstGeom prst="rect">
@@ -3026,7 +4098,7 @@
               <a:buNone/>
             </a:pPr>
             <a:r>
-              <a:rPr lang="en-US" sz="1700" dirty="0">
+              <a:rPr lang="en-US" sz="2400" dirty="0">
                 <a:solidFill>
                   <a:srgbClr val="384653"/>
                 </a:solidFill>
@@ -3036,7 +4108,61 @@
               </a:rPr>
               <a:t>Затруднен сбор статистических данных</a:t>
             </a:r>
-            <a:endParaRPr lang="en-US" sz="1700" dirty="0"/>
+            <a:endParaRPr lang="en-US" sz="2400" dirty="0"/>
+          </a:p>
+        </p:txBody>
+      </p:sp>
+      <p:sp>
+        <p:nvSpPr>
+          <p:cNvPr id="20" name="Овал 19">
+            <a:extLst>
+              <a:ext uri="{FF2B5EF4-FFF2-40B4-BE49-F238E27FC236}">
+                <a16:creationId xmlns:a16="http://schemas.microsoft.com/office/drawing/2014/main" id="{3AEE0C5A-3B8A-FCDE-42BB-9BEEA7F92AEB}"/>
+              </a:ext>
+            </a:extLst>
+          </p:cNvPr>
+          <p:cNvSpPr/>
+          <p:nvPr/>
+        </p:nvSpPr>
+        <p:spPr>
+          <a:xfrm>
+            <a:off x="13821273" y="7454726"/>
+            <a:ext cx="557917" cy="483472"/>
+          </a:xfrm>
+          <a:prstGeom prst="ellipse">
+            <a:avLst/>
+          </a:prstGeom>
+          <a:solidFill>
+            <a:srgbClr val="D4E9F7"/>
+          </a:solidFill>
+          <a:ln>
+            <a:noFill/>
+          </a:ln>
+        </p:spPr>
+        <p:style>
+          <a:lnRef idx="1">
+            <a:schemeClr val="accent5"/>
+          </a:lnRef>
+          <a:fillRef idx="2">
+            <a:schemeClr val="accent5"/>
+          </a:fillRef>
+          <a:effectRef idx="1">
+            <a:schemeClr val="accent5"/>
+          </a:effectRef>
+          <a:fontRef idx="minor">
+            <a:schemeClr val="dk1"/>
+          </a:fontRef>
+        </p:style>
+        <p:txBody>
+          <a:bodyPr rtlCol="0" anchor="ctr"/>
+          <a:lstStyle/>
+          <a:p>
+            <a:pPr algn="ctr"/>
+            <a:r>
+              <a:rPr lang="en-US" sz="1600" dirty="0"/>
+              <a:t>2</a:t>
+            </a:r>
+            <a:endParaRPr lang="ru-RU" dirty="0"/>
           </a:p>
         </p:txBody>
       </p:sp>
@@ -3050,10 +4176,16 @@
 
 <file path=ppt/slides/slide3.xml><?xml version="1.0" encoding="utf-8"?>
 <p:sld xmlns:a="http://schemas.openxmlformats.org/drawingml/2006/main" xmlns:r="http://schemas.openxmlformats.org/officeDocument/2006/relationships" xmlns:p="http://schemas.openxmlformats.org/presentationml/2006/main">
-  <p:cSld name="Slide 3">
+  <p:cSld>
     <p:spTree>
       <p:nvGrpSpPr>
-        <p:cNvPr id="1" name=""/>
+        <p:cNvPr id="1" name="">
+          <a:extLst>
+            <a:ext uri="{FF2B5EF4-FFF2-40B4-BE49-F238E27FC236}">
+              <a16:creationId xmlns:a16="http://schemas.microsoft.com/office/drawing/2014/main" id="{088DAC92-C8C3-95F5-A884-FEC0CC018611}"/>
+            </a:ext>
+          </a:extLst>
+        </p:cNvPr>
         <p:cNvGrpSpPr/>
         <p:nvPr/>
       </p:nvGrpSpPr>
@@ -3067,13 +4199,19 @@
       </p:grpSpPr>
       <p:sp>
         <p:nvSpPr>
-          <p:cNvPr id="2" name="Text 0"/>
-          <p:cNvSpPr/>
-          <p:nvPr/>
-        </p:nvSpPr>
-        <p:spPr>
-          <a:xfrm>
-            <a:off x="758309" y="928687"/>
+          <p:cNvPr id="2" name="Text 0">
+            <a:extLst>
+              <a:ext uri="{FF2B5EF4-FFF2-40B4-BE49-F238E27FC236}">
+                <a16:creationId xmlns:a16="http://schemas.microsoft.com/office/drawing/2014/main" id="{60672D2E-C69C-DB91-69FC-0E155B10FE0D}"/>
+              </a:ext>
+            </a:extLst>
+          </p:cNvPr>
+          <p:cNvSpPr/>
+          <p:nvPr/>
+        </p:nvSpPr>
+        <p:spPr>
+          <a:xfrm>
+            <a:off x="791051" y="542831"/>
             <a:ext cx="7659767" cy="712708"/>
           </a:xfrm>
           <a:prstGeom prst="rect">
@@ -3093,7 +4231,7 @@
               <a:buNone/>
             </a:pPr>
             <a:r>
-              <a:rPr lang="en-US" sz="4450" b="1" dirty="0">
+              <a:rPr lang="en-US" sz="4450" b="1" dirty="0" err="1">
                 <a:solidFill>
                   <a:srgbClr val="2E3C4E"/>
                 </a:solidFill>
@@ -3101,7 +4239,62 @@
                 <a:ea typeface="Barlow Bold" pitchFamily="34" charset="-122"/>
                 <a:cs typeface="Barlow Bold" pitchFamily="34" charset="-120"/>
               </a:rPr>
-              <a:t>Цели и функции системы</a:t>
+              <a:t>Цел</a:t>
+            </a:r>
+            <a:r>
+              <a:rPr lang="ru-RU" sz="4450" b="1" dirty="0">
+                <a:solidFill>
+                  <a:srgbClr val="2E3C4E"/>
+                </a:solidFill>
+                <a:latin typeface="Barlow Bold" pitchFamily="34" charset="0"/>
+                <a:ea typeface="Barlow Bold" pitchFamily="34" charset="-122"/>
+                <a:cs typeface="Barlow Bold" pitchFamily="34" charset="-120"/>
+              </a:rPr>
+              <a:t>ь</a:t>
+            </a:r>
+            <a:r>
+              <a:rPr lang="en-US" sz="4450" b="1" dirty="0">
+                <a:solidFill>
+                  <a:srgbClr val="2E3C4E"/>
+                </a:solidFill>
+                <a:latin typeface="Barlow Bold" pitchFamily="34" charset="0"/>
+                <a:ea typeface="Barlow Bold" pitchFamily="34" charset="-122"/>
+                <a:cs typeface="Barlow Bold" pitchFamily="34" charset="-120"/>
+              </a:rPr>
+              <a:t> и </a:t>
+            </a:r>
+            <a:r>
+              <a:rPr lang="ru-RU" sz="4450" b="1" dirty="0">
+                <a:solidFill>
+                  <a:srgbClr val="2E3C4E"/>
+                </a:solidFill>
+                <a:latin typeface="Barlow Bold" pitchFamily="34" charset="0"/>
+                <a:ea typeface="Barlow Bold" pitchFamily="34" charset="-122"/>
+                <a:cs typeface="Barlow Bold" pitchFamily="34" charset="-120"/>
+              </a:rPr>
+              <a:t>задачи</a:t>
+            </a:r>
+            <a:r>
+              <a:rPr lang="en-US" sz="4450" b="1" dirty="0">
+                <a:solidFill>
+                  <a:srgbClr val="2E3C4E"/>
+                </a:solidFill>
+                <a:latin typeface="Barlow Bold" pitchFamily="34" charset="0"/>
+                <a:ea typeface="Barlow Bold" pitchFamily="34" charset="-122"/>
+                <a:cs typeface="Barlow Bold" pitchFamily="34" charset="-120"/>
+              </a:rPr>
+              <a:t> </a:t>
+            </a:r>
+            <a:r>
+              <a:rPr lang="ru-RU" sz="4450" b="1" dirty="0">
+                <a:solidFill>
+                  <a:srgbClr val="2E3C4E"/>
+                </a:solidFill>
+                <a:latin typeface="Barlow Bold" pitchFamily="34" charset="0"/>
+                <a:ea typeface="Barlow Bold" pitchFamily="34" charset="-122"/>
+                <a:cs typeface="Barlow Bold" pitchFamily="34" charset="-120"/>
+              </a:rPr>
+              <a:t>разработки</a:t>
             </a:r>
             <a:endParaRPr lang="en-US" sz="4450" dirty="0"/>
           </a:p>
@@ -3109,7 +4302,13 @@
       </p:sp>
       <p:pic>
         <p:nvPicPr>
-          <p:cNvPr id="3" name="Image 0" descr="preencoded.png"/>
+          <p:cNvPr id="3" name="Image 0" descr="preencoded.png">
+            <a:extLst>
+              <a:ext uri="{FF2B5EF4-FFF2-40B4-BE49-F238E27FC236}">
+                <a16:creationId xmlns:a16="http://schemas.microsoft.com/office/drawing/2014/main" id="{7106849F-4AA3-D45F-9E4B-A699ED024F5C}"/>
+              </a:ext>
+            </a:extLst>
+          </p:cNvPr>
           <p:cNvPicPr>
             <a:picLocks noChangeAspect="1"/>
           </p:cNvPicPr>
@@ -3123,8 +4322,8 @@
         </p:blipFill>
         <p:spPr>
           <a:xfrm>
-            <a:off x="3225284" y="2074664"/>
-            <a:ext cx="1622822" cy="1265992"/>
+            <a:off x="2459760" y="3470374"/>
+            <a:ext cx="1161956" cy="906462"/>
           </a:xfrm>
           <a:prstGeom prst="rect">
             <a:avLst/>
@@ -3133,7 +4332,13 @@
       </p:pic>
       <p:pic>
         <p:nvPicPr>
-          <p:cNvPr id="4" name="Image 1" descr="preencoded.png"/>
+          <p:cNvPr id="4" name="Image 1" descr="preencoded.png">
+            <a:extLst>
+              <a:ext uri="{FF2B5EF4-FFF2-40B4-BE49-F238E27FC236}">
+                <a16:creationId xmlns:a16="http://schemas.microsoft.com/office/drawing/2014/main" id="{475BF7AF-A458-7F9F-347E-92CF1250A324}"/>
+              </a:ext>
+            </a:extLst>
+          </p:cNvPr>
           <p:cNvPicPr>
             <a:picLocks noChangeAspect="1"/>
           </p:cNvPicPr>
@@ -3147,8 +4352,8 @@
         </p:blipFill>
         <p:spPr>
           <a:xfrm>
-            <a:off x="3884295" y="2674620"/>
-            <a:ext cx="304681" cy="380762"/>
+            <a:off x="2931601" y="3944631"/>
+            <a:ext cx="218156" cy="272630"/>
           </a:xfrm>
           <a:prstGeom prst="rect">
             <a:avLst/>
@@ -3157,56 +4362,20 @@
       </p:pic>
       <p:sp>
         <p:nvSpPr>
-          <p:cNvPr id="5" name="Text 1"/>
-          <p:cNvSpPr/>
-          <p:nvPr/>
-        </p:nvSpPr>
-        <p:spPr>
-          <a:xfrm>
-            <a:off x="5064681" y="2291239"/>
-            <a:ext cx="3610451" cy="356235"/>
-          </a:xfrm>
-          <a:prstGeom prst="rect">
-            <a:avLst/>
-          </a:prstGeom>
-          <a:noFill/>
-          <a:ln/>
-        </p:spPr>
-        <p:txBody>
-          <a:bodyPr wrap="none" lIns="0" tIns="0" rIns="0" bIns="0" rtlCol="0" anchor="t"/>
-          <a:lstStyle/>
-          <a:p>
-            <a:pPr marL="0" indent="0" algn="l">
-              <a:lnSpc>
-                <a:spcPts val="2800"/>
-              </a:lnSpc>
-              <a:buNone/>
-            </a:pPr>
-            <a:r>
-              <a:rPr lang="en-US" sz="2200" b="1" dirty="0">
-                <a:solidFill>
-                  <a:srgbClr val="384653"/>
-                </a:solidFill>
-                <a:latin typeface="Barlow Bold" pitchFamily="34" charset="0"/>
-                <a:ea typeface="Barlow Bold" pitchFamily="34" charset="-122"/>
-                <a:cs typeface="Barlow Bold" pitchFamily="34" charset="-120"/>
-              </a:rPr>
-              <a:t>Статистический анализ</a:t>
-            </a:r>
-            <a:endParaRPr lang="en-US" sz="2200" dirty="0"/>
-          </a:p>
-        </p:txBody>
-      </p:sp>
-      <p:sp>
-        <p:nvSpPr>
-          <p:cNvPr id="6" name="Text 2"/>
-          <p:cNvSpPr/>
-          <p:nvPr/>
-        </p:nvSpPr>
-        <p:spPr>
-          <a:xfrm>
-            <a:off x="5064681" y="2777371"/>
-            <a:ext cx="3610451" cy="346710"/>
+          <p:cNvPr id="6" name="Text 2">
+            <a:extLst>
+              <a:ext uri="{FF2B5EF4-FFF2-40B4-BE49-F238E27FC236}">
+                <a16:creationId xmlns:a16="http://schemas.microsoft.com/office/drawing/2014/main" id="{7315A8A6-71B7-C9D8-0A7F-8F0A05B0D8BF}"/>
+              </a:ext>
+            </a:extLst>
+          </p:cNvPr>
+          <p:cNvSpPr/>
+          <p:nvPr/>
+        </p:nvSpPr>
+        <p:spPr>
+          <a:xfrm>
+            <a:off x="4031073" y="3730168"/>
+            <a:ext cx="9875846" cy="346710"/>
           </a:xfrm>
           <a:prstGeom prst="rect">
             <a:avLst/>
@@ -3225,7 +4394,7 @@
               <a:buNone/>
             </a:pPr>
             <a:r>
-              <a:rPr lang="en-US" sz="1700" dirty="0">
+              <a:rPr lang="ru-RU" sz="2400" dirty="0">
                 <a:solidFill>
                   <a:srgbClr val="384653"/>
                 </a:solidFill>
@@ -3233,37 +4402,21 @@
                 <a:ea typeface="Montserrat" pitchFamily="34" charset="-122"/>
                 <a:cs typeface="Montserrat" pitchFamily="34" charset="-120"/>
               </a:rPr>
-              <a:t>Расчет показателей по группам</a:t>
-            </a:r>
-            <a:endParaRPr lang="en-US" sz="1700" dirty="0"/>
-          </a:p>
-        </p:txBody>
-      </p:sp>
-      <p:sp>
-        <p:nvSpPr>
-          <p:cNvPr id="7" name="Shape 3"/>
-          <p:cNvSpPr/>
-          <p:nvPr/>
-        </p:nvSpPr>
-        <p:spPr>
-          <a:xfrm>
-            <a:off x="4902160" y="3352443"/>
-            <a:ext cx="8915876" cy="15240"/>
-          </a:xfrm>
-          <a:prstGeom prst="roundRect">
-            <a:avLst>
-              <a:gd name="adj" fmla="val 2132502"/>
-            </a:avLst>
-          </a:prstGeom>
-          <a:solidFill>
-            <a:srgbClr val="BACFDD"/>
-          </a:solidFill>
-          <a:ln/>
-        </p:spPr>
+              <a:t>Реализация расчета статистики по группам</a:t>
+            </a:r>
+            <a:endParaRPr lang="en-US" sz="2400" dirty="0"/>
+          </a:p>
+        </p:txBody>
       </p:sp>
       <p:pic>
         <p:nvPicPr>
-          <p:cNvPr id="8" name="Image 2" descr="preencoded.png"/>
+          <p:cNvPr id="8" name="Image 2" descr="preencoded.png">
+            <a:extLst>
+              <a:ext uri="{FF2B5EF4-FFF2-40B4-BE49-F238E27FC236}">
+                <a16:creationId xmlns:a16="http://schemas.microsoft.com/office/drawing/2014/main" id="{86A36499-EC6B-C659-0954-AC90E1E684CD}"/>
+              </a:ext>
+            </a:extLst>
+          </p:cNvPr>
           <p:cNvPicPr>
             <a:picLocks noChangeAspect="1"/>
           </p:cNvPicPr>
@@ -3277,8 +4430,8 @@
         </p:blipFill>
         <p:spPr>
           <a:xfrm>
-            <a:off x="2413873" y="3394710"/>
-            <a:ext cx="3245644" cy="1265992"/>
+            <a:off x="1878782" y="4397375"/>
+            <a:ext cx="2323912" cy="906462"/>
           </a:xfrm>
           <a:prstGeom prst="rect">
             <a:avLst/>
@@ -3287,7 +4440,13 @@
       </p:pic>
       <p:pic>
         <p:nvPicPr>
-          <p:cNvPr id="9" name="Image 3" descr="preencoded.png"/>
+          <p:cNvPr id="9" name="Image 3" descr="preencoded.png">
+            <a:extLst>
+              <a:ext uri="{FF2B5EF4-FFF2-40B4-BE49-F238E27FC236}">
+                <a16:creationId xmlns:a16="http://schemas.microsoft.com/office/drawing/2014/main" id="{0DACD523-7497-C0F7-17ED-DD7161688579}"/>
+              </a:ext>
+            </a:extLst>
+          </p:cNvPr>
           <p:cNvPicPr>
             <a:picLocks noChangeAspect="1"/>
           </p:cNvPicPr>
@@ -3301,8 +4460,8 @@
         </p:blipFill>
         <p:spPr>
           <a:xfrm>
-            <a:off x="3884295" y="3837265"/>
-            <a:ext cx="304681" cy="380762"/>
+            <a:off x="2931601" y="4714231"/>
+            <a:ext cx="218156" cy="272630"/>
           </a:xfrm>
           <a:prstGeom prst="rect">
             <a:avLst/>
@@ -3311,56 +4470,20 @@
       </p:pic>
       <p:sp>
         <p:nvSpPr>
-          <p:cNvPr id="10" name="Text 4"/>
-          <p:cNvSpPr/>
-          <p:nvPr/>
-        </p:nvSpPr>
-        <p:spPr>
-          <a:xfrm>
-            <a:off x="5876092" y="3611285"/>
-            <a:ext cx="3428405" cy="356235"/>
-          </a:xfrm>
-          <a:prstGeom prst="rect">
-            <a:avLst/>
-          </a:prstGeom>
-          <a:noFill/>
-          <a:ln/>
-        </p:spPr>
-        <p:txBody>
-          <a:bodyPr wrap="none" lIns="0" tIns="0" rIns="0" bIns="0" rtlCol="0" anchor="t"/>
-          <a:lstStyle/>
-          <a:p>
-            <a:pPr marL="0" indent="0" algn="l">
-              <a:lnSpc>
-                <a:spcPts val="2800"/>
-              </a:lnSpc>
-              <a:buNone/>
-            </a:pPr>
-            <a:r>
-              <a:rPr lang="en-US" sz="2200" b="1" dirty="0">
-                <a:solidFill>
-                  <a:srgbClr val="384653"/>
-                </a:solidFill>
-                <a:latin typeface="Barlow Bold" pitchFamily="34" charset="0"/>
-                <a:ea typeface="Barlow Bold" pitchFamily="34" charset="-122"/>
-                <a:cs typeface="Barlow Bold" pitchFamily="34" charset="-120"/>
-              </a:rPr>
-              <a:t>Электронная рассылка</a:t>
-            </a:r>
-            <a:endParaRPr lang="en-US" sz="2200" dirty="0"/>
-          </a:p>
-        </p:txBody>
-      </p:sp>
-      <p:sp>
-        <p:nvSpPr>
-          <p:cNvPr id="11" name="Text 5"/>
-          <p:cNvSpPr/>
-          <p:nvPr/>
-        </p:nvSpPr>
-        <p:spPr>
-          <a:xfrm>
-            <a:off x="5876092" y="4097417"/>
-            <a:ext cx="4344948" cy="346710"/>
+          <p:cNvPr id="11" name="Text 5">
+            <a:extLst>
+              <a:ext uri="{FF2B5EF4-FFF2-40B4-BE49-F238E27FC236}">
+                <a16:creationId xmlns:a16="http://schemas.microsoft.com/office/drawing/2014/main" id="{C74CC5FE-A116-1AB1-C099-43FDB0E74EAC}"/>
+              </a:ext>
+            </a:extLst>
+          </p:cNvPr>
+          <p:cNvSpPr/>
+          <p:nvPr/>
+        </p:nvSpPr>
+        <p:spPr>
+          <a:xfrm>
+            <a:off x="4620934" y="4640151"/>
+            <a:ext cx="9205598" cy="346710"/>
           </a:xfrm>
           <a:prstGeom prst="rect">
             <a:avLst/>
@@ -3379,7 +4502,7 @@
               <a:buNone/>
             </a:pPr>
             <a:r>
-              <a:rPr lang="en-US" sz="1700" dirty="0">
+              <a:rPr lang="ru-RU" sz="2400" dirty="0">
                 <a:solidFill>
                   <a:srgbClr val="384653"/>
                 </a:solidFill>
@@ -3387,37 +4510,21 @@
                 <a:ea typeface="Montserrat" pitchFamily="34" charset="-122"/>
                 <a:cs typeface="Montserrat" pitchFamily="34" charset="-120"/>
               </a:rPr>
-              <a:t>Автоматическая отправка ведомостей</a:t>
-            </a:r>
-            <a:endParaRPr lang="en-US" sz="1700" dirty="0"/>
-          </a:p>
-        </p:txBody>
-      </p:sp>
-      <p:sp>
-        <p:nvSpPr>
-          <p:cNvPr id="12" name="Shape 6"/>
-          <p:cNvSpPr/>
-          <p:nvPr/>
-        </p:nvSpPr>
-        <p:spPr>
-          <a:xfrm>
-            <a:off x="5713571" y="4672489"/>
-            <a:ext cx="8104465" cy="15240"/>
-          </a:xfrm>
-          <a:prstGeom prst="roundRect">
-            <a:avLst>
-              <a:gd name="adj" fmla="val 2132502"/>
-            </a:avLst>
-          </a:prstGeom>
-          <a:solidFill>
-            <a:srgbClr val="BACFDD"/>
-          </a:solidFill>
-          <a:ln/>
-        </p:spPr>
+              <a:t>Автоматизация электронной рассылки ведомостей</a:t>
+            </a:r>
+            <a:endParaRPr lang="en-US" sz="2400" dirty="0"/>
+          </a:p>
+        </p:txBody>
       </p:sp>
       <p:pic>
         <p:nvPicPr>
-          <p:cNvPr id="13" name="Image 4" descr="preencoded.png"/>
+          <p:cNvPr id="13" name="Image 4" descr="preencoded.png">
+            <a:extLst>
+              <a:ext uri="{FF2B5EF4-FFF2-40B4-BE49-F238E27FC236}">
+                <a16:creationId xmlns:a16="http://schemas.microsoft.com/office/drawing/2014/main" id="{9D379058-5590-A34A-3966-D9BD374410A3}"/>
+              </a:ext>
+            </a:extLst>
+          </p:cNvPr>
           <p:cNvPicPr>
             <a:picLocks noChangeAspect="1"/>
           </p:cNvPicPr>
@@ -3431,8 +4538,8 @@
         </p:blipFill>
         <p:spPr>
           <a:xfrm>
-            <a:off x="1602462" y="4714756"/>
-            <a:ext cx="4868466" cy="1265992"/>
+            <a:off x="1297804" y="5324376"/>
+            <a:ext cx="3485868" cy="906462"/>
           </a:xfrm>
           <a:prstGeom prst="rect">
             <a:avLst/>
@@ -3441,7 +4548,13 @@
       </p:pic>
       <p:pic>
         <p:nvPicPr>
-          <p:cNvPr id="14" name="Image 5" descr="preencoded.png"/>
+          <p:cNvPr id="14" name="Image 5" descr="preencoded.png">
+            <a:extLst>
+              <a:ext uri="{FF2B5EF4-FFF2-40B4-BE49-F238E27FC236}">
+                <a16:creationId xmlns:a16="http://schemas.microsoft.com/office/drawing/2014/main" id="{A6A6A96A-A53C-B247-2FC4-D5303FD3D658}"/>
+              </a:ext>
+            </a:extLst>
+          </p:cNvPr>
           <p:cNvPicPr>
             <a:picLocks noChangeAspect="1"/>
           </p:cNvPicPr>
@@ -3455,8 +4568,8 @@
         </p:blipFill>
         <p:spPr>
           <a:xfrm>
-            <a:off x="3884295" y="5157311"/>
-            <a:ext cx="304681" cy="380762"/>
+            <a:off x="2931601" y="5641232"/>
+            <a:ext cx="218156" cy="272630"/>
           </a:xfrm>
           <a:prstGeom prst="rect">
             <a:avLst/>
@@ -3465,56 +4578,20 @@
       </p:pic>
       <p:sp>
         <p:nvSpPr>
-          <p:cNvPr id="15" name="Text 7"/>
-          <p:cNvSpPr/>
-          <p:nvPr/>
-        </p:nvSpPr>
-        <p:spPr>
-          <a:xfrm>
-            <a:off x="6687503" y="4931331"/>
-            <a:ext cx="4184094" cy="356235"/>
-          </a:xfrm>
-          <a:prstGeom prst="rect">
-            <a:avLst/>
-          </a:prstGeom>
-          <a:noFill/>
-          <a:ln/>
-        </p:spPr>
-        <p:txBody>
-          <a:bodyPr wrap="none" lIns="0" tIns="0" rIns="0" bIns="0" rtlCol="0" anchor="t"/>
-          <a:lstStyle/>
-          <a:p>
-            <a:pPr marL="0" indent="0" algn="l">
-              <a:lnSpc>
-                <a:spcPts val="2800"/>
-              </a:lnSpc>
-              <a:buNone/>
-            </a:pPr>
-            <a:r>
-              <a:rPr lang="en-US" sz="2200" b="1" dirty="0">
-                <a:solidFill>
-                  <a:srgbClr val="384653"/>
-                </a:solidFill>
-                <a:latin typeface="Barlow Bold" pitchFamily="34" charset="0"/>
-                <a:ea typeface="Barlow Bold" pitchFamily="34" charset="-122"/>
-                <a:cs typeface="Barlow Bold" pitchFamily="34" charset="-120"/>
-              </a:rPr>
-              <a:t>Формирование ведомостей</a:t>
-            </a:r>
-            <a:endParaRPr lang="en-US" sz="2200" dirty="0"/>
-          </a:p>
-        </p:txBody>
-      </p:sp>
-      <p:sp>
-        <p:nvSpPr>
-          <p:cNvPr id="16" name="Text 8"/>
-          <p:cNvSpPr/>
-          <p:nvPr/>
-        </p:nvSpPr>
-        <p:spPr>
-          <a:xfrm>
-            <a:off x="6687503" y="5417463"/>
-            <a:ext cx="4377928" cy="346710"/>
+          <p:cNvPr id="16" name="Text 8">
+            <a:extLst>
+              <a:ext uri="{FF2B5EF4-FFF2-40B4-BE49-F238E27FC236}">
+                <a16:creationId xmlns:a16="http://schemas.microsoft.com/office/drawing/2014/main" id="{C786ED22-5B53-8514-8884-0D808D85D533}"/>
+              </a:ext>
+            </a:extLst>
+          </p:cNvPr>
+          <p:cNvSpPr/>
+          <p:nvPr/>
+        </p:nvSpPr>
+        <p:spPr>
+          <a:xfrm>
+            <a:off x="5263155" y="5578602"/>
+            <a:ext cx="8472942" cy="346710"/>
           </a:xfrm>
           <a:prstGeom prst="rect">
             <a:avLst/>
@@ -3533,7 +4610,7 @@
               <a:buNone/>
             </a:pPr>
             <a:r>
-              <a:rPr lang="en-US" sz="1700" dirty="0">
+              <a:rPr lang="ru-RU" sz="2400" dirty="0">
                 <a:solidFill>
                   <a:srgbClr val="384653"/>
                 </a:solidFill>
@@ -3541,37 +4618,21 @@
                 <a:ea typeface="Montserrat" pitchFamily="34" charset="-122"/>
                 <a:cs typeface="Montserrat" pitchFamily="34" charset="-120"/>
               </a:rPr>
-              <a:t>Автоматическое создание документов</a:t>
-            </a:r>
-            <a:endParaRPr lang="en-US" sz="1700" dirty="0"/>
-          </a:p>
-        </p:txBody>
-      </p:sp>
-      <p:sp>
-        <p:nvSpPr>
-          <p:cNvPr id="17" name="Shape 9"/>
-          <p:cNvSpPr/>
-          <p:nvPr/>
-        </p:nvSpPr>
-        <p:spPr>
-          <a:xfrm>
-            <a:off x="6524982" y="5992535"/>
-            <a:ext cx="7293054" cy="15240"/>
-          </a:xfrm>
-          <a:prstGeom prst="roundRect">
-            <a:avLst>
-              <a:gd name="adj" fmla="val 2132502"/>
-            </a:avLst>
-          </a:prstGeom>
-          <a:solidFill>
-            <a:srgbClr val="BACFDD"/>
-          </a:solidFill>
-          <a:ln/>
-        </p:spPr>
+              <a:t>Автоматизация заполнения документации</a:t>
+            </a:r>
+            <a:endParaRPr lang="en-US" sz="2400" dirty="0"/>
+          </a:p>
+        </p:txBody>
       </p:sp>
       <p:pic>
         <p:nvPicPr>
-          <p:cNvPr id="18" name="Image 6" descr="preencoded.png"/>
+          <p:cNvPr id="18" name="Image 6" descr="preencoded.png">
+            <a:extLst>
+              <a:ext uri="{FF2B5EF4-FFF2-40B4-BE49-F238E27FC236}">
+                <a16:creationId xmlns:a16="http://schemas.microsoft.com/office/drawing/2014/main" id="{37F8B348-1D0B-CC91-F24F-DCDC88B17DB6}"/>
+              </a:ext>
+            </a:extLst>
+          </p:cNvPr>
           <p:cNvPicPr>
             <a:picLocks noChangeAspect="1"/>
           </p:cNvPicPr>
@@ -3585,8 +4646,8 @@
         </p:blipFill>
         <p:spPr>
           <a:xfrm>
-            <a:off x="791051" y="6034802"/>
-            <a:ext cx="6491288" cy="1265992"/>
+            <a:off x="716826" y="6251377"/>
+            <a:ext cx="4647824" cy="906462"/>
           </a:xfrm>
           <a:prstGeom prst="rect">
             <a:avLst/>
@@ -3595,7 +4656,13 @@
       </p:pic>
       <p:pic>
         <p:nvPicPr>
-          <p:cNvPr id="19" name="Image 7" descr="preencoded.png"/>
+          <p:cNvPr id="19" name="Image 7" descr="preencoded.png">
+            <a:extLst>
+              <a:ext uri="{FF2B5EF4-FFF2-40B4-BE49-F238E27FC236}">
+                <a16:creationId xmlns:a16="http://schemas.microsoft.com/office/drawing/2014/main" id="{B763EC26-8FF0-3877-FD9F-E61F6EBE9172}"/>
+              </a:ext>
+            </a:extLst>
+          </p:cNvPr>
           <p:cNvPicPr>
             <a:picLocks noChangeAspect="1"/>
           </p:cNvPicPr>
@@ -3609,8 +4676,8 @@
         </p:blipFill>
         <p:spPr>
           <a:xfrm>
-            <a:off x="3884295" y="6477357"/>
-            <a:ext cx="304681" cy="380762"/>
+            <a:off x="2931601" y="6568233"/>
+            <a:ext cx="218156" cy="272630"/>
           </a:xfrm>
           <a:prstGeom prst="rect">
             <a:avLst/>
@@ -3619,56 +4686,20 @@
       </p:pic>
       <p:sp>
         <p:nvSpPr>
-          <p:cNvPr id="20" name="Text 10"/>
-          <p:cNvSpPr/>
-          <p:nvPr/>
-        </p:nvSpPr>
-        <p:spPr>
-          <a:xfrm>
-            <a:off x="7498913" y="6251377"/>
-            <a:ext cx="3706773" cy="356235"/>
-          </a:xfrm>
-          <a:prstGeom prst="rect">
-            <a:avLst/>
-          </a:prstGeom>
-          <a:noFill/>
-          <a:ln/>
-        </p:spPr>
-        <p:txBody>
-          <a:bodyPr wrap="none" lIns="0" tIns="0" rIns="0" bIns="0" rtlCol="0" anchor="t"/>
-          <a:lstStyle/>
-          <a:p>
-            <a:pPr marL="0" indent="0" algn="l">
-              <a:lnSpc>
-                <a:spcPts val="2800"/>
-              </a:lnSpc>
-              <a:buNone/>
-            </a:pPr>
-            <a:r>
-              <a:rPr lang="en-US" sz="2200" b="1" dirty="0">
-                <a:solidFill>
-                  <a:srgbClr val="384653"/>
-                </a:solidFill>
-                <a:latin typeface="Barlow Bold" pitchFamily="34" charset="0"/>
-                <a:ea typeface="Barlow Bold" pitchFamily="34" charset="-122"/>
-                <a:cs typeface="Barlow Bold" pitchFamily="34" charset="-120"/>
-              </a:rPr>
-              <a:t>Мониторинг активности</a:t>
-            </a:r>
-            <a:endParaRPr lang="en-US" sz="2200" dirty="0"/>
-          </a:p>
-        </p:txBody>
-      </p:sp>
-      <p:sp>
-        <p:nvSpPr>
-          <p:cNvPr id="21" name="Text 11"/>
-          <p:cNvSpPr/>
-          <p:nvPr/>
-        </p:nvSpPr>
-        <p:spPr>
-          <a:xfrm>
-            <a:off x="7498913" y="6737509"/>
-            <a:ext cx="4090749" cy="346710"/>
+          <p:cNvPr id="21" name="Text 11">
+            <a:extLst>
+              <a:ext uri="{FF2B5EF4-FFF2-40B4-BE49-F238E27FC236}">
+                <a16:creationId xmlns:a16="http://schemas.microsoft.com/office/drawing/2014/main" id="{EAB02D77-23EF-8ECB-A585-FE8BAF9CE73C}"/>
+              </a:ext>
+            </a:extLst>
+          </p:cNvPr>
+          <p:cNvSpPr/>
+          <p:nvPr/>
+        </p:nvSpPr>
+        <p:spPr>
+          <a:xfrm>
+            <a:off x="5836298" y="6494153"/>
+            <a:ext cx="8593135" cy="346710"/>
           </a:xfrm>
           <a:prstGeom prst="rect">
             <a:avLst/>
@@ -3687,7 +4718,7 @@
               <a:buNone/>
             </a:pPr>
             <a:r>
-              <a:rPr lang="en-US" sz="1700" dirty="0">
+              <a:rPr lang="ru-RU" sz="2400" dirty="0">
                 <a:solidFill>
                   <a:srgbClr val="384653"/>
                 </a:solidFill>
@@ -3695,9 +4726,9 @@
                 <a:ea typeface="Montserrat" pitchFamily="34" charset="-122"/>
                 <a:cs typeface="Montserrat" pitchFamily="34" charset="-120"/>
               </a:rPr>
-              <a:t>Учет посещаемости и успеваемости</a:t>
-            </a:r>
-            <a:endParaRPr lang="en-US" sz="1700" dirty="0"/>
+              <a:t> Создание удобного средства учета успеваемости</a:t>
+            </a:r>
+            <a:endParaRPr lang="en-US" sz="2400" dirty="0"/>
           </a:p>
         </p:txBody>
       </p:sp>
@@ -3706,7 +4737,7 @@
           <p:cNvPr id="22" name="Прямоугольник 21">
             <a:extLst>
               <a:ext uri="{FF2B5EF4-FFF2-40B4-BE49-F238E27FC236}">
-                <a16:creationId xmlns:a16="http://schemas.microsoft.com/office/drawing/2014/main" id="{344495E7-EF80-7669-03CA-141C559B721B}"/>
+                <a16:creationId xmlns:a16="http://schemas.microsoft.com/office/drawing/2014/main" id="{9D2DA552-59C7-E8DA-7E63-CC4B992E991C}"/>
               </a:ext>
             </a:extLst>
           </p:cNvPr>
@@ -3753,7 +4784,204 @@
           </a:p>
         </p:txBody>
       </p:sp>
+      <p:sp>
+        <p:nvSpPr>
+          <p:cNvPr id="23" name="Text 2">
+            <a:extLst>
+              <a:ext uri="{FF2B5EF4-FFF2-40B4-BE49-F238E27FC236}">
+                <a16:creationId xmlns:a16="http://schemas.microsoft.com/office/drawing/2014/main" id="{4CBB72C5-31A4-E213-7C55-5DFB20030318}"/>
+              </a:ext>
+            </a:extLst>
+          </p:cNvPr>
+          <p:cNvSpPr/>
+          <p:nvPr/>
+        </p:nvSpPr>
+        <p:spPr>
+          <a:xfrm>
+            <a:off x="791051" y="1472225"/>
+            <a:ext cx="11608615" cy="780311"/>
+          </a:xfrm>
+          <a:prstGeom prst="rect">
+            <a:avLst/>
+          </a:prstGeom>
+          <a:noFill/>
+          <a:ln/>
+        </p:spPr>
+        <p:txBody>
+          <a:bodyPr wrap="none" lIns="0" tIns="0" rIns="0" bIns="0" rtlCol="0" anchor="t"/>
+          <a:lstStyle/>
+          <a:p>
+            <a:pPr marL="0" indent="0" algn="l">
+              <a:lnSpc>
+                <a:spcPts val="2700"/>
+              </a:lnSpc>
+              <a:buNone/>
+            </a:pPr>
+            <a:r>
+              <a:rPr lang="ru-RU" sz="2400" b="1" dirty="0">
+                <a:solidFill>
+                  <a:srgbClr val="384653"/>
+                </a:solidFill>
+                <a:latin typeface="Montserrat" pitchFamily="34" charset="0"/>
+                <a:ea typeface="Montserrat" pitchFamily="34" charset="-122"/>
+                <a:cs typeface="Montserrat" pitchFamily="34" charset="-120"/>
+              </a:rPr>
+              <a:t>Цель: </a:t>
+            </a:r>
+            <a:r>
+              <a:rPr lang="ru-RU" sz="2400" dirty="0">
+                <a:solidFill>
+                  <a:srgbClr val="384653"/>
+                </a:solidFill>
+                <a:latin typeface="Montserrat" pitchFamily="34" charset="0"/>
+                <a:ea typeface="Montserrat" pitchFamily="34" charset="-122"/>
+                <a:cs typeface="Montserrat" pitchFamily="34" charset="-120"/>
+              </a:rPr>
+              <a:t>разработка и реализация программного средства автоматизации </a:t>
+            </a:r>
+          </a:p>
+          <a:p>
+            <a:pPr marL="0" indent="0" algn="l">
+              <a:lnSpc>
+                <a:spcPts val="2700"/>
+              </a:lnSpc>
+              <a:buNone/>
+            </a:pPr>
+            <a:r>
+              <a:rPr lang="ru-RU" sz="2400" dirty="0">
+                <a:solidFill>
+                  <a:srgbClr val="384653"/>
+                </a:solidFill>
+                <a:latin typeface="Montserrat" pitchFamily="34" charset="0"/>
+                <a:ea typeface="Montserrat" pitchFamily="34" charset="-122"/>
+                <a:cs typeface="Montserrat" pitchFamily="34" charset="-120"/>
+              </a:rPr>
+              <a:t>процессов учета и анализа успеваемости студентов.</a:t>
+            </a:r>
+            <a:endParaRPr lang="en-US" sz="2400" dirty="0"/>
+          </a:p>
+        </p:txBody>
+      </p:sp>
+      <p:sp>
+        <p:nvSpPr>
+          <p:cNvPr id="26" name="Text 1">
+            <a:extLst>
+              <a:ext uri="{FF2B5EF4-FFF2-40B4-BE49-F238E27FC236}">
+                <a16:creationId xmlns:a16="http://schemas.microsoft.com/office/drawing/2014/main" id="{CFAF1FA7-FA25-5012-2748-7A540794E56E}"/>
+              </a:ext>
+            </a:extLst>
+          </p:cNvPr>
+          <p:cNvSpPr/>
+          <p:nvPr/>
+        </p:nvSpPr>
+        <p:spPr>
+          <a:xfrm>
+            <a:off x="791051" y="2781552"/>
+            <a:ext cx="6913114" cy="346710"/>
+          </a:xfrm>
+          <a:prstGeom prst="rect">
+            <a:avLst/>
+          </a:prstGeom>
+          <a:noFill/>
+          <a:ln/>
+        </p:spPr>
+        <p:txBody>
+          <a:bodyPr wrap="none" lIns="0" tIns="0" rIns="0" bIns="0" rtlCol="0" anchor="t"/>
+          <a:lstStyle/>
+          <a:p>
+            <a:pPr marL="0" indent="0" algn="l">
+              <a:lnSpc>
+                <a:spcPts val="2800"/>
+              </a:lnSpc>
+              <a:buNone/>
+            </a:pPr>
+            <a:r>
+              <a:rPr lang="ru-RU" sz="2400" b="1" dirty="0">
+                <a:solidFill>
+                  <a:srgbClr val="384653"/>
+                </a:solidFill>
+                <a:latin typeface="Montserrat" pitchFamily="34" charset="0"/>
+              </a:rPr>
+              <a:t>Задачи</a:t>
+            </a:r>
+            <a:r>
+              <a:rPr lang="ru-RU" sz="2400" dirty="0">
+                <a:solidFill>
+                  <a:srgbClr val="384653"/>
+                </a:solidFill>
+                <a:latin typeface="Montserrat" pitchFamily="34" charset="0"/>
+              </a:rPr>
+              <a:t> разработки включают следующее: </a:t>
+            </a:r>
+            <a:endParaRPr lang="en-US" sz="2400" dirty="0">
+              <a:solidFill>
+                <a:srgbClr val="384653"/>
+              </a:solidFill>
+              <a:latin typeface="Montserrat" pitchFamily="34" charset="0"/>
+            </a:endParaRPr>
+          </a:p>
+        </p:txBody>
+      </p:sp>
+      <p:sp>
+        <p:nvSpPr>
+          <p:cNvPr id="12" name="Овал 11">
+            <a:extLst>
+              <a:ext uri="{FF2B5EF4-FFF2-40B4-BE49-F238E27FC236}">
+                <a16:creationId xmlns:a16="http://schemas.microsoft.com/office/drawing/2014/main" id="{A05CD534-53E3-CFFA-7503-784E5AA1F517}"/>
+              </a:ext>
+            </a:extLst>
+          </p:cNvPr>
+          <p:cNvSpPr/>
+          <p:nvPr/>
+        </p:nvSpPr>
+        <p:spPr>
+          <a:xfrm>
+            <a:off x="13821273" y="7454726"/>
+            <a:ext cx="557917" cy="483472"/>
+          </a:xfrm>
+          <a:prstGeom prst="ellipse">
+            <a:avLst/>
+          </a:prstGeom>
+          <a:solidFill>
+            <a:srgbClr val="D4E9F7"/>
+          </a:solidFill>
+          <a:ln>
+            <a:noFill/>
+          </a:ln>
+        </p:spPr>
+        <p:style>
+          <a:lnRef idx="1">
+            <a:schemeClr val="accent5"/>
+          </a:lnRef>
+          <a:fillRef idx="2">
+            <a:schemeClr val="accent5"/>
+          </a:fillRef>
+          <a:effectRef idx="1">
+            <a:schemeClr val="accent5"/>
+          </a:effectRef>
+          <a:fontRef idx="minor">
+            <a:schemeClr val="dk1"/>
+          </a:fontRef>
+        </p:style>
+        <p:txBody>
+          <a:bodyPr rtlCol="0" anchor="ctr"/>
+          <a:lstStyle/>
+          <a:p>
+            <a:pPr algn="ctr"/>
+            <a:r>
+              <a:rPr lang="en-US" sz="1600" dirty="0"/>
+              <a:t>3</a:t>
+            </a:r>
+            <a:endParaRPr lang="ru-RU" dirty="0"/>
+          </a:p>
+        </p:txBody>
+      </p:sp>
     </p:spTree>
+    <p:extLst>
+      <p:ext uri="{BB962C8B-B14F-4D97-AF65-F5344CB8AC3E}">
+        <p14:creationId xmlns:p14="http://schemas.microsoft.com/office/powerpoint/2010/main" val="3608523388"/>
+      </p:ext>
+    </p:extLst>
   </p:cSld>
   <p:clrMapOvr>
     <a:masterClrMapping/>
@@ -3786,8 +5014,8 @@
         </p:nvSpPr>
         <p:spPr>
           <a:xfrm>
-            <a:off x="758309" y="1705928"/>
-            <a:ext cx="6720840" cy="712708"/>
+            <a:off x="758308" y="907852"/>
+            <a:ext cx="7230131" cy="712708"/>
           </a:xfrm>
           <a:prstGeom prst="rect">
             <a:avLst/>
@@ -3806,7 +5034,7 @@
               <a:buNone/>
             </a:pPr>
             <a:r>
-              <a:rPr lang="en-US" sz="4450" b="1" dirty="0">
+              <a:rPr lang="ru-RU" sz="4450" b="1" dirty="0">
                 <a:solidFill>
                   <a:srgbClr val="2E3C4E"/>
                 </a:solidFill>
@@ -3814,7 +5042,7 @@
                 <a:ea typeface="Barlow Bold" pitchFamily="34" charset="-122"/>
                 <a:cs typeface="Barlow Bold" pitchFamily="34" charset="-120"/>
               </a:rPr>
-              <a:t>Технологический стек</a:t>
+              <a:t>Инструменты разработки</a:t>
             </a:r>
             <a:endParaRPr lang="en-US" sz="4450" dirty="0"/>
           </a:p>
@@ -3848,7 +5076,7 @@
               <a:buNone/>
             </a:pPr>
             <a:r>
-              <a:rPr lang="en-US" sz="2200" b="1" dirty="0">
+              <a:rPr lang="en-US" sz="3200" b="1" dirty="0">
                 <a:solidFill>
                   <a:srgbClr val="384653"/>
                 </a:solidFill>
@@ -3858,7 +5086,7 @@
               </a:rPr>
               <a:t>JavaScript</a:t>
             </a:r>
-            <a:endParaRPr lang="en-US" sz="2200" dirty="0"/>
+            <a:endParaRPr lang="en-US" sz="3200" dirty="0"/>
           </a:p>
         </p:txBody>
       </p:sp>
@@ -3890,7 +5118,7 @@
               <a:buNone/>
             </a:pPr>
             <a:r>
-              <a:rPr lang="en-US" sz="1700" dirty="0">
+              <a:rPr lang="en-US" sz="2400" dirty="0">
                 <a:solidFill>
                   <a:srgbClr val="384653"/>
                 </a:solidFill>
@@ -3900,7 +5128,7 @@
               </a:rPr>
               <a:t>Основной язык разработки</a:t>
             </a:r>
-            <a:endParaRPr lang="en-US" sz="1700" dirty="0"/>
+            <a:endParaRPr lang="en-US" sz="2400" dirty="0"/>
           </a:p>
         </p:txBody>
       </p:sp>
@@ -4007,7 +5235,7 @@
               <a:buNone/>
             </a:pPr>
             <a:r>
-              <a:rPr lang="en-US" sz="2200" b="1" dirty="0">
+              <a:rPr lang="en-US" sz="3200" b="1" dirty="0">
                 <a:solidFill>
                   <a:srgbClr val="384653"/>
                 </a:solidFill>
@@ -4017,7 +5245,7 @@
               </a:rPr>
               <a:t>Node.js + Express</a:t>
             </a:r>
-            <a:endParaRPr lang="en-US" sz="2200" dirty="0"/>
+            <a:endParaRPr lang="en-US" sz="3200" dirty="0"/>
           </a:p>
         </p:txBody>
       </p:sp>
@@ -4049,7 +5277,7 @@
               <a:buNone/>
             </a:pPr>
             <a:r>
-              <a:rPr lang="en-US" sz="1700" dirty="0">
+              <a:rPr lang="en-US" sz="2400" dirty="0">
                 <a:solidFill>
                   <a:srgbClr val="384653"/>
                 </a:solidFill>
@@ -4059,7 +5287,7 @@
               </a:rPr>
               <a:t>Серверная часть приложения</a:t>
             </a:r>
-            <a:endParaRPr lang="en-US" sz="1700" dirty="0"/>
+            <a:endParaRPr lang="en-US" sz="2400" dirty="0"/>
           </a:p>
         </p:txBody>
       </p:sp>
@@ -4166,7 +5394,7 @@
               <a:buNone/>
             </a:pPr>
             <a:r>
-              <a:rPr lang="en-US" sz="2200" b="1" dirty="0">
+              <a:rPr lang="en-US" sz="3200" b="1" dirty="0">
                 <a:solidFill>
                   <a:srgbClr val="384653"/>
                 </a:solidFill>
@@ -4174,9 +5402,9 @@
                 <a:ea typeface="Barlow Bold" pitchFamily="34" charset="-122"/>
                 <a:cs typeface="Barlow Bold" pitchFamily="34" charset="-120"/>
               </a:rPr>
-              <a:t>Next.js</a:t>
-            </a:r>
-            <a:endParaRPr lang="en-US" sz="2200" dirty="0"/>
+              <a:t>React + Next.js</a:t>
+            </a:r>
+            <a:endParaRPr lang="en-US" sz="3200" dirty="0"/>
           </a:p>
         </p:txBody>
       </p:sp>
@@ -4208,7 +5436,7 @@
               <a:buNone/>
             </a:pPr>
             <a:r>
-              <a:rPr lang="en-US" sz="1700" dirty="0">
+              <a:rPr lang="en-US" sz="2400" dirty="0">
                 <a:solidFill>
                   <a:srgbClr val="384653"/>
                 </a:solidFill>
@@ -4218,7 +5446,7 @@
               </a:rPr>
               <a:t>Клиентская часть с App Router</a:t>
             </a:r>
-            <a:endParaRPr lang="en-US" sz="1700" dirty="0"/>
+            <a:endParaRPr lang="en-US" sz="2400" dirty="0"/>
           </a:p>
         </p:txBody>
       </p:sp>
@@ -4325,7 +5553,7 @@
               <a:buNone/>
             </a:pPr>
             <a:r>
-              <a:rPr lang="en-US" sz="2200" b="1" dirty="0">
+              <a:rPr lang="en-US" sz="3200" b="1" dirty="0">
                 <a:solidFill>
                   <a:srgbClr val="384653"/>
                 </a:solidFill>
@@ -4335,7 +5563,7 @@
               </a:rPr>
               <a:t>PostgreSQL + Sequelize</a:t>
             </a:r>
-            <a:endParaRPr lang="en-US" sz="2200" dirty="0"/>
+            <a:endParaRPr lang="en-US" sz="3200" dirty="0"/>
           </a:p>
         </p:txBody>
       </p:sp>
@@ -4367,7 +5595,7 @@
               <a:buNone/>
             </a:pPr>
             <a:r>
-              <a:rPr lang="en-US" sz="1700" dirty="0">
+              <a:rPr lang="en-US" sz="2400" dirty="0">
                 <a:solidFill>
                   <a:srgbClr val="384653"/>
                 </a:solidFill>
@@ -4377,7 +5605,7 @@
               </a:rPr>
               <a:t>Управление данными</a:t>
             </a:r>
-            <a:endParaRPr lang="en-US" sz="1700" dirty="0"/>
+            <a:endParaRPr lang="en-US" sz="2400" dirty="0"/>
           </a:p>
         </p:txBody>
       </p:sp>
@@ -4505,6 +5733,106 @@
           <a:p>
             <a:pPr algn="ctr"/>
             <a:endParaRPr lang="ru-RU"/>
+          </a:p>
+        </p:txBody>
+      </p:sp>
+      <p:sp>
+        <p:nvSpPr>
+          <p:cNvPr id="24" name="Text 2">
+            <a:extLst>
+              <a:ext uri="{FF2B5EF4-FFF2-40B4-BE49-F238E27FC236}">
+                <a16:creationId xmlns:a16="http://schemas.microsoft.com/office/drawing/2014/main" id="{FD59BC5A-39DC-1461-6DCF-B830B4D6988F}"/>
+              </a:ext>
+            </a:extLst>
+          </p:cNvPr>
+          <p:cNvSpPr/>
+          <p:nvPr/>
+        </p:nvSpPr>
+        <p:spPr>
+          <a:xfrm>
+            <a:off x="791051" y="1733040"/>
+            <a:ext cx="11608615" cy="780311"/>
+          </a:xfrm>
+          <a:prstGeom prst="rect">
+            <a:avLst/>
+          </a:prstGeom>
+          <a:noFill/>
+          <a:ln/>
+        </p:spPr>
+        <p:txBody>
+          <a:bodyPr wrap="none" lIns="0" tIns="0" rIns="0" bIns="0" rtlCol="0" anchor="t"/>
+          <a:lstStyle/>
+          <a:p>
+            <a:pPr marL="0" indent="0" algn="l">
+              <a:lnSpc>
+                <a:spcPts val="2700"/>
+              </a:lnSpc>
+              <a:buNone/>
+            </a:pPr>
+            <a:r>
+              <a:rPr lang="ru-RU" sz="2400" dirty="0">
+                <a:solidFill>
+                  <a:srgbClr val="384653"/>
+                </a:solidFill>
+                <a:latin typeface="Montserrat" pitchFamily="34" charset="0"/>
+              </a:rPr>
+              <a:t>Для реализации проекта были использованы следующие технологии:</a:t>
+            </a:r>
+            <a:endParaRPr lang="en-US" sz="2400" dirty="0"/>
+          </a:p>
+        </p:txBody>
+      </p:sp>
+      <p:sp>
+        <p:nvSpPr>
+          <p:cNvPr id="27" name="Овал 26">
+            <a:extLst>
+              <a:ext uri="{FF2B5EF4-FFF2-40B4-BE49-F238E27FC236}">
+                <a16:creationId xmlns:a16="http://schemas.microsoft.com/office/drawing/2014/main" id="{FE95CC7B-5DC7-FD1A-6EAF-EF483FB94615}"/>
+              </a:ext>
+            </a:extLst>
+          </p:cNvPr>
+          <p:cNvSpPr/>
+          <p:nvPr/>
+        </p:nvSpPr>
+        <p:spPr>
+          <a:xfrm>
+            <a:off x="13821273" y="7454726"/>
+            <a:ext cx="557917" cy="483472"/>
+          </a:xfrm>
+          <a:prstGeom prst="ellipse">
+            <a:avLst/>
+          </a:prstGeom>
+          <a:solidFill>
+            <a:srgbClr val="D4E9F7"/>
+          </a:solidFill>
+          <a:ln>
+            <a:noFill/>
+          </a:ln>
+        </p:spPr>
+        <p:style>
+          <a:lnRef idx="1">
+            <a:schemeClr val="accent5"/>
+          </a:lnRef>
+          <a:fillRef idx="2">
+            <a:schemeClr val="accent5"/>
+          </a:fillRef>
+          <a:effectRef idx="1">
+            <a:schemeClr val="accent5"/>
+          </a:effectRef>
+          <a:fontRef idx="minor">
+            <a:schemeClr val="dk1"/>
+          </a:fontRef>
+        </p:style>
+        <p:txBody>
+          <a:bodyPr rtlCol="0" anchor="ctr"/>
+          <a:lstStyle/>
+          <a:p>
+            <a:pPr algn="ctr"/>
+            <a:r>
+              <a:rPr lang="en-US" sz="1600" dirty="0"/>
+              <a:t>4</a:t>
+            </a:r>
+            <a:endParaRPr lang="ru-RU" dirty="0"/>
           </a:p>
         </p:txBody>
       </p:sp>
@@ -4651,7 +5979,7 @@
               <a:buNone/>
             </a:pPr>
             <a:r>
-              <a:rPr lang="en-US" sz="2200" b="1" dirty="0">
+              <a:rPr lang="en-US" sz="3200" b="1" dirty="0">
                 <a:solidFill>
                   <a:srgbClr val="384653"/>
                 </a:solidFill>
@@ -4661,7 +5989,7 @@
               </a:rPr>
               <a:t>Клиентская часть</a:t>
             </a:r>
-            <a:endParaRPr lang="en-US" sz="2200" dirty="0"/>
+            <a:endParaRPr lang="en-US" sz="3200" dirty="0"/>
           </a:p>
         </p:txBody>
       </p:sp>
@@ -4693,7 +6021,7 @@
               <a:buNone/>
             </a:pPr>
             <a:r>
-              <a:rPr lang="en-US" sz="1700" dirty="0">
+              <a:rPr lang="en-US" sz="2400" dirty="0">
                 <a:solidFill>
                   <a:srgbClr val="384653"/>
                 </a:solidFill>
@@ -4703,7 +6031,7 @@
               </a:rPr>
               <a:t>React-компоненты на базе хуков</a:t>
             </a:r>
-            <a:endParaRPr lang="en-US" sz="1700" dirty="0"/>
+            <a:endParaRPr lang="en-US" sz="2400" dirty="0"/>
           </a:p>
         </p:txBody>
       </p:sp>
@@ -4759,7 +6087,7 @@
               <a:buNone/>
             </a:pPr>
             <a:r>
-              <a:rPr lang="en-US" sz="2200" b="1" dirty="0">
+              <a:rPr lang="en-US" sz="3200" b="1" dirty="0">
                 <a:solidFill>
                   <a:srgbClr val="384653"/>
                 </a:solidFill>
@@ -4769,7 +6097,7 @@
               </a:rPr>
               <a:t>REST API</a:t>
             </a:r>
-            <a:endParaRPr lang="en-US" sz="2200" dirty="0"/>
+            <a:endParaRPr lang="en-US" sz="3200" dirty="0"/>
           </a:p>
         </p:txBody>
       </p:sp>
@@ -4801,7 +6129,7 @@
               <a:buNone/>
             </a:pPr>
             <a:r>
-              <a:rPr lang="en-US" sz="1700" dirty="0">
+              <a:rPr lang="en-US" sz="2400" dirty="0">
                 <a:solidFill>
                   <a:srgbClr val="384653"/>
                 </a:solidFill>
@@ -4811,7 +6139,7 @@
               </a:rPr>
               <a:t>Обмен данными в формате JSON</a:t>
             </a:r>
-            <a:endParaRPr lang="en-US" sz="1700" dirty="0"/>
+            <a:endParaRPr lang="en-US" sz="2400" dirty="0"/>
           </a:p>
         </p:txBody>
       </p:sp>
@@ -4867,7 +6195,7 @@
               <a:buNone/>
             </a:pPr>
             <a:r>
-              <a:rPr lang="en-US" sz="2200" b="1" dirty="0">
+              <a:rPr lang="en-US" sz="3200" b="1" dirty="0">
                 <a:solidFill>
                   <a:srgbClr val="384653"/>
                 </a:solidFill>
@@ -4877,7 +6205,7 @@
               </a:rPr>
               <a:t>Серверная часть</a:t>
             </a:r>
-            <a:endParaRPr lang="en-US" sz="2200" dirty="0"/>
+            <a:endParaRPr lang="en-US" sz="3200" dirty="0"/>
           </a:p>
         </p:txBody>
       </p:sp>
@@ -4909,7 +6237,7 @@
               <a:buNone/>
             </a:pPr>
             <a:r>
-              <a:rPr lang="en-US" sz="1700" dirty="0">
+              <a:rPr lang="en-US" sz="2400" dirty="0">
                 <a:solidFill>
                   <a:srgbClr val="384653"/>
                 </a:solidFill>
@@ -4919,7 +6247,7 @@
               </a:rPr>
               <a:t>Обработка запросов и бизнес-логика</a:t>
             </a:r>
-            <a:endParaRPr lang="en-US" sz="1700" dirty="0"/>
+            <a:endParaRPr lang="en-US" sz="2400" dirty="0"/>
           </a:p>
         </p:txBody>
       </p:sp>
@@ -4975,7 +6303,7 @@
               <a:buNone/>
             </a:pPr>
             <a:r>
-              <a:rPr lang="en-US" sz="2200" b="1" dirty="0">
+              <a:rPr lang="en-US" sz="3200" b="1" dirty="0">
                 <a:solidFill>
                   <a:srgbClr val="384653"/>
                 </a:solidFill>
@@ -4985,7 +6313,7 @@
               </a:rPr>
               <a:t>База данных</a:t>
             </a:r>
-            <a:endParaRPr lang="en-US" sz="2200" dirty="0"/>
+            <a:endParaRPr lang="en-US" sz="3200" dirty="0"/>
           </a:p>
         </p:txBody>
       </p:sp>
@@ -5017,7 +6345,7 @@
               <a:buNone/>
             </a:pPr>
             <a:r>
-              <a:rPr lang="en-US" sz="1700" dirty="0">
+              <a:rPr lang="en-US" sz="2400" dirty="0">
                 <a:solidFill>
                   <a:srgbClr val="384653"/>
                 </a:solidFill>
@@ -5027,7 +6355,7 @@
               </a:rPr>
               <a:t>Хранение информации о студентах</a:t>
             </a:r>
-            <a:endParaRPr lang="en-US" sz="1700" dirty="0"/>
+            <a:endParaRPr lang="en-US" sz="2400" dirty="0"/>
           </a:p>
         </p:txBody>
       </p:sp>
@@ -5080,6 +6408,123 @@
           <a:p>
             <a:pPr algn="ctr"/>
             <a:endParaRPr lang="ru-RU"/>
+          </a:p>
+        </p:txBody>
+      </p:sp>
+      <p:sp>
+        <p:nvSpPr>
+          <p:cNvPr id="17" name="Text 2">
+            <a:extLst>
+              <a:ext uri="{FF2B5EF4-FFF2-40B4-BE49-F238E27FC236}">
+                <a16:creationId xmlns:a16="http://schemas.microsoft.com/office/drawing/2014/main" id="{07FDB23E-9502-5D99-CE50-C0F76664C56A}"/>
+              </a:ext>
+            </a:extLst>
+          </p:cNvPr>
+          <p:cNvSpPr/>
+          <p:nvPr/>
+        </p:nvSpPr>
+        <p:spPr>
+          <a:xfrm>
+            <a:off x="6244709" y="1339002"/>
+            <a:ext cx="7789790" cy="780311"/>
+          </a:xfrm>
+          <a:prstGeom prst="rect">
+            <a:avLst/>
+          </a:prstGeom>
+          <a:noFill/>
+          <a:ln/>
+        </p:spPr>
+        <p:txBody>
+          <a:bodyPr wrap="none" lIns="0" tIns="0" rIns="0" bIns="0" rtlCol="0" anchor="t"/>
+          <a:lstStyle/>
+          <a:p>
+            <a:pPr marL="0" indent="0" algn="l">
+              <a:lnSpc>
+                <a:spcPts val="2700"/>
+              </a:lnSpc>
+              <a:buNone/>
+            </a:pPr>
+            <a:r>
+              <a:rPr lang="ru-RU" sz="2400" dirty="0">
+                <a:solidFill>
+                  <a:srgbClr val="384653"/>
+                </a:solidFill>
+                <a:latin typeface="Montserrat" pitchFamily="34" charset="0"/>
+              </a:rPr>
+              <a:t>Клиент-серверная архитектура приложения</a:t>
+            </a:r>
+          </a:p>
+          <a:p>
+            <a:pPr marL="0" indent="0" algn="l">
+              <a:lnSpc>
+                <a:spcPts val="2700"/>
+              </a:lnSpc>
+              <a:buNone/>
+            </a:pPr>
+            <a:r>
+              <a:rPr lang="ru-RU" sz="2400" dirty="0">
+                <a:solidFill>
+                  <a:srgbClr val="384653"/>
+                </a:solidFill>
+                <a:latin typeface="Montserrat" pitchFamily="34" charset="0"/>
+              </a:rPr>
+              <a:t>включает следующие составляющие:</a:t>
+            </a:r>
+            <a:endParaRPr lang="en-US" sz="2400" dirty="0"/>
+          </a:p>
+        </p:txBody>
+      </p:sp>
+      <p:sp>
+        <p:nvSpPr>
+          <p:cNvPr id="19" name="Овал 18">
+            <a:extLst>
+              <a:ext uri="{FF2B5EF4-FFF2-40B4-BE49-F238E27FC236}">
+                <a16:creationId xmlns:a16="http://schemas.microsoft.com/office/drawing/2014/main" id="{FCC734D9-A713-7CE3-5D25-1DBFB3F9C713}"/>
+              </a:ext>
+            </a:extLst>
+          </p:cNvPr>
+          <p:cNvSpPr/>
+          <p:nvPr/>
+        </p:nvSpPr>
+        <p:spPr>
+          <a:xfrm>
+            <a:off x="13821273" y="7454726"/>
+            <a:ext cx="557917" cy="483472"/>
+          </a:xfrm>
+          <a:prstGeom prst="ellipse">
+            <a:avLst/>
+          </a:prstGeom>
+          <a:solidFill>
+            <a:srgbClr val="D4E9F7"/>
+          </a:solidFill>
+          <a:ln>
+            <a:noFill/>
+          </a:ln>
+        </p:spPr>
+        <p:style>
+          <a:lnRef idx="1">
+            <a:schemeClr val="accent5"/>
+          </a:lnRef>
+          <a:fillRef idx="2">
+            <a:schemeClr val="accent5"/>
+          </a:fillRef>
+          <a:effectRef idx="1">
+            <a:schemeClr val="accent5"/>
+          </a:effectRef>
+          <a:fontRef idx="minor">
+            <a:schemeClr val="dk1"/>
+          </a:fontRef>
+        </p:style>
+        <p:txBody>
+          <a:bodyPr rtlCol="0" anchor="ctr"/>
+          <a:lstStyle/>
+          <a:p>
+            <a:pPr algn="ctr"/>
+            <a:r>
+              <a:rPr lang="en-US" sz="1600" dirty="0"/>
+              <a:t>5</a:t>
+            </a:r>
+            <a:endParaRPr lang="ru-RU" dirty="0"/>
           </a:p>
         </p:txBody>
       </p:sp>
@@ -5108,516 +6553,6 @@
           <a:chExt cx="0" cy="0"/>
         </a:xfrm>
       </p:grpSpPr>
-      <p:pic>
-        <p:nvPicPr>
-          <p:cNvPr id="2" name="Image 0" descr="preencoded.png"/>
-          <p:cNvPicPr>
-            <a:picLocks noChangeAspect="1"/>
-          </p:cNvPicPr>
-          <p:nvPr/>
-        </p:nvPicPr>
-        <p:blipFill>
-          <a:blip r:embed="rId3"/>
-          <a:stretch>
-            <a:fillRect/>
-          </a:stretch>
-        </p:blipFill>
-        <p:spPr>
-          <a:xfrm>
-            <a:off x="0" y="0"/>
-            <a:ext cx="5760720" cy="8229600"/>
-          </a:xfrm>
-          <a:prstGeom prst="rect">
-            <a:avLst/>
-          </a:prstGeom>
-        </p:spPr>
-      </p:pic>
-      <p:sp>
-        <p:nvSpPr>
-          <p:cNvPr id="3" name="Text 0"/>
-          <p:cNvSpPr/>
-          <p:nvPr/>
-        </p:nvSpPr>
-        <p:spPr>
-          <a:xfrm>
-            <a:off x="6244709" y="708660"/>
-            <a:ext cx="6778228" cy="712708"/>
-          </a:xfrm>
-          <a:prstGeom prst="rect">
-            <a:avLst/>
-          </a:prstGeom>
-          <a:noFill/>
-          <a:ln/>
-        </p:spPr>
-        <p:txBody>
-          <a:bodyPr wrap="none" lIns="0" tIns="0" rIns="0" bIns="0" rtlCol="0" anchor="t"/>
-          <a:lstStyle/>
-          <a:p>
-            <a:pPr marL="0" indent="0" algn="l">
-              <a:lnSpc>
-                <a:spcPts val="5600"/>
-              </a:lnSpc>
-              <a:buNone/>
-            </a:pPr>
-            <a:r>
-              <a:rPr lang="en-US" sz="4450" b="1" dirty="0">
-                <a:solidFill>
-                  <a:srgbClr val="2E3C4E"/>
-                </a:solidFill>
-                <a:latin typeface="Barlow Bold" pitchFamily="34" charset="0"/>
-                <a:ea typeface="Barlow Bold" pitchFamily="34" charset="-122"/>
-                <a:cs typeface="Barlow Bold" pitchFamily="34" charset="-120"/>
-              </a:rPr>
-              <a:t>Система безопасности</a:t>
-            </a:r>
-            <a:endParaRPr lang="en-US" sz="4450" dirty="0"/>
-          </a:p>
-        </p:txBody>
-      </p:sp>
-      <p:sp>
-        <p:nvSpPr>
-          <p:cNvPr id="4" name="Shape 1"/>
-          <p:cNvSpPr/>
-          <p:nvPr/>
-        </p:nvSpPr>
-        <p:spPr>
-          <a:xfrm>
-            <a:off x="6244709" y="1746290"/>
-            <a:ext cx="7627382" cy="1281232"/>
-          </a:xfrm>
-          <a:prstGeom prst="roundRect">
-            <a:avLst>
-              <a:gd name="adj" fmla="val 25366"/>
-            </a:avLst>
-          </a:prstGeom>
-          <a:solidFill>
-            <a:srgbClr val="D4E9F7"/>
-          </a:solidFill>
-          <a:ln w="7620">
-            <a:solidFill>
-              <a:srgbClr val="BACFDD"/>
-            </a:solidFill>
-            <a:prstDash val="solid"/>
-          </a:ln>
-        </p:spPr>
-      </p:sp>
-      <p:sp>
-        <p:nvSpPr>
-          <p:cNvPr id="5" name="Text 2"/>
-          <p:cNvSpPr/>
-          <p:nvPr/>
-        </p:nvSpPr>
-        <p:spPr>
-          <a:xfrm>
-            <a:off x="6468904" y="1970484"/>
-            <a:ext cx="2850713" cy="356235"/>
-          </a:xfrm>
-          <a:prstGeom prst="rect">
-            <a:avLst/>
-          </a:prstGeom>
-          <a:noFill/>
-          <a:ln/>
-        </p:spPr>
-        <p:txBody>
-          <a:bodyPr wrap="none" lIns="0" tIns="0" rIns="0" bIns="0" rtlCol="0" anchor="t"/>
-          <a:lstStyle/>
-          <a:p>
-            <a:pPr marL="0" indent="0" algn="l">
-              <a:lnSpc>
-                <a:spcPts val="2800"/>
-              </a:lnSpc>
-              <a:buNone/>
-            </a:pPr>
-            <a:r>
-              <a:rPr lang="en-US" sz="2200" b="1" dirty="0">
-                <a:solidFill>
-                  <a:srgbClr val="384653"/>
-                </a:solidFill>
-                <a:latin typeface="Barlow Bold" pitchFamily="34" charset="0"/>
-                <a:ea typeface="Barlow Bold" pitchFamily="34" charset="-122"/>
-                <a:cs typeface="Barlow Bold" pitchFamily="34" charset="-120"/>
-              </a:rPr>
-              <a:t>JWT-токены</a:t>
-            </a:r>
-            <a:endParaRPr lang="en-US" sz="2200" dirty="0"/>
-          </a:p>
-        </p:txBody>
-      </p:sp>
-      <p:sp>
-        <p:nvSpPr>
-          <p:cNvPr id="6" name="Text 3"/>
-          <p:cNvSpPr/>
-          <p:nvPr/>
-        </p:nvSpPr>
-        <p:spPr>
-          <a:xfrm>
-            <a:off x="6468904" y="2456617"/>
-            <a:ext cx="7178993" cy="346710"/>
-          </a:xfrm>
-          <a:prstGeom prst="rect">
-            <a:avLst/>
-          </a:prstGeom>
-          <a:noFill/>
-          <a:ln/>
-        </p:spPr>
-        <p:txBody>
-          <a:bodyPr wrap="none" lIns="0" tIns="0" rIns="0" bIns="0" rtlCol="0" anchor="t"/>
-          <a:lstStyle/>
-          <a:p>
-            <a:pPr marL="0" indent="0" algn="l">
-              <a:lnSpc>
-                <a:spcPts val="2700"/>
-              </a:lnSpc>
-              <a:buNone/>
-            </a:pPr>
-            <a:r>
-              <a:rPr lang="en-US" sz="1700" dirty="0">
-                <a:solidFill>
-                  <a:srgbClr val="384653"/>
-                </a:solidFill>
-                <a:latin typeface="Montserrat" pitchFamily="34" charset="0"/>
-                <a:ea typeface="Montserrat" pitchFamily="34" charset="-122"/>
-                <a:cs typeface="Montserrat" pitchFamily="34" charset="-120"/>
-              </a:rPr>
-              <a:t>Аутентификация с проверкой при каждом запросе</a:t>
-            </a:r>
-            <a:endParaRPr lang="en-US" sz="1700" dirty="0"/>
-          </a:p>
-        </p:txBody>
-      </p:sp>
-      <p:sp>
-        <p:nvSpPr>
-          <p:cNvPr id="7" name="Shape 4"/>
-          <p:cNvSpPr/>
-          <p:nvPr/>
-        </p:nvSpPr>
-        <p:spPr>
-          <a:xfrm>
-            <a:off x="6244709" y="3244096"/>
-            <a:ext cx="7627382" cy="1281232"/>
-          </a:xfrm>
-          <a:prstGeom prst="roundRect">
-            <a:avLst>
-              <a:gd name="adj" fmla="val 25366"/>
-            </a:avLst>
-          </a:prstGeom>
-          <a:solidFill>
-            <a:srgbClr val="D4E9F7"/>
-          </a:solidFill>
-          <a:ln w="7620">
-            <a:solidFill>
-              <a:srgbClr val="BACFDD"/>
-            </a:solidFill>
-            <a:prstDash val="solid"/>
-          </a:ln>
-        </p:spPr>
-      </p:sp>
-      <p:sp>
-        <p:nvSpPr>
-          <p:cNvPr id="8" name="Text 5"/>
-          <p:cNvSpPr/>
-          <p:nvPr/>
-        </p:nvSpPr>
-        <p:spPr>
-          <a:xfrm>
-            <a:off x="6468904" y="3468291"/>
-            <a:ext cx="2850713" cy="356235"/>
-          </a:xfrm>
-          <a:prstGeom prst="rect">
-            <a:avLst/>
-          </a:prstGeom>
-          <a:noFill/>
-          <a:ln/>
-        </p:spPr>
-        <p:txBody>
-          <a:bodyPr wrap="none" lIns="0" tIns="0" rIns="0" bIns="0" rtlCol="0" anchor="t"/>
-          <a:lstStyle/>
-          <a:p>
-            <a:pPr marL="0" indent="0" algn="l">
-              <a:lnSpc>
-                <a:spcPts val="2800"/>
-              </a:lnSpc>
-              <a:buNone/>
-            </a:pPr>
-            <a:r>
-              <a:rPr lang="en-US" sz="2200" b="1" dirty="0">
-                <a:solidFill>
-                  <a:srgbClr val="384653"/>
-                </a:solidFill>
-                <a:latin typeface="Barlow Bold" pitchFamily="34" charset="0"/>
-                <a:ea typeface="Barlow Bold" pitchFamily="34" charset="-122"/>
-                <a:cs typeface="Barlow Bold" pitchFamily="34" charset="-120"/>
-              </a:rPr>
-              <a:t>Refresh-токены</a:t>
-            </a:r>
-            <a:endParaRPr lang="en-US" sz="2200" dirty="0"/>
-          </a:p>
-        </p:txBody>
-      </p:sp>
-      <p:sp>
-        <p:nvSpPr>
-          <p:cNvPr id="9" name="Text 6"/>
-          <p:cNvSpPr/>
-          <p:nvPr/>
-        </p:nvSpPr>
-        <p:spPr>
-          <a:xfrm>
-            <a:off x="6468904" y="3954423"/>
-            <a:ext cx="7178993" cy="346710"/>
-          </a:xfrm>
-          <a:prstGeom prst="rect">
-            <a:avLst/>
-          </a:prstGeom>
-          <a:noFill/>
-          <a:ln/>
-        </p:spPr>
-        <p:txBody>
-          <a:bodyPr wrap="none" lIns="0" tIns="0" rIns="0" bIns="0" rtlCol="0" anchor="t"/>
-          <a:lstStyle/>
-          <a:p>
-            <a:pPr marL="0" indent="0" algn="l">
-              <a:lnSpc>
-                <a:spcPts val="2700"/>
-              </a:lnSpc>
-              <a:buNone/>
-            </a:pPr>
-            <a:r>
-              <a:rPr lang="en-US" sz="1700" dirty="0">
-                <a:solidFill>
-                  <a:srgbClr val="384653"/>
-                </a:solidFill>
-                <a:latin typeface="Montserrat" pitchFamily="34" charset="0"/>
-                <a:ea typeface="Montserrat" pitchFamily="34" charset="-122"/>
-                <a:cs typeface="Montserrat" pitchFamily="34" charset="-120"/>
-              </a:rPr>
-              <a:t>Обеспечение непрерывности сессии</a:t>
-            </a:r>
-            <a:endParaRPr lang="en-US" sz="1700" dirty="0"/>
-          </a:p>
-        </p:txBody>
-      </p:sp>
-      <p:sp>
-        <p:nvSpPr>
-          <p:cNvPr id="10" name="Shape 7"/>
-          <p:cNvSpPr/>
-          <p:nvPr/>
-        </p:nvSpPr>
-        <p:spPr>
-          <a:xfrm>
-            <a:off x="6244709" y="4741902"/>
-            <a:ext cx="7627382" cy="1281232"/>
-          </a:xfrm>
-          <a:prstGeom prst="roundRect">
-            <a:avLst>
-              <a:gd name="adj" fmla="val 25366"/>
-            </a:avLst>
-          </a:prstGeom>
-          <a:solidFill>
-            <a:srgbClr val="D4E9F7"/>
-          </a:solidFill>
-          <a:ln w="7620">
-            <a:solidFill>
-              <a:srgbClr val="BACFDD"/>
-            </a:solidFill>
-            <a:prstDash val="solid"/>
-          </a:ln>
-        </p:spPr>
-      </p:sp>
-      <p:sp>
-        <p:nvSpPr>
-          <p:cNvPr id="11" name="Text 8"/>
-          <p:cNvSpPr/>
-          <p:nvPr/>
-        </p:nvSpPr>
-        <p:spPr>
-          <a:xfrm>
-            <a:off x="6468904" y="4966097"/>
-            <a:ext cx="2850713" cy="356235"/>
-          </a:xfrm>
-          <a:prstGeom prst="rect">
-            <a:avLst/>
-          </a:prstGeom>
-          <a:noFill/>
-          <a:ln/>
-        </p:spPr>
-        <p:txBody>
-          <a:bodyPr wrap="none" lIns="0" tIns="0" rIns="0" bIns="0" rtlCol="0" anchor="t"/>
-          <a:lstStyle/>
-          <a:p>
-            <a:pPr marL="0" indent="0" algn="l">
-              <a:lnSpc>
-                <a:spcPts val="2800"/>
-              </a:lnSpc>
-              <a:buNone/>
-            </a:pPr>
-            <a:r>
-              <a:rPr lang="en-US" sz="2200" b="1" dirty="0">
-                <a:solidFill>
-                  <a:srgbClr val="384653"/>
-                </a:solidFill>
-                <a:latin typeface="Barlow Bold" pitchFamily="34" charset="0"/>
-                <a:ea typeface="Barlow Bold" pitchFamily="34" charset="-122"/>
-                <a:cs typeface="Barlow Bold" pitchFamily="34" charset="-120"/>
-              </a:rPr>
-              <a:t>Ролевая модель</a:t>
-            </a:r>
-            <a:endParaRPr lang="en-US" sz="2200" dirty="0"/>
-          </a:p>
-        </p:txBody>
-      </p:sp>
-      <p:sp>
-        <p:nvSpPr>
-          <p:cNvPr id="12" name="Text 9"/>
-          <p:cNvSpPr/>
-          <p:nvPr/>
-        </p:nvSpPr>
-        <p:spPr>
-          <a:xfrm>
-            <a:off x="6468904" y="5452229"/>
-            <a:ext cx="7178993" cy="346710"/>
-          </a:xfrm>
-          <a:prstGeom prst="rect">
-            <a:avLst/>
-          </a:prstGeom>
-          <a:noFill/>
-          <a:ln/>
-        </p:spPr>
-        <p:txBody>
-          <a:bodyPr wrap="none" lIns="0" tIns="0" rIns="0" bIns="0" rtlCol="0" anchor="t"/>
-          <a:lstStyle/>
-          <a:p>
-            <a:pPr marL="0" indent="0" algn="l">
-              <a:lnSpc>
-                <a:spcPts val="2700"/>
-              </a:lnSpc>
-              <a:buNone/>
-            </a:pPr>
-            <a:r>
-              <a:rPr lang="en-US" sz="1700" dirty="0">
-                <a:solidFill>
-                  <a:srgbClr val="384653"/>
-                </a:solidFill>
-                <a:latin typeface="Montserrat" pitchFamily="34" charset="0"/>
-                <a:ea typeface="Montserrat" pitchFamily="34" charset="-122"/>
-                <a:cs typeface="Montserrat" pitchFamily="34" charset="-120"/>
-              </a:rPr>
-              <a:t>Разграничение доступа между пользователями</a:t>
-            </a:r>
-            <a:endParaRPr lang="en-US" sz="1700" dirty="0"/>
-          </a:p>
-        </p:txBody>
-      </p:sp>
-      <p:sp>
-        <p:nvSpPr>
-          <p:cNvPr id="13" name="Shape 10"/>
-          <p:cNvSpPr/>
-          <p:nvPr/>
-        </p:nvSpPr>
-        <p:spPr>
-          <a:xfrm>
-            <a:off x="6244709" y="6239708"/>
-            <a:ext cx="7627382" cy="1281232"/>
-          </a:xfrm>
-          <a:prstGeom prst="roundRect">
-            <a:avLst>
-              <a:gd name="adj" fmla="val 25366"/>
-            </a:avLst>
-          </a:prstGeom>
-          <a:solidFill>
-            <a:srgbClr val="D4E9F7"/>
-          </a:solidFill>
-          <a:ln w="7620">
-            <a:solidFill>
-              <a:srgbClr val="BACFDD"/>
-            </a:solidFill>
-            <a:prstDash val="solid"/>
-          </a:ln>
-        </p:spPr>
-      </p:sp>
-      <p:sp>
-        <p:nvSpPr>
-          <p:cNvPr id="14" name="Text 11"/>
-          <p:cNvSpPr/>
-          <p:nvPr/>
-        </p:nvSpPr>
-        <p:spPr>
-          <a:xfrm>
-            <a:off x="6468904" y="6463903"/>
-            <a:ext cx="6484025" cy="356235"/>
-          </a:xfrm>
-          <a:prstGeom prst="rect">
-            <a:avLst/>
-          </a:prstGeom>
-          <a:noFill/>
-          <a:ln/>
-        </p:spPr>
-        <p:txBody>
-          <a:bodyPr wrap="none" lIns="0" tIns="0" rIns="0" bIns="0" rtlCol="0" anchor="t"/>
-          <a:lstStyle/>
-          <a:p>
-            <a:pPr marL="0" indent="0" algn="l">
-              <a:lnSpc>
-                <a:spcPts val="2800"/>
-              </a:lnSpc>
-              <a:buNone/>
-            </a:pPr>
-            <a:r>
-              <a:rPr lang="en-US" sz="2200" b="1" dirty="0">
-                <a:solidFill>
-                  <a:srgbClr val="384653"/>
-                </a:solidFill>
-                <a:latin typeface="Barlow Bold" pitchFamily="34" charset="0"/>
-                <a:ea typeface="Barlow Bold" pitchFamily="34" charset="-122"/>
-                <a:cs typeface="Barlow Bold" pitchFamily="34" charset="-120"/>
-              </a:rPr>
-              <a:t>Шифрование AES-256 и хеширование bcrypt</a:t>
-            </a:r>
-            <a:endParaRPr lang="en-US" sz="2200" dirty="0"/>
-          </a:p>
-        </p:txBody>
-      </p:sp>
-      <p:sp>
-        <p:nvSpPr>
-          <p:cNvPr id="15" name="Text 12"/>
-          <p:cNvSpPr/>
-          <p:nvPr/>
-        </p:nvSpPr>
-        <p:spPr>
-          <a:xfrm>
-            <a:off x="6468904" y="6950035"/>
-            <a:ext cx="7178993" cy="346710"/>
-          </a:xfrm>
-          <a:prstGeom prst="rect">
-            <a:avLst/>
-          </a:prstGeom>
-          <a:noFill/>
-          <a:ln/>
-        </p:spPr>
-        <p:txBody>
-          <a:bodyPr wrap="none" lIns="0" tIns="0" rIns="0" bIns="0" rtlCol="0" anchor="t"/>
-          <a:lstStyle/>
-          <a:p>
-            <a:pPr marL="0" indent="0" algn="l">
-              <a:lnSpc>
-                <a:spcPts val="2700"/>
-              </a:lnSpc>
-              <a:buNone/>
-            </a:pPr>
-            <a:r>
-              <a:rPr lang="en-US" sz="1700" dirty="0">
-                <a:solidFill>
-                  <a:srgbClr val="384653"/>
-                </a:solidFill>
-                <a:latin typeface="Montserrat" pitchFamily="34" charset="0"/>
-                <a:ea typeface="Montserrat" pitchFamily="34" charset="-122"/>
-                <a:cs typeface="Montserrat" pitchFamily="34" charset="-120"/>
-              </a:rPr>
-              <a:t>Защита учетных данных преподавателей</a:t>
-            </a:r>
-            <a:endParaRPr lang="en-US" sz="1700" dirty="0"/>
-          </a:p>
-        </p:txBody>
-      </p:sp>
       <p:sp>
         <p:nvSpPr>
           <p:cNvPr id="16" name="Прямоугольник 15">
@@ -5667,6 +6602,1011 @@
           <a:p>
             <a:pPr algn="ctr"/>
             <a:endParaRPr lang="ru-RU"/>
+          </a:p>
+        </p:txBody>
+      </p:sp>
+      <p:pic>
+        <p:nvPicPr>
+          <p:cNvPr id="2" name="Image 0" descr="preencoded.png"/>
+          <p:cNvPicPr>
+            <a:picLocks noChangeAspect="1"/>
+          </p:cNvPicPr>
+          <p:nvPr/>
+        </p:nvPicPr>
+        <p:blipFill>
+          <a:blip r:embed="rId3"/>
+          <a:stretch>
+            <a:fillRect/>
+          </a:stretch>
+        </p:blipFill>
+        <p:spPr>
+          <a:xfrm>
+            <a:off x="0" y="0"/>
+            <a:ext cx="5760720" cy="8229600"/>
+          </a:xfrm>
+          <a:prstGeom prst="rect">
+            <a:avLst/>
+          </a:prstGeom>
+        </p:spPr>
+      </p:pic>
+      <p:sp>
+        <p:nvSpPr>
+          <p:cNvPr id="3" name="Text 0"/>
+          <p:cNvSpPr/>
+          <p:nvPr/>
+        </p:nvSpPr>
+        <p:spPr>
+          <a:xfrm>
+            <a:off x="6174701" y="286361"/>
+            <a:ext cx="6778228" cy="712708"/>
+          </a:xfrm>
+          <a:prstGeom prst="rect">
+            <a:avLst/>
+          </a:prstGeom>
+          <a:noFill/>
+          <a:ln/>
+        </p:spPr>
+        <p:txBody>
+          <a:bodyPr wrap="none" lIns="0" tIns="0" rIns="0" bIns="0" rtlCol="0" anchor="t"/>
+          <a:lstStyle/>
+          <a:p>
+            <a:pPr marL="0" indent="0" algn="l">
+              <a:lnSpc>
+                <a:spcPts val="5600"/>
+              </a:lnSpc>
+              <a:buNone/>
+            </a:pPr>
+            <a:r>
+              <a:rPr lang="en-US" sz="4450" b="1" dirty="0">
+                <a:solidFill>
+                  <a:srgbClr val="2E3C4E"/>
+                </a:solidFill>
+                <a:latin typeface="Barlow Bold" pitchFamily="34" charset="0"/>
+                <a:ea typeface="Barlow Bold" pitchFamily="34" charset="-122"/>
+                <a:cs typeface="Barlow Bold" pitchFamily="34" charset="-120"/>
+              </a:rPr>
+              <a:t>Система безопасности</a:t>
+            </a:r>
+            <a:endParaRPr lang="en-US" sz="4450" dirty="0"/>
+          </a:p>
+        </p:txBody>
+      </p:sp>
+      <p:sp>
+        <p:nvSpPr>
+          <p:cNvPr id="4" name="Shape 1"/>
+          <p:cNvSpPr/>
+          <p:nvPr/>
+        </p:nvSpPr>
+        <p:spPr>
+          <a:xfrm>
+            <a:off x="6244709" y="2077891"/>
+            <a:ext cx="7627382" cy="1281232"/>
+          </a:xfrm>
+          <a:prstGeom prst="roundRect">
+            <a:avLst>
+              <a:gd name="adj" fmla="val 25366"/>
+            </a:avLst>
+          </a:prstGeom>
+          <a:solidFill>
+            <a:srgbClr val="D4E9F7"/>
+          </a:solidFill>
+          <a:ln w="7620">
+            <a:solidFill>
+              <a:srgbClr val="BACFDD"/>
+            </a:solidFill>
+            <a:prstDash val="solid"/>
+          </a:ln>
+        </p:spPr>
+      </p:sp>
+      <p:sp>
+        <p:nvSpPr>
+          <p:cNvPr id="5" name="Text 2"/>
+          <p:cNvSpPr/>
+          <p:nvPr/>
+        </p:nvSpPr>
+        <p:spPr>
+          <a:xfrm>
+            <a:off x="6468904" y="2302085"/>
+            <a:ext cx="2850713" cy="356235"/>
+          </a:xfrm>
+          <a:prstGeom prst="rect">
+            <a:avLst/>
+          </a:prstGeom>
+          <a:noFill/>
+          <a:ln/>
+        </p:spPr>
+        <p:txBody>
+          <a:bodyPr wrap="none" lIns="0" tIns="0" rIns="0" bIns="0" rtlCol="0" anchor="t"/>
+          <a:lstStyle/>
+          <a:p>
+            <a:pPr marL="0" indent="0" algn="l">
+              <a:lnSpc>
+                <a:spcPts val="2800"/>
+              </a:lnSpc>
+              <a:buNone/>
+            </a:pPr>
+            <a:r>
+              <a:rPr lang="en-US" sz="3200" b="1" dirty="0">
+                <a:solidFill>
+                  <a:srgbClr val="384653"/>
+                </a:solidFill>
+                <a:latin typeface="Barlow Bold" pitchFamily="34" charset="0"/>
+                <a:ea typeface="Barlow Bold" pitchFamily="34" charset="-122"/>
+                <a:cs typeface="Barlow Bold" pitchFamily="34" charset="-120"/>
+              </a:rPr>
+              <a:t>Access-</a:t>
+            </a:r>
+            <a:r>
+              <a:rPr lang="en-US" sz="3200" b="1" dirty="0" err="1">
+                <a:solidFill>
+                  <a:srgbClr val="384653"/>
+                </a:solidFill>
+                <a:latin typeface="Barlow Bold" pitchFamily="34" charset="0"/>
+                <a:ea typeface="Barlow Bold" pitchFamily="34" charset="-122"/>
+                <a:cs typeface="Barlow Bold" pitchFamily="34" charset="-120"/>
+              </a:rPr>
+              <a:t>токены</a:t>
+            </a:r>
+            <a:endParaRPr lang="en-US" sz="3200" dirty="0"/>
+          </a:p>
+        </p:txBody>
+      </p:sp>
+      <p:sp>
+        <p:nvSpPr>
+          <p:cNvPr id="6" name="Text 3"/>
+          <p:cNvSpPr/>
+          <p:nvPr/>
+        </p:nvSpPr>
+        <p:spPr>
+          <a:xfrm>
+            <a:off x="6468904" y="2788218"/>
+            <a:ext cx="7178993" cy="346710"/>
+          </a:xfrm>
+          <a:prstGeom prst="rect">
+            <a:avLst/>
+          </a:prstGeom>
+          <a:noFill/>
+          <a:ln/>
+        </p:spPr>
+        <p:txBody>
+          <a:bodyPr wrap="none" lIns="0" tIns="0" rIns="0" bIns="0" rtlCol="0" anchor="t"/>
+          <a:lstStyle/>
+          <a:p>
+            <a:pPr marL="0" indent="0" algn="l">
+              <a:lnSpc>
+                <a:spcPts val="2700"/>
+              </a:lnSpc>
+              <a:buNone/>
+            </a:pPr>
+            <a:r>
+              <a:rPr lang="en-US" sz="2400" dirty="0" err="1">
+                <a:solidFill>
+                  <a:srgbClr val="384653"/>
+                </a:solidFill>
+                <a:latin typeface="Montserrat" pitchFamily="34" charset="0"/>
+                <a:ea typeface="Montserrat" pitchFamily="34" charset="-122"/>
+                <a:cs typeface="Montserrat" pitchFamily="34" charset="-120"/>
+              </a:rPr>
+              <a:t>Аутентификация</a:t>
+            </a:r>
+            <a:r>
+              <a:rPr lang="en-US" sz="2400" dirty="0">
+                <a:solidFill>
+                  <a:srgbClr val="384653"/>
+                </a:solidFill>
+                <a:latin typeface="Montserrat" pitchFamily="34" charset="0"/>
+                <a:ea typeface="Montserrat" pitchFamily="34" charset="-122"/>
+                <a:cs typeface="Montserrat" pitchFamily="34" charset="-120"/>
+              </a:rPr>
+              <a:t> </a:t>
+            </a:r>
+            <a:r>
+              <a:rPr lang="ru-RU" sz="2400" dirty="0">
+                <a:solidFill>
+                  <a:srgbClr val="384653"/>
+                </a:solidFill>
+                <a:latin typeface="Montserrat" pitchFamily="34" charset="0"/>
+                <a:ea typeface="Montserrat" pitchFamily="34" charset="-122"/>
+                <a:cs typeface="Montserrat" pitchFamily="34" charset="-120"/>
+              </a:rPr>
+              <a:t>и</a:t>
+            </a:r>
+            <a:r>
+              <a:rPr lang="en-US" sz="2400" dirty="0">
+                <a:solidFill>
+                  <a:srgbClr val="384653"/>
+                </a:solidFill>
+                <a:latin typeface="Montserrat" pitchFamily="34" charset="0"/>
+                <a:ea typeface="Montserrat" pitchFamily="34" charset="-122"/>
+                <a:cs typeface="Montserrat" pitchFamily="34" charset="-120"/>
+              </a:rPr>
+              <a:t> </a:t>
+            </a:r>
+            <a:r>
+              <a:rPr lang="en-US" sz="2400" dirty="0" err="1">
+                <a:solidFill>
+                  <a:srgbClr val="384653"/>
+                </a:solidFill>
+                <a:latin typeface="Montserrat" pitchFamily="34" charset="0"/>
+                <a:ea typeface="Montserrat" pitchFamily="34" charset="-122"/>
+                <a:cs typeface="Montserrat" pitchFamily="34" charset="-120"/>
+              </a:rPr>
+              <a:t>проверк</a:t>
+            </a:r>
+            <a:r>
+              <a:rPr lang="ru-RU" sz="2400" dirty="0">
+                <a:solidFill>
+                  <a:srgbClr val="384653"/>
+                </a:solidFill>
+                <a:latin typeface="Montserrat" pitchFamily="34" charset="0"/>
+                <a:ea typeface="Montserrat" pitchFamily="34" charset="-122"/>
+                <a:cs typeface="Montserrat" pitchFamily="34" charset="-120"/>
+              </a:rPr>
+              <a:t>а</a:t>
+            </a:r>
+            <a:r>
+              <a:rPr lang="en-US" sz="2400" dirty="0">
+                <a:solidFill>
+                  <a:srgbClr val="384653"/>
+                </a:solidFill>
+                <a:latin typeface="Montserrat" pitchFamily="34" charset="0"/>
+                <a:ea typeface="Montserrat" pitchFamily="34" charset="-122"/>
+                <a:cs typeface="Montserrat" pitchFamily="34" charset="-120"/>
+              </a:rPr>
+              <a:t> </a:t>
+            </a:r>
+            <a:r>
+              <a:rPr lang="ru-RU" sz="2400" dirty="0">
+                <a:solidFill>
+                  <a:srgbClr val="384653"/>
+                </a:solidFill>
+                <a:latin typeface="Montserrat" pitchFamily="34" charset="0"/>
+                <a:ea typeface="Montserrat" pitchFamily="34" charset="-122"/>
+                <a:cs typeface="Montserrat" pitchFamily="34" charset="-120"/>
+              </a:rPr>
+              <a:t>при </a:t>
+            </a:r>
+            <a:r>
+              <a:rPr lang="en-US" sz="2400" dirty="0" err="1">
+                <a:solidFill>
+                  <a:srgbClr val="384653"/>
+                </a:solidFill>
+                <a:latin typeface="Montserrat" pitchFamily="34" charset="0"/>
+                <a:ea typeface="Montserrat" pitchFamily="34" charset="-122"/>
+                <a:cs typeface="Montserrat" pitchFamily="34" charset="-120"/>
+              </a:rPr>
+              <a:t>запрос</a:t>
+            </a:r>
+            <a:r>
+              <a:rPr lang="ru-RU" sz="2400" dirty="0">
+                <a:solidFill>
+                  <a:srgbClr val="384653"/>
+                </a:solidFill>
+                <a:latin typeface="Montserrat" pitchFamily="34" charset="0"/>
+                <a:ea typeface="Montserrat" pitchFamily="34" charset="-122"/>
+                <a:cs typeface="Montserrat" pitchFamily="34" charset="-120"/>
+              </a:rPr>
+              <a:t>ах</a:t>
+            </a:r>
+            <a:endParaRPr lang="en-US" sz="2400" dirty="0"/>
+          </a:p>
+        </p:txBody>
+      </p:sp>
+      <p:sp>
+        <p:nvSpPr>
+          <p:cNvPr id="10" name="Shape 7"/>
+          <p:cNvSpPr/>
+          <p:nvPr/>
+        </p:nvSpPr>
+        <p:spPr>
+          <a:xfrm>
+            <a:off x="6244709" y="4809689"/>
+            <a:ext cx="7627382" cy="1281232"/>
+          </a:xfrm>
+          <a:prstGeom prst="roundRect">
+            <a:avLst>
+              <a:gd name="adj" fmla="val 25366"/>
+            </a:avLst>
+          </a:prstGeom>
+          <a:solidFill>
+            <a:srgbClr val="D4E9F7"/>
+          </a:solidFill>
+          <a:ln w="7620">
+            <a:solidFill>
+              <a:srgbClr val="BACFDD"/>
+            </a:solidFill>
+            <a:prstDash val="solid"/>
+          </a:ln>
+        </p:spPr>
+      </p:sp>
+      <p:sp>
+        <p:nvSpPr>
+          <p:cNvPr id="11" name="Text 8"/>
+          <p:cNvSpPr/>
+          <p:nvPr/>
+        </p:nvSpPr>
+        <p:spPr>
+          <a:xfrm>
+            <a:off x="6468904" y="5033884"/>
+            <a:ext cx="2850713" cy="356235"/>
+          </a:xfrm>
+          <a:prstGeom prst="rect">
+            <a:avLst/>
+          </a:prstGeom>
+          <a:noFill/>
+          <a:ln/>
+        </p:spPr>
+        <p:txBody>
+          <a:bodyPr wrap="none" lIns="0" tIns="0" rIns="0" bIns="0" rtlCol="0" anchor="t"/>
+          <a:lstStyle/>
+          <a:p>
+            <a:pPr marL="0" indent="0" algn="l">
+              <a:lnSpc>
+                <a:spcPts val="2800"/>
+              </a:lnSpc>
+              <a:buNone/>
+            </a:pPr>
+            <a:r>
+              <a:rPr lang="en-US" sz="3200" b="1" dirty="0">
+                <a:solidFill>
+                  <a:srgbClr val="384653"/>
+                </a:solidFill>
+                <a:latin typeface="Barlow Bold" pitchFamily="34" charset="0"/>
+                <a:ea typeface="Barlow Bold" pitchFamily="34" charset="-122"/>
+                <a:cs typeface="Barlow Bold" pitchFamily="34" charset="-120"/>
+              </a:rPr>
+              <a:t>Ролевая модель</a:t>
+            </a:r>
+            <a:endParaRPr lang="en-US" sz="3200" dirty="0"/>
+          </a:p>
+        </p:txBody>
+      </p:sp>
+      <p:sp>
+        <p:nvSpPr>
+          <p:cNvPr id="12" name="Text 9"/>
+          <p:cNvSpPr/>
+          <p:nvPr/>
+        </p:nvSpPr>
+        <p:spPr>
+          <a:xfrm>
+            <a:off x="6468904" y="5520016"/>
+            <a:ext cx="7178993" cy="346710"/>
+          </a:xfrm>
+          <a:prstGeom prst="rect">
+            <a:avLst/>
+          </a:prstGeom>
+          <a:noFill/>
+          <a:ln/>
+        </p:spPr>
+        <p:txBody>
+          <a:bodyPr wrap="none" lIns="0" tIns="0" rIns="0" bIns="0" rtlCol="0" anchor="t"/>
+          <a:lstStyle/>
+          <a:p>
+            <a:pPr marL="0" indent="0" algn="l">
+              <a:lnSpc>
+                <a:spcPts val="2700"/>
+              </a:lnSpc>
+              <a:buNone/>
+            </a:pPr>
+            <a:r>
+              <a:rPr lang="en-US" sz="2400" dirty="0">
+                <a:solidFill>
+                  <a:srgbClr val="384653"/>
+                </a:solidFill>
+                <a:latin typeface="Montserrat" pitchFamily="34" charset="0"/>
+                <a:ea typeface="Montserrat" pitchFamily="34" charset="-122"/>
+                <a:cs typeface="Montserrat" pitchFamily="34" charset="-120"/>
+              </a:rPr>
+              <a:t>Разграничение </a:t>
+            </a:r>
+            <a:r>
+              <a:rPr lang="en-US" sz="2400" dirty="0" err="1">
+                <a:solidFill>
+                  <a:srgbClr val="384653"/>
+                </a:solidFill>
+                <a:latin typeface="Montserrat" pitchFamily="34" charset="0"/>
+                <a:ea typeface="Montserrat" pitchFamily="34" charset="-122"/>
+                <a:cs typeface="Montserrat" pitchFamily="34" charset="-120"/>
+              </a:rPr>
+              <a:t>доступа</a:t>
+            </a:r>
+            <a:r>
+              <a:rPr lang="en-US" sz="2400" dirty="0">
+                <a:solidFill>
+                  <a:srgbClr val="384653"/>
+                </a:solidFill>
+                <a:latin typeface="Montserrat" pitchFamily="34" charset="0"/>
+                <a:ea typeface="Montserrat" pitchFamily="34" charset="-122"/>
+                <a:cs typeface="Montserrat" pitchFamily="34" charset="-120"/>
+              </a:rPr>
+              <a:t> </a:t>
+            </a:r>
+            <a:r>
+              <a:rPr lang="en-US" sz="2400" dirty="0" err="1">
+                <a:solidFill>
+                  <a:srgbClr val="384653"/>
+                </a:solidFill>
+                <a:latin typeface="Montserrat" pitchFamily="34" charset="0"/>
+                <a:ea typeface="Montserrat" pitchFamily="34" charset="-122"/>
+                <a:cs typeface="Montserrat" pitchFamily="34" charset="-120"/>
+              </a:rPr>
+              <a:t>пользовател</a:t>
+            </a:r>
+            <a:r>
+              <a:rPr lang="ru-RU" sz="2400" dirty="0">
+                <a:solidFill>
+                  <a:srgbClr val="384653"/>
+                </a:solidFill>
+                <a:latin typeface="Montserrat" pitchFamily="34" charset="0"/>
+                <a:ea typeface="Montserrat" pitchFamily="34" charset="-122"/>
+                <a:cs typeface="Montserrat" pitchFamily="34" charset="-120"/>
+              </a:rPr>
+              <a:t>ей</a:t>
+            </a:r>
+            <a:endParaRPr lang="en-US" sz="2400" dirty="0"/>
+          </a:p>
+        </p:txBody>
+      </p:sp>
+      <p:sp>
+        <p:nvSpPr>
+          <p:cNvPr id="13" name="Shape 10"/>
+          <p:cNvSpPr/>
+          <p:nvPr/>
+        </p:nvSpPr>
+        <p:spPr>
+          <a:xfrm>
+            <a:off x="6244709" y="6173494"/>
+            <a:ext cx="7627382" cy="1281232"/>
+          </a:xfrm>
+          <a:prstGeom prst="roundRect">
+            <a:avLst>
+              <a:gd name="adj" fmla="val 25366"/>
+            </a:avLst>
+          </a:prstGeom>
+          <a:solidFill>
+            <a:srgbClr val="D4E9F7"/>
+          </a:solidFill>
+          <a:ln w="7620">
+            <a:solidFill>
+              <a:srgbClr val="BACFDD"/>
+            </a:solidFill>
+            <a:prstDash val="solid"/>
+          </a:ln>
+        </p:spPr>
+      </p:sp>
+      <p:sp>
+        <p:nvSpPr>
+          <p:cNvPr id="14" name="Text 11"/>
+          <p:cNvSpPr/>
+          <p:nvPr/>
+        </p:nvSpPr>
+        <p:spPr>
+          <a:xfrm>
+            <a:off x="6468904" y="6397689"/>
+            <a:ext cx="6484025" cy="356235"/>
+          </a:xfrm>
+          <a:prstGeom prst="rect">
+            <a:avLst/>
+          </a:prstGeom>
+          <a:noFill/>
+          <a:ln/>
+        </p:spPr>
+        <p:txBody>
+          <a:bodyPr wrap="none" lIns="0" tIns="0" rIns="0" bIns="0" rtlCol="0" anchor="t"/>
+          <a:lstStyle/>
+          <a:p>
+            <a:pPr marL="0" indent="0" algn="l">
+              <a:lnSpc>
+                <a:spcPts val="2800"/>
+              </a:lnSpc>
+              <a:buNone/>
+            </a:pPr>
+            <a:r>
+              <a:rPr lang="en-US" sz="3200" b="1" dirty="0">
+                <a:solidFill>
+                  <a:srgbClr val="384653"/>
+                </a:solidFill>
+                <a:latin typeface="Barlow Bold" pitchFamily="34" charset="0"/>
+                <a:ea typeface="Barlow Bold" pitchFamily="34" charset="-122"/>
+                <a:cs typeface="Barlow Bold" pitchFamily="34" charset="-120"/>
+              </a:rPr>
+              <a:t>Шифрование AES-256 и </a:t>
+            </a:r>
+            <a:r>
+              <a:rPr lang="en-US" sz="3200" b="1" dirty="0" err="1">
+                <a:solidFill>
+                  <a:srgbClr val="384653"/>
+                </a:solidFill>
+                <a:latin typeface="Barlow Bold" pitchFamily="34" charset="0"/>
+                <a:ea typeface="Barlow Bold" pitchFamily="34" charset="-122"/>
+                <a:cs typeface="Barlow Bold" pitchFamily="34" charset="-120"/>
+              </a:rPr>
+              <a:t>bcrypt</a:t>
+            </a:r>
+            <a:endParaRPr lang="en-US" sz="3200" dirty="0"/>
+          </a:p>
+        </p:txBody>
+      </p:sp>
+      <p:sp>
+        <p:nvSpPr>
+          <p:cNvPr id="15" name="Text 12"/>
+          <p:cNvSpPr/>
+          <p:nvPr/>
+        </p:nvSpPr>
+        <p:spPr>
+          <a:xfrm>
+            <a:off x="6468904" y="6883821"/>
+            <a:ext cx="7178993" cy="346710"/>
+          </a:xfrm>
+          <a:prstGeom prst="rect">
+            <a:avLst/>
+          </a:prstGeom>
+          <a:noFill/>
+          <a:ln/>
+        </p:spPr>
+        <p:txBody>
+          <a:bodyPr wrap="none" lIns="0" tIns="0" rIns="0" bIns="0" rtlCol="0" anchor="t"/>
+          <a:lstStyle/>
+          <a:p>
+            <a:pPr marL="0" indent="0" algn="l">
+              <a:lnSpc>
+                <a:spcPts val="2700"/>
+              </a:lnSpc>
+              <a:buNone/>
+            </a:pPr>
+            <a:r>
+              <a:rPr lang="en-US" sz="2400" dirty="0">
+                <a:solidFill>
+                  <a:srgbClr val="384653"/>
+                </a:solidFill>
+                <a:latin typeface="Montserrat" pitchFamily="34" charset="0"/>
+                <a:ea typeface="Montserrat" pitchFamily="34" charset="-122"/>
+                <a:cs typeface="Montserrat" pitchFamily="34" charset="-120"/>
+              </a:rPr>
+              <a:t>Защита учетных данных преподавателей</a:t>
+            </a:r>
+            <a:endParaRPr lang="en-US" sz="2400" dirty="0"/>
+          </a:p>
+        </p:txBody>
+      </p:sp>
+      <p:sp>
+        <p:nvSpPr>
+          <p:cNvPr id="17" name="Text 2">
+            <a:extLst>
+              <a:ext uri="{FF2B5EF4-FFF2-40B4-BE49-F238E27FC236}">
+                <a16:creationId xmlns:a16="http://schemas.microsoft.com/office/drawing/2014/main" id="{142ADC48-BEE4-E621-1EC4-28D824113BDB}"/>
+              </a:ext>
+            </a:extLst>
+          </p:cNvPr>
+          <p:cNvSpPr/>
+          <p:nvPr/>
+        </p:nvSpPr>
+        <p:spPr>
+          <a:xfrm>
+            <a:off x="6244709" y="999069"/>
+            <a:ext cx="7627382" cy="780311"/>
+          </a:xfrm>
+          <a:prstGeom prst="rect">
+            <a:avLst/>
+          </a:prstGeom>
+          <a:noFill/>
+          <a:ln/>
+        </p:spPr>
+        <p:txBody>
+          <a:bodyPr wrap="none" lIns="0" tIns="0" rIns="0" bIns="0" rtlCol="0" anchor="t"/>
+          <a:lstStyle/>
+          <a:p>
+            <a:pPr marL="0" indent="0" algn="l">
+              <a:lnSpc>
+                <a:spcPts val="2700"/>
+              </a:lnSpc>
+              <a:buNone/>
+            </a:pPr>
+            <a:r>
+              <a:rPr lang="ru-RU" sz="2400" dirty="0">
+                <a:solidFill>
+                  <a:srgbClr val="384653"/>
+                </a:solidFill>
+                <a:latin typeface="Montserrat" pitchFamily="34" charset="0"/>
+              </a:rPr>
+              <a:t>Для обеспечения безопасности использованы</a:t>
+            </a:r>
+          </a:p>
+          <a:p>
+            <a:pPr marL="0" indent="0" algn="l">
+              <a:lnSpc>
+                <a:spcPts val="2700"/>
+              </a:lnSpc>
+              <a:buNone/>
+            </a:pPr>
+            <a:r>
+              <a:rPr lang="ru-RU" sz="2400" dirty="0">
+                <a:solidFill>
+                  <a:srgbClr val="384653"/>
+                </a:solidFill>
+                <a:latin typeface="Montserrat" pitchFamily="34" charset="0"/>
+              </a:rPr>
+              <a:t>следующие технологии и решения:</a:t>
+            </a:r>
+            <a:endParaRPr lang="en-US" sz="2400" dirty="0"/>
+          </a:p>
+        </p:txBody>
+      </p:sp>
+      <p:sp>
+        <p:nvSpPr>
+          <p:cNvPr id="25" name="Shape 4">
+            <a:extLst>
+              <a:ext uri="{FF2B5EF4-FFF2-40B4-BE49-F238E27FC236}">
+                <a16:creationId xmlns:a16="http://schemas.microsoft.com/office/drawing/2014/main" id="{4FE242D6-BE31-450D-506B-0CCABA7091C2}"/>
+              </a:ext>
+            </a:extLst>
+          </p:cNvPr>
+          <p:cNvSpPr/>
+          <p:nvPr/>
+        </p:nvSpPr>
+        <p:spPr>
+          <a:xfrm>
+            <a:off x="6244709" y="3443790"/>
+            <a:ext cx="7627382" cy="1281232"/>
+          </a:xfrm>
+          <a:prstGeom prst="roundRect">
+            <a:avLst>
+              <a:gd name="adj" fmla="val 25366"/>
+            </a:avLst>
+          </a:prstGeom>
+          <a:solidFill>
+            <a:srgbClr val="D4E9F7"/>
+          </a:solidFill>
+          <a:ln w="7620">
+            <a:solidFill>
+              <a:srgbClr val="BACFDD"/>
+            </a:solidFill>
+            <a:prstDash val="solid"/>
+          </a:ln>
+        </p:spPr>
+        <p:txBody>
+          <a:bodyPr/>
+          <a:lstStyle/>
+          <a:p>
+            <a:endParaRPr lang="ru-RU" sz="2800"/>
+          </a:p>
+        </p:txBody>
+      </p:sp>
+      <p:sp>
+        <p:nvSpPr>
+          <p:cNvPr id="26" name="Text 5">
+            <a:extLst>
+              <a:ext uri="{FF2B5EF4-FFF2-40B4-BE49-F238E27FC236}">
+                <a16:creationId xmlns:a16="http://schemas.microsoft.com/office/drawing/2014/main" id="{163996D6-3553-9AAB-F7FE-2315C1E83861}"/>
+              </a:ext>
+            </a:extLst>
+          </p:cNvPr>
+          <p:cNvSpPr/>
+          <p:nvPr/>
+        </p:nvSpPr>
+        <p:spPr>
+          <a:xfrm>
+            <a:off x="6468904" y="3667985"/>
+            <a:ext cx="2850713" cy="356235"/>
+          </a:xfrm>
+          <a:prstGeom prst="rect">
+            <a:avLst/>
+          </a:prstGeom>
+          <a:noFill/>
+          <a:ln/>
+        </p:spPr>
+        <p:txBody>
+          <a:bodyPr wrap="none" lIns="0" tIns="0" rIns="0" bIns="0" rtlCol="0" anchor="t"/>
+          <a:lstStyle>
+            <a:defPPr>
+              <a:defRPr lang="ru-RU"/>
+            </a:defPPr>
+            <a:lvl1pPr marL="0" algn="l" defTabSz="914400" rtl="0" eaLnBrk="1" latinLnBrk="0" hangingPunct="1">
+              <a:defRPr sz="1800" kern="1200">
+                <a:solidFill>
+                  <a:schemeClr val="tx1"/>
+                </a:solidFill>
+                <a:latin typeface="+mn-lt"/>
+                <a:ea typeface="+mn-ea"/>
+                <a:cs typeface="+mn-cs"/>
+              </a:defRPr>
+            </a:lvl1pPr>
+            <a:lvl2pPr marL="457200" algn="l" defTabSz="914400" rtl="0" eaLnBrk="1" latinLnBrk="0" hangingPunct="1">
+              <a:defRPr sz="1800" kern="1200">
+                <a:solidFill>
+                  <a:schemeClr val="tx1"/>
+                </a:solidFill>
+                <a:latin typeface="+mn-lt"/>
+                <a:ea typeface="+mn-ea"/>
+                <a:cs typeface="+mn-cs"/>
+              </a:defRPr>
+            </a:lvl2pPr>
+            <a:lvl3pPr marL="914400" algn="l" defTabSz="914400" rtl="0" eaLnBrk="1" latinLnBrk="0" hangingPunct="1">
+              <a:defRPr sz="1800" kern="1200">
+                <a:solidFill>
+                  <a:schemeClr val="tx1"/>
+                </a:solidFill>
+                <a:latin typeface="+mn-lt"/>
+                <a:ea typeface="+mn-ea"/>
+                <a:cs typeface="+mn-cs"/>
+              </a:defRPr>
+            </a:lvl3pPr>
+            <a:lvl4pPr marL="1371600" algn="l" defTabSz="914400" rtl="0" eaLnBrk="1" latinLnBrk="0" hangingPunct="1">
+              <a:defRPr sz="1800" kern="1200">
+                <a:solidFill>
+                  <a:schemeClr val="tx1"/>
+                </a:solidFill>
+                <a:latin typeface="+mn-lt"/>
+                <a:ea typeface="+mn-ea"/>
+                <a:cs typeface="+mn-cs"/>
+              </a:defRPr>
+            </a:lvl4pPr>
+            <a:lvl5pPr marL="1828800" algn="l" defTabSz="914400" rtl="0" eaLnBrk="1" latinLnBrk="0" hangingPunct="1">
+              <a:defRPr sz="1800" kern="1200">
+                <a:solidFill>
+                  <a:schemeClr val="tx1"/>
+                </a:solidFill>
+                <a:latin typeface="+mn-lt"/>
+                <a:ea typeface="+mn-ea"/>
+                <a:cs typeface="+mn-cs"/>
+              </a:defRPr>
+            </a:lvl5pPr>
+            <a:lvl6pPr marL="2286000" algn="l" defTabSz="914400" rtl="0" eaLnBrk="1" latinLnBrk="0" hangingPunct="1">
+              <a:defRPr sz="1800" kern="1200">
+                <a:solidFill>
+                  <a:schemeClr val="tx1"/>
+                </a:solidFill>
+                <a:latin typeface="+mn-lt"/>
+                <a:ea typeface="+mn-ea"/>
+                <a:cs typeface="+mn-cs"/>
+              </a:defRPr>
+            </a:lvl6pPr>
+            <a:lvl7pPr marL="2743200" algn="l" defTabSz="914400" rtl="0" eaLnBrk="1" latinLnBrk="0" hangingPunct="1">
+              <a:defRPr sz="1800" kern="1200">
+                <a:solidFill>
+                  <a:schemeClr val="tx1"/>
+                </a:solidFill>
+                <a:latin typeface="+mn-lt"/>
+                <a:ea typeface="+mn-ea"/>
+                <a:cs typeface="+mn-cs"/>
+              </a:defRPr>
+            </a:lvl7pPr>
+            <a:lvl8pPr marL="3200400" algn="l" defTabSz="914400" rtl="0" eaLnBrk="1" latinLnBrk="0" hangingPunct="1">
+              <a:defRPr sz="1800" kern="1200">
+                <a:solidFill>
+                  <a:schemeClr val="tx1"/>
+                </a:solidFill>
+                <a:latin typeface="+mn-lt"/>
+                <a:ea typeface="+mn-ea"/>
+                <a:cs typeface="+mn-cs"/>
+              </a:defRPr>
+            </a:lvl8pPr>
+            <a:lvl9pPr marL="3657600" algn="l" defTabSz="914400" rtl="0" eaLnBrk="1" latinLnBrk="0" hangingPunct="1">
+              <a:defRPr sz="1800" kern="1200">
+                <a:solidFill>
+                  <a:schemeClr val="tx1"/>
+                </a:solidFill>
+                <a:latin typeface="+mn-lt"/>
+                <a:ea typeface="+mn-ea"/>
+                <a:cs typeface="+mn-cs"/>
+              </a:defRPr>
+            </a:lvl9pPr>
+          </a:lstStyle>
+          <a:p>
+            <a:pPr marL="0" indent="0" algn="l">
+              <a:lnSpc>
+                <a:spcPts val="2800"/>
+              </a:lnSpc>
+              <a:buNone/>
+            </a:pPr>
+            <a:r>
+              <a:rPr lang="en-US" sz="3200" b="1" dirty="0">
+                <a:solidFill>
+                  <a:srgbClr val="384653"/>
+                </a:solidFill>
+                <a:latin typeface="Barlow Bold" pitchFamily="34" charset="0"/>
+                <a:ea typeface="Barlow Bold" pitchFamily="34" charset="-122"/>
+                <a:cs typeface="Barlow Bold" pitchFamily="34" charset="-120"/>
+              </a:rPr>
+              <a:t>Refresh-токены</a:t>
+            </a:r>
+            <a:endParaRPr lang="en-US" sz="3200" dirty="0"/>
+          </a:p>
+        </p:txBody>
+      </p:sp>
+      <p:sp>
+        <p:nvSpPr>
+          <p:cNvPr id="27" name="Text 6">
+            <a:extLst>
+              <a:ext uri="{FF2B5EF4-FFF2-40B4-BE49-F238E27FC236}">
+                <a16:creationId xmlns:a16="http://schemas.microsoft.com/office/drawing/2014/main" id="{2B3BBA62-1E44-864E-5383-6CFDDB5F64B0}"/>
+              </a:ext>
+            </a:extLst>
+          </p:cNvPr>
+          <p:cNvSpPr/>
+          <p:nvPr/>
+        </p:nvSpPr>
+        <p:spPr>
+          <a:xfrm>
+            <a:off x="6468904" y="4154117"/>
+            <a:ext cx="7178993" cy="346710"/>
+          </a:xfrm>
+          <a:prstGeom prst="rect">
+            <a:avLst/>
+          </a:prstGeom>
+          <a:noFill/>
+          <a:ln/>
+        </p:spPr>
+        <p:txBody>
+          <a:bodyPr wrap="none" lIns="0" tIns="0" rIns="0" bIns="0" rtlCol="0" anchor="t"/>
+          <a:lstStyle>
+            <a:defPPr>
+              <a:defRPr lang="ru-RU"/>
+            </a:defPPr>
+            <a:lvl1pPr marL="0" algn="l" defTabSz="914400" rtl="0" eaLnBrk="1" latinLnBrk="0" hangingPunct="1">
+              <a:defRPr sz="1800" kern="1200">
+                <a:solidFill>
+                  <a:schemeClr val="tx1"/>
+                </a:solidFill>
+                <a:latin typeface="+mn-lt"/>
+                <a:ea typeface="+mn-ea"/>
+                <a:cs typeface="+mn-cs"/>
+              </a:defRPr>
+            </a:lvl1pPr>
+            <a:lvl2pPr marL="457200" algn="l" defTabSz="914400" rtl="0" eaLnBrk="1" latinLnBrk="0" hangingPunct="1">
+              <a:defRPr sz="1800" kern="1200">
+                <a:solidFill>
+                  <a:schemeClr val="tx1"/>
+                </a:solidFill>
+                <a:latin typeface="+mn-lt"/>
+                <a:ea typeface="+mn-ea"/>
+                <a:cs typeface="+mn-cs"/>
+              </a:defRPr>
+            </a:lvl2pPr>
+            <a:lvl3pPr marL="914400" algn="l" defTabSz="914400" rtl="0" eaLnBrk="1" latinLnBrk="0" hangingPunct="1">
+              <a:defRPr sz="1800" kern="1200">
+                <a:solidFill>
+                  <a:schemeClr val="tx1"/>
+                </a:solidFill>
+                <a:latin typeface="+mn-lt"/>
+                <a:ea typeface="+mn-ea"/>
+                <a:cs typeface="+mn-cs"/>
+              </a:defRPr>
+            </a:lvl3pPr>
+            <a:lvl4pPr marL="1371600" algn="l" defTabSz="914400" rtl="0" eaLnBrk="1" latinLnBrk="0" hangingPunct="1">
+              <a:defRPr sz="1800" kern="1200">
+                <a:solidFill>
+                  <a:schemeClr val="tx1"/>
+                </a:solidFill>
+                <a:latin typeface="+mn-lt"/>
+                <a:ea typeface="+mn-ea"/>
+                <a:cs typeface="+mn-cs"/>
+              </a:defRPr>
+            </a:lvl4pPr>
+            <a:lvl5pPr marL="1828800" algn="l" defTabSz="914400" rtl="0" eaLnBrk="1" latinLnBrk="0" hangingPunct="1">
+              <a:defRPr sz="1800" kern="1200">
+                <a:solidFill>
+                  <a:schemeClr val="tx1"/>
+                </a:solidFill>
+                <a:latin typeface="+mn-lt"/>
+                <a:ea typeface="+mn-ea"/>
+                <a:cs typeface="+mn-cs"/>
+              </a:defRPr>
+            </a:lvl5pPr>
+            <a:lvl6pPr marL="2286000" algn="l" defTabSz="914400" rtl="0" eaLnBrk="1" latinLnBrk="0" hangingPunct="1">
+              <a:defRPr sz="1800" kern="1200">
+                <a:solidFill>
+                  <a:schemeClr val="tx1"/>
+                </a:solidFill>
+                <a:latin typeface="+mn-lt"/>
+                <a:ea typeface="+mn-ea"/>
+                <a:cs typeface="+mn-cs"/>
+              </a:defRPr>
+            </a:lvl6pPr>
+            <a:lvl7pPr marL="2743200" algn="l" defTabSz="914400" rtl="0" eaLnBrk="1" latinLnBrk="0" hangingPunct="1">
+              <a:defRPr sz="1800" kern="1200">
+                <a:solidFill>
+                  <a:schemeClr val="tx1"/>
+                </a:solidFill>
+                <a:latin typeface="+mn-lt"/>
+                <a:ea typeface="+mn-ea"/>
+                <a:cs typeface="+mn-cs"/>
+              </a:defRPr>
+            </a:lvl7pPr>
+            <a:lvl8pPr marL="3200400" algn="l" defTabSz="914400" rtl="0" eaLnBrk="1" latinLnBrk="0" hangingPunct="1">
+              <a:defRPr sz="1800" kern="1200">
+                <a:solidFill>
+                  <a:schemeClr val="tx1"/>
+                </a:solidFill>
+                <a:latin typeface="+mn-lt"/>
+                <a:ea typeface="+mn-ea"/>
+                <a:cs typeface="+mn-cs"/>
+              </a:defRPr>
+            </a:lvl8pPr>
+            <a:lvl9pPr marL="3657600" algn="l" defTabSz="914400" rtl="0" eaLnBrk="1" latinLnBrk="0" hangingPunct="1">
+              <a:defRPr sz="1800" kern="1200">
+                <a:solidFill>
+                  <a:schemeClr val="tx1"/>
+                </a:solidFill>
+                <a:latin typeface="+mn-lt"/>
+                <a:ea typeface="+mn-ea"/>
+                <a:cs typeface="+mn-cs"/>
+              </a:defRPr>
+            </a:lvl9pPr>
+          </a:lstStyle>
+          <a:p>
+            <a:pPr marL="0" indent="0" algn="l">
+              <a:lnSpc>
+                <a:spcPts val="2700"/>
+              </a:lnSpc>
+              <a:buNone/>
+            </a:pPr>
+            <a:r>
+              <a:rPr lang="en-US" sz="2400" dirty="0">
+                <a:solidFill>
+                  <a:srgbClr val="384653"/>
+                </a:solidFill>
+                <a:latin typeface="Montserrat" pitchFamily="34" charset="0"/>
+                <a:ea typeface="Montserrat" pitchFamily="34" charset="-122"/>
+                <a:cs typeface="Montserrat" pitchFamily="34" charset="-120"/>
+              </a:rPr>
+              <a:t>Обеспечение непрерывности сессии</a:t>
+            </a:r>
+            <a:endParaRPr lang="en-US" sz="2400" dirty="0"/>
+          </a:p>
+        </p:txBody>
+      </p:sp>
+      <p:sp>
+        <p:nvSpPr>
+          <p:cNvPr id="8" name="Овал 7">
+            <a:extLst>
+              <a:ext uri="{FF2B5EF4-FFF2-40B4-BE49-F238E27FC236}">
+                <a16:creationId xmlns:a16="http://schemas.microsoft.com/office/drawing/2014/main" id="{A7DE2DF5-4327-DEF8-FC35-62917A2759D9}"/>
+              </a:ext>
+            </a:extLst>
+          </p:cNvPr>
+          <p:cNvSpPr/>
+          <p:nvPr/>
+        </p:nvSpPr>
+        <p:spPr>
+          <a:xfrm>
+            <a:off x="13821273" y="7454726"/>
+            <a:ext cx="557917" cy="483472"/>
+          </a:xfrm>
+          <a:prstGeom prst="ellipse">
+            <a:avLst/>
+          </a:prstGeom>
+          <a:solidFill>
+            <a:srgbClr val="D4E9F7"/>
+          </a:solidFill>
+          <a:ln>
+            <a:noFill/>
+          </a:ln>
+        </p:spPr>
+        <p:style>
+          <a:lnRef idx="1">
+            <a:schemeClr val="accent5"/>
+          </a:lnRef>
+          <a:fillRef idx="2">
+            <a:schemeClr val="accent5"/>
+          </a:fillRef>
+          <a:effectRef idx="1">
+            <a:schemeClr val="accent5"/>
+          </a:effectRef>
+          <a:fontRef idx="minor">
+            <a:schemeClr val="dk1"/>
+          </a:fontRef>
+        </p:style>
+        <p:txBody>
+          <a:bodyPr rtlCol="0" anchor="ctr"/>
+          <a:lstStyle/>
+          <a:p>
+            <a:pPr algn="ctr"/>
+            <a:r>
+              <a:rPr lang="en-US" sz="1600" dirty="0"/>
+              <a:t>6</a:t>
+            </a:r>
+            <a:endParaRPr lang="ru-RU" dirty="0"/>
           </a:p>
         </p:txBody>
       </p:sp>
@@ -5727,7 +7667,7 @@
         </p:nvSpPr>
         <p:spPr>
           <a:xfrm>
-            <a:off x="758309" y="3586401"/>
+            <a:off x="758309" y="3153191"/>
             <a:ext cx="6746558" cy="712708"/>
           </a:xfrm>
           <a:prstGeom prst="rect">
@@ -5769,7 +7709,7 @@
         </p:nvSpPr>
         <p:spPr>
           <a:xfrm>
-            <a:off x="758309" y="5598914"/>
+            <a:off x="785575" y="4840783"/>
             <a:ext cx="3034665" cy="216575"/>
           </a:xfrm>
           <a:prstGeom prst="roundRect">
@@ -5796,8 +7736,8 @@
         </p:nvSpPr>
         <p:spPr>
           <a:xfrm>
-            <a:off x="758309" y="6140410"/>
-            <a:ext cx="3027759" cy="356235"/>
+            <a:off x="785575" y="5382279"/>
+            <a:ext cx="3027759" cy="693420"/>
           </a:xfrm>
           <a:prstGeom prst="rect">
             <a:avLst/>
@@ -5816,7 +7756,7 @@
               <a:buNone/>
             </a:pPr>
             <a:r>
-              <a:rPr lang="en-US" sz="2200" b="1" dirty="0">
+              <a:rPr lang="en-US" sz="3200" b="1" dirty="0" err="1">
                 <a:solidFill>
                   <a:srgbClr val="384653"/>
                 </a:solidFill>
@@ -5824,9 +7764,47 @@
                 <a:ea typeface="Barlow Bold" pitchFamily="34" charset="-122"/>
                 <a:cs typeface="Barlow Bold" pitchFamily="34" charset="-120"/>
               </a:rPr>
-              <a:t>Создание шаблонов</a:t>
-            </a:r>
-            <a:endParaRPr lang="en-US" sz="2200" dirty="0"/>
+              <a:t>Создание</a:t>
+            </a:r>
+            <a:r>
+              <a:rPr lang="en-US" sz="3200" b="1" dirty="0">
+                <a:solidFill>
+                  <a:srgbClr val="384653"/>
+                </a:solidFill>
+                <a:latin typeface="Barlow Bold" pitchFamily="34" charset="0"/>
+                <a:ea typeface="Barlow Bold" pitchFamily="34" charset="-122"/>
+                <a:cs typeface="Barlow Bold" pitchFamily="34" charset="-120"/>
+              </a:rPr>
+              <a:t> </a:t>
+            </a:r>
+            <a:endParaRPr lang="ru-RU" sz="3200" b="1" dirty="0">
+              <a:solidFill>
+                <a:srgbClr val="384653"/>
+              </a:solidFill>
+              <a:latin typeface="Barlow Bold" pitchFamily="34" charset="0"/>
+              <a:ea typeface="Barlow Bold" pitchFamily="34" charset="-122"/>
+              <a:cs typeface="Barlow Bold" pitchFamily="34" charset="-120"/>
+            </a:endParaRPr>
+          </a:p>
+          <a:p>
+            <a:pPr marL="0" indent="0" algn="l">
+              <a:lnSpc>
+                <a:spcPts val="2800"/>
+              </a:lnSpc>
+              <a:buNone/>
+            </a:pPr>
+            <a:r>
+              <a:rPr lang="en-US" sz="3200" b="1" dirty="0" err="1">
+                <a:solidFill>
+                  <a:srgbClr val="384653"/>
+                </a:solidFill>
+                <a:latin typeface="Barlow Bold" pitchFamily="34" charset="0"/>
+                <a:ea typeface="Barlow Bold" pitchFamily="34" charset="-122"/>
+                <a:cs typeface="Barlow Bold" pitchFamily="34" charset="-120"/>
+              </a:rPr>
+              <a:t>шаблонов</a:t>
+            </a:r>
+            <a:endParaRPr lang="en-US" sz="3200" dirty="0"/>
           </a:p>
         </p:txBody>
       </p:sp>
@@ -5838,8 +7816,8 @@
         </p:nvSpPr>
         <p:spPr>
           <a:xfrm>
-            <a:off x="758309" y="6626543"/>
-            <a:ext cx="3034665" cy="693420"/>
+            <a:off x="778669" y="6134504"/>
+            <a:ext cx="3034665" cy="1015417"/>
           </a:xfrm>
           <a:prstGeom prst="rect">
             <a:avLst/>
@@ -5858,7 +7836,7 @@
               <a:buNone/>
             </a:pPr>
             <a:r>
-              <a:rPr lang="en-US" sz="1700" dirty="0">
+              <a:rPr lang="en-US" sz="2400" dirty="0">
                 <a:solidFill>
                   <a:srgbClr val="384653"/>
                 </a:solidFill>
@@ -5866,9 +7844,20 @@
                 <a:ea typeface="Montserrat" pitchFamily="34" charset="-122"/>
                 <a:cs typeface="Montserrat" pitchFamily="34" charset="-120"/>
               </a:rPr>
-              <a:t>Подготовка DOCX-шаблонов с полями</a:t>
-            </a:r>
-            <a:endParaRPr lang="en-US" sz="1700" dirty="0"/>
+              <a:t>Подготовка DOCX-шаблонов с </a:t>
+            </a:r>
+            <a:r>
+              <a:rPr lang="en-US" sz="2400" dirty="0" err="1">
+                <a:solidFill>
+                  <a:srgbClr val="384653"/>
+                </a:solidFill>
+                <a:latin typeface="Montserrat" pitchFamily="34" charset="0"/>
+                <a:ea typeface="Montserrat" pitchFamily="34" charset="-122"/>
+                <a:cs typeface="Montserrat" pitchFamily="34" charset="-120"/>
+              </a:rPr>
+              <a:t>полями</a:t>
+            </a:r>
+            <a:endParaRPr lang="en-US" sz="2400" dirty="0"/>
           </a:p>
         </p:txBody>
       </p:sp>
@@ -5880,7 +7869,7 @@
         </p:nvSpPr>
         <p:spPr>
           <a:xfrm>
-            <a:off x="4117896" y="5273993"/>
+            <a:off x="4145162" y="4515862"/>
             <a:ext cx="3034784" cy="216575"/>
           </a:xfrm>
           <a:prstGeom prst="roundRect">
@@ -5907,8 +7896,8 @@
         </p:nvSpPr>
         <p:spPr>
           <a:xfrm>
-            <a:off x="4117896" y="5815489"/>
-            <a:ext cx="3034784" cy="356235"/>
+            <a:off x="4145162" y="5057358"/>
+            <a:ext cx="3034784" cy="730967"/>
           </a:xfrm>
           <a:prstGeom prst="rect">
             <a:avLst/>
@@ -5927,7 +7916,7 @@
               <a:buNone/>
             </a:pPr>
             <a:r>
-              <a:rPr lang="en-US" sz="2200" b="1" dirty="0">
+              <a:rPr lang="en-US" sz="3200" b="1" dirty="0">
                 <a:solidFill>
                   <a:srgbClr val="384653"/>
                 </a:solidFill>
@@ -5937,7 +7926,7 @@
               </a:rPr>
               <a:t>Заполнение данными</a:t>
             </a:r>
-            <a:endParaRPr lang="en-US" sz="2200" dirty="0"/>
+            <a:endParaRPr lang="en-US" sz="3200" dirty="0"/>
           </a:p>
         </p:txBody>
       </p:sp>
@@ -5949,8 +7938,8 @@
         </p:nvSpPr>
         <p:spPr>
           <a:xfrm>
-            <a:off x="4131588" y="6274464"/>
-            <a:ext cx="3034784" cy="693420"/>
+            <a:off x="4158854" y="5863042"/>
+            <a:ext cx="3034784" cy="1015417"/>
           </a:xfrm>
           <a:prstGeom prst="rect">
             <a:avLst/>
@@ -5969,7 +7958,7 @@
               <a:buNone/>
             </a:pPr>
             <a:r>
-              <a:rPr lang="en-US" sz="1700" dirty="0">
+              <a:rPr lang="en-US" sz="2400" dirty="0">
                 <a:solidFill>
                   <a:srgbClr val="384653"/>
                 </a:solidFill>
@@ -5979,7 +7968,7 @@
               </a:rPr>
               <a:t>Docxtemplater + PizZip для вставки данных</a:t>
             </a:r>
-            <a:endParaRPr lang="en-US" sz="1700" dirty="0"/>
+            <a:endParaRPr lang="en-US" sz="2400" dirty="0"/>
           </a:p>
         </p:txBody>
       </p:sp>
@@ -5991,7 +7980,7 @@
         </p:nvSpPr>
         <p:spPr>
           <a:xfrm>
-            <a:off x="7477601" y="4948952"/>
+            <a:off x="7504867" y="4190821"/>
             <a:ext cx="3034784" cy="216575"/>
           </a:xfrm>
           <a:prstGeom prst="roundRect">
@@ -6018,8 +8007,8 @@
         </p:nvSpPr>
         <p:spPr>
           <a:xfrm>
-            <a:off x="7477601" y="5490448"/>
-            <a:ext cx="2850713" cy="356235"/>
+            <a:off x="7504867" y="4732317"/>
+            <a:ext cx="2850713" cy="730967"/>
           </a:xfrm>
           <a:prstGeom prst="rect">
             <a:avLst/>
@@ -6038,7 +8027,7 @@
               <a:buNone/>
             </a:pPr>
             <a:r>
-              <a:rPr lang="en-US" sz="2200" b="1" dirty="0">
+              <a:rPr lang="en-US" sz="3200" b="1" dirty="0" err="1">
                 <a:solidFill>
                   <a:srgbClr val="384653"/>
                 </a:solidFill>
@@ -6046,9 +8035,47 @@
                 <a:ea typeface="Barlow Bold" pitchFamily="34" charset="-122"/>
                 <a:cs typeface="Barlow Bold" pitchFamily="34" charset="-120"/>
               </a:rPr>
-              <a:t>Конвертация в PDF</a:t>
-            </a:r>
-            <a:endParaRPr lang="en-US" sz="2200" dirty="0"/>
+              <a:t>Конвертация</a:t>
+            </a:r>
+            <a:r>
+              <a:rPr lang="en-US" sz="3200" b="1" dirty="0">
+                <a:solidFill>
+                  <a:srgbClr val="384653"/>
+                </a:solidFill>
+                <a:latin typeface="Barlow Bold" pitchFamily="34" charset="0"/>
+                <a:ea typeface="Barlow Bold" pitchFamily="34" charset="-122"/>
+                <a:cs typeface="Barlow Bold" pitchFamily="34" charset="-120"/>
+              </a:rPr>
+              <a:t> </a:t>
+            </a:r>
+            <a:endParaRPr lang="ru-RU" sz="3200" b="1" dirty="0">
+              <a:solidFill>
+                <a:srgbClr val="384653"/>
+              </a:solidFill>
+              <a:latin typeface="Barlow Bold" pitchFamily="34" charset="0"/>
+              <a:ea typeface="Barlow Bold" pitchFamily="34" charset="-122"/>
+              <a:cs typeface="Barlow Bold" pitchFamily="34" charset="-120"/>
+            </a:endParaRPr>
+          </a:p>
+          <a:p>
+            <a:pPr marL="0" indent="0" algn="l">
+              <a:lnSpc>
+                <a:spcPts val="2800"/>
+              </a:lnSpc>
+              <a:buNone/>
+            </a:pPr>
+            <a:r>
+              <a:rPr lang="en-US" sz="3200" b="1" dirty="0">
+                <a:solidFill>
+                  <a:srgbClr val="384653"/>
+                </a:solidFill>
+                <a:latin typeface="Barlow Bold" pitchFamily="34" charset="0"/>
+                <a:ea typeface="Barlow Bold" pitchFamily="34" charset="-122"/>
+                <a:cs typeface="Barlow Bold" pitchFamily="34" charset="-120"/>
+              </a:rPr>
+              <a:t>в PDF</a:t>
+            </a:r>
+            <a:endParaRPr lang="en-US" sz="3200" dirty="0"/>
           </a:p>
         </p:txBody>
       </p:sp>
@@ -6060,8 +8087,8 @@
         </p:nvSpPr>
         <p:spPr>
           <a:xfrm>
-            <a:off x="7477601" y="5976580"/>
-            <a:ext cx="3034784" cy="693420"/>
+            <a:off x="7532133" y="5463284"/>
+            <a:ext cx="3034784" cy="1049493"/>
           </a:xfrm>
           <a:prstGeom prst="rect">
             <a:avLst/>
@@ -6080,7 +8107,7 @@
               <a:buNone/>
             </a:pPr>
             <a:r>
-              <a:rPr lang="en-US" sz="1700" dirty="0">
+              <a:rPr lang="en-US" sz="2400" dirty="0">
                 <a:solidFill>
                   <a:srgbClr val="384653"/>
                 </a:solidFill>
@@ -6090,7 +8117,7 @@
               </a:rPr>
               <a:t>COM-интерфейс Microsoft Word через PowerShell</a:t>
             </a:r>
-            <a:endParaRPr lang="en-US" sz="1700" dirty="0"/>
+            <a:endParaRPr lang="en-US" sz="2400" dirty="0"/>
           </a:p>
         </p:txBody>
       </p:sp>
@@ -6102,7 +8129,7 @@
         </p:nvSpPr>
         <p:spPr>
           <a:xfrm>
-            <a:off x="10837307" y="4624030"/>
+            <a:off x="10864573" y="3865899"/>
             <a:ext cx="3034784" cy="216575"/>
           </a:xfrm>
           <a:prstGeom prst="roundRect">
@@ -6129,7 +8156,7 @@
         </p:nvSpPr>
         <p:spPr>
           <a:xfrm>
-            <a:off x="10837307" y="5165527"/>
+            <a:off x="10864573" y="4407396"/>
             <a:ext cx="3034784" cy="356235"/>
           </a:xfrm>
           <a:prstGeom prst="rect">
@@ -6149,7 +8176,7 @@
               <a:buNone/>
             </a:pPr>
             <a:r>
-              <a:rPr lang="en-US" sz="2200" b="1" dirty="0">
+              <a:rPr lang="en-US" sz="3200" b="1" dirty="0">
                 <a:solidFill>
                   <a:srgbClr val="384653"/>
                 </a:solidFill>
@@ -6159,7 +8186,7 @@
               </a:rPr>
               <a:t>Отправка документов</a:t>
             </a:r>
-            <a:endParaRPr lang="en-US" sz="2200" dirty="0"/>
+            <a:endParaRPr lang="en-US" sz="3200" dirty="0"/>
           </a:p>
         </p:txBody>
       </p:sp>
@@ -6171,8 +8198,8 @@
         </p:nvSpPr>
         <p:spPr>
           <a:xfrm>
-            <a:off x="10857905" y="5629870"/>
-            <a:ext cx="3034784" cy="693420"/>
+            <a:off x="10864573" y="5235474"/>
+            <a:ext cx="3034784" cy="1120627"/>
           </a:xfrm>
           <a:prstGeom prst="rect">
             <a:avLst/>
@@ -6191,7 +8218,7 @@
               <a:buNone/>
             </a:pPr>
             <a:r>
-              <a:rPr lang="en-US" sz="1700" dirty="0">
+              <a:rPr lang="en-US" sz="2400" dirty="0">
                 <a:solidFill>
                   <a:srgbClr val="384653"/>
                 </a:solidFill>
@@ -6201,7 +8228,7 @@
               </a:rPr>
               <a:t>Рассылка через Nodemailer по SMTP</a:t>
             </a:r>
-            <a:endParaRPr lang="en-US" sz="1700" dirty="0"/>
+            <a:endParaRPr lang="en-US" sz="2400" dirty="0"/>
           </a:p>
         </p:txBody>
       </p:sp>
@@ -6254,6 +8281,60 @@
           <a:p>
             <a:pPr algn="ctr"/>
             <a:endParaRPr lang="ru-RU"/>
+          </a:p>
+        </p:txBody>
+      </p:sp>
+      <p:sp>
+        <p:nvSpPr>
+          <p:cNvPr id="18" name="Овал 17">
+            <a:extLst>
+              <a:ext uri="{FF2B5EF4-FFF2-40B4-BE49-F238E27FC236}">
+                <a16:creationId xmlns:a16="http://schemas.microsoft.com/office/drawing/2014/main" id="{C23FCB62-35F1-A807-7B53-6EA346ADBF79}"/>
+              </a:ext>
+            </a:extLst>
+          </p:cNvPr>
+          <p:cNvSpPr/>
+          <p:nvPr/>
+        </p:nvSpPr>
+        <p:spPr>
+          <a:xfrm>
+            <a:off x="13821273" y="7454726"/>
+            <a:ext cx="557917" cy="483472"/>
+          </a:xfrm>
+          <a:prstGeom prst="ellipse">
+            <a:avLst/>
+          </a:prstGeom>
+          <a:solidFill>
+            <a:srgbClr val="D4E9F7"/>
+          </a:solidFill>
+          <a:ln>
+            <a:noFill/>
+          </a:ln>
+        </p:spPr>
+        <p:style>
+          <a:lnRef idx="1">
+            <a:schemeClr val="accent5"/>
+          </a:lnRef>
+          <a:fillRef idx="2">
+            <a:schemeClr val="accent5"/>
+          </a:fillRef>
+          <a:effectRef idx="1">
+            <a:schemeClr val="accent5"/>
+          </a:effectRef>
+          <a:fontRef idx="minor">
+            <a:schemeClr val="dk1"/>
+          </a:fontRef>
+        </p:style>
+        <p:txBody>
+          <a:bodyPr rtlCol="0" anchor="ctr"/>
+          <a:lstStyle/>
+          <a:p>
+            <a:pPr algn="ctr"/>
+            <a:r>
+              <a:rPr lang="en-US" sz="1600" dirty="0"/>
+              <a:t>7</a:t>
+            </a:r>
+            <a:endParaRPr lang="ru-RU" dirty="0"/>
           </a:p>
         </p:txBody>
       </p:sp>
@@ -6284,14 +8365,124 @@
       </p:grpSpPr>
       <p:sp>
         <p:nvSpPr>
+          <p:cNvPr id="12" name="Прямоугольник 11">
+            <a:extLst>
+              <a:ext uri="{FF2B5EF4-FFF2-40B4-BE49-F238E27FC236}">
+                <a16:creationId xmlns:a16="http://schemas.microsoft.com/office/drawing/2014/main" id="{B99AB82B-1CB4-A303-7448-1D6B7E93EB76}"/>
+              </a:ext>
+            </a:extLst>
+          </p:cNvPr>
+          <p:cNvSpPr/>
+          <p:nvPr/>
+        </p:nvSpPr>
+        <p:spPr>
+          <a:xfrm>
+            <a:off x="12601575" y="7591425"/>
+            <a:ext cx="1933575" cy="531495"/>
+          </a:xfrm>
+          <a:prstGeom prst="rect">
+            <a:avLst/>
+          </a:prstGeom>
+          <a:solidFill>
+            <a:schemeClr val="bg1"/>
+          </a:solidFill>
+          <a:ln>
+            <a:solidFill>
+              <a:schemeClr val="bg1"/>
+            </a:solidFill>
+          </a:ln>
+        </p:spPr>
+        <p:style>
+          <a:lnRef idx="2">
+            <a:schemeClr val="dk1"/>
+          </a:lnRef>
+          <a:fillRef idx="1">
+            <a:schemeClr val="lt1"/>
+          </a:fillRef>
+          <a:effectRef idx="0">
+            <a:schemeClr val="dk1"/>
+          </a:effectRef>
+          <a:fontRef idx="minor">
+            <a:schemeClr val="dk1"/>
+          </a:fontRef>
+        </p:style>
+        <p:txBody>
+          <a:bodyPr rtlCol="0" anchor="ctr"/>
+          <a:lstStyle/>
+          <a:p>
+            <a:pPr algn="ctr"/>
+            <a:endParaRPr lang="ru-RU"/>
+          </a:p>
+        </p:txBody>
+      </p:sp>
+      <p:sp>
+        <p:nvSpPr>
+          <p:cNvPr id="7" name="Прямоугольник 6">
+            <a:extLst>
+              <a:ext uri="{FF2B5EF4-FFF2-40B4-BE49-F238E27FC236}">
+                <a16:creationId xmlns:a16="http://schemas.microsoft.com/office/drawing/2014/main" id="{4CDAD1EE-FB24-32CA-6CFF-0BDA283D4B0B}"/>
+              </a:ext>
+            </a:extLst>
+          </p:cNvPr>
+          <p:cNvSpPr/>
+          <p:nvPr/>
+        </p:nvSpPr>
+        <p:spPr>
+          <a:xfrm>
+            <a:off x="671332" y="2141315"/>
+            <a:ext cx="13299311" cy="4977115"/>
+          </a:xfrm>
+          <a:prstGeom prst="rect">
+            <a:avLst/>
+          </a:prstGeom>
+          <a:solidFill>
+            <a:srgbClr val="D4E9F7"/>
+          </a:solidFill>
+          <a:ln>
+            <a:noFill/>
+          </a:ln>
+          <a:scene3d>
+            <a:camera prst="orthographicFront"/>
+            <a:lightRig rig="threePt" dir="t">
+              <a:rot lat="0" lon="0" rev="0"/>
+            </a:lightRig>
+          </a:scene3d>
+        </p:spPr>
+        <p:style>
+          <a:lnRef idx="2">
+            <a:schemeClr val="accent5">
+              <a:shade val="15000"/>
+            </a:schemeClr>
+          </a:lnRef>
+          <a:fillRef idx="1">
+            <a:schemeClr val="accent5"/>
+          </a:fillRef>
+          <a:effectRef idx="0">
+            <a:schemeClr val="accent5"/>
+          </a:effectRef>
+          <a:fontRef idx="minor">
+            <a:schemeClr val="lt1"/>
+          </a:fontRef>
+        </p:style>
+        <p:txBody>
+          <a:bodyPr rtlCol="0" anchor="ctr"/>
+          <a:lstStyle/>
+          <a:p>
+            <a:pPr algn="ctr"/>
+            <a:endParaRPr lang="ru-RU"/>
+          </a:p>
+        </p:txBody>
+      </p:sp>
+      <p:sp>
+        <p:nvSpPr>
           <p:cNvPr id="2" name="Text 0"/>
           <p:cNvSpPr/>
           <p:nvPr/>
         </p:nvSpPr>
         <p:spPr>
           <a:xfrm>
-            <a:off x="758309" y="624602"/>
-            <a:ext cx="6156365" cy="712708"/>
+            <a:off x="671332" y="758441"/>
+            <a:ext cx="9288516" cy="712708"/>
           </a:xfrm>
           <a:prstGeom prst="rect">
             <a:avLst/>
@@ -6310,7 +8501,7 @@
               <a:buNone/>
             </a:pPr>
             <a:r>
-              <a:rPr lang="en-US" sz="4450" b="1" dirty="0">
+              <a:rPr lang="ru-RU" sz="4450" b="1" dirty="0">
                 <a:solidFill>
                   <a:srgbClr val="2E3C4E"/>
                 </a:solidFill>
@@ -6318,44 +8509,33 @@
                 <a:ea typeface="Barlow Bold" pitchFamily="34" charset="-122"/>
                 <a:cs typeface="Barlow Bold" pitchFamily="34" charset="-120"/>
               </a:rPr>
-              <a:t>Удобный интерфейс</a:t>
+              <a:t>И</a:t>
+            </a:r>
+            <a:r>
+              <a:rPr lang="en-US" sz="4450" b="1" dirty="0" err="1">
+                <a:solidFill>
+                  <a:srgbClr val="2E3C4E"/>
+                </a:solidFill>
+                <a:latin typeface="Barlow Bold" pitchFamily="34" charset="0"/>
+                <a:ea typeface="Barlow Bold" pitchFamily="34" charset="-122"/>
+                <a:cs typeface="Barlow Bold" pitchFamily="34" charset="-120"/>
+              </a:rPr>
+              <a:t>нтерфейс</a:t>
+            </a:r>
+            <a:r>
+              <a:rPr lang="ru-RU" sz="4450" b="1" dirty="0">
+                <a:solidFill>
+                  <a:srgbClr val="2E3C4E"/>
+                </a:solidFill>
+                <a:latin typeface="Barlow Bold" pitchFamily="34" charset="0"/>
+                <a:ea typeface="Barlow Bold" pitchFamily="34" charset="-122"/>
+                <a:cs typeface="Barlow Bold" pitchFamily="34" charset="-120"/>
+              </a:rPr>
+              <a:t> учета успеваемости и посещаемости</a:t>
             </a:r>
             <a:endParaRPr lang="en-US" sz="4450" dirty="0"/>
           </a:p>
         </p:txBody>
-      </p:sp>
-      <p:sp>
-        <p:nvSpPr>
-          <p:cNvPr id="11" name="Shape 1">
-            <a:extLst>
-              <a:ext uri="{FF2B5EF4-FFF2-40B4-BE49-F238E27FC236}">
-                <a16:creationId xmlns:a16="http://schemas.microsoft.com/office/drawing/2014/main" id="{EDAC81B3-BA62-AF77-1566-72026BA9D4FB}"/>
-              </a:ext>
-            </a:extLst>
-          </p:cNvPr>
-          <p:cNvSpPr/>
-          <p:nvPr/>
-        </p:nvSpPr>
-        <p:spPr>
-          <a:xfrm>
-            <a:off x="758309" y="1498640"/>
-            <a:ext cx="7604641" cy="6106358"/>
-          </a:xfrm>
-          <a:prstGeom prst="roundRect">
-            <a:avLst>
-              <a:gd name="adj" fmla="val 25366"/>
-            </a:avLst>
-          </a:prstGeom>
-          <a:solidFill>
-            <a:srgbClr val="D4E9F7"/>
-          </a:solidFill>
-          <a:ln w="7620">
-            <a:solidFill>
-              <a:srgbClr val="BACFDD"/>
-            </a:solidFill>
-            <a:prstDash val="solid"/>
-          </a:ln>
-        </p:spPr>
       </p:sp>
       <p:pic>
         <p:nvPicPr>
@@ -6437,20 +8617,255 @@
         </p:blipFill>
         <p:spPr>
           <a:xfrm>
-            <a:off x="1150329" y="2046951"/>
-            <a:ext cx="6820599" cy="5004556"/>
+            <a:off x="793700" y="2226398"/>
+            <a:ext cx="6504038" cy="4772281"/>
           </a:xfrm>
           <a:prstGeom prst="rect">
             <a:avLst/>
           </a:prstGeom>
         </p:spPr>
       </p:pic>
+      <p:pic>
+        <p:nvPicPr>
+          <p:cNvPr id="6" name="Рисунок 5">
+            <a:extLst>
+              <a:ext uri="{FF2B5EF4-FFF2-40B4-BE49-F238E27FC236}">
+                <a16:creationId xmlns:a16="http://schemas.microsoft.com/office/drawing/2014/main" id="{6F2B7F0C-1A2E-81B9-EB39-DFE02FB6389B}"/>
+              </a:ext>
+            </a:extLst>
+          </p:cNvPr>
+          <p:cNvPicPr>
+            <a:picLocks noChangeAspect="1"/>
+          </p:cNvPicPr>
+          <p:nvPr/>
+        </p:nvPicPr>
+        <p:blipFill>
+          <a:blip r:embed="rId5">
+            <a:extLst>
+              <a:ext uri="{BEBA8EAE-BF5A-486C-A8C5-ECC9F3942E4B}">
+                <a14:imgProps xmlns:a14="http://schemas.microsoft.com/office/drawing/2010/main">
+                  <a14:imgLayer r:embed="rId6">
+                    <a14:imgEffect>
+                      <a14:backgroundRemoval t="5335" b="94247" l="3588" r="97863">
+                        <a14:foregroundMark x1="2595" y1="2929" x2="10229" y2="9310"/>
+                        <a14:foregroundMark x1="10229" y1="9310" x2="42443" y2="14017"/>
+                        <a14:foregroundMark x1="42443" y1="14017" x2="67023" y2="27406"/>
+                        <a14:foregroundMark x1="67023" y1="27406" x2="57710" y2="55230"/>
+                        <a14:foregroundMark x1="57710" y1="55230" x2="34046" y2="37343"/>
+                        <a14:foregroundMark x1="34046" y1="37343" x2="44885" y2="15063"/>
+                        <a14:foregroundMark x1="44885" y1="15063" x2="65420" y2="18410"/>
+                        <a14:foregroundMark x1="65420" y1="18410" x2="67023" y2="19874"/>
+                        <a14:foregroundMark x1="55344" y1="15795" x2="39008" y2="14854"/>
+                        <a14:foregroundMark x1="39008" y1="14854" x2="15115" y2="50209"/>
+                        <a14:foregroundMark x1="15115" y1="50209" x2="41985" y2="79498"/>
+                        <a14:foregroundMark x1="41985" y1="79498" x2="76107" y2="52824"/>
+                        <a14:foregroundMark x1="76107" y1="52824" x2="49160" y2="16841"/>
+                        <a14:foregroundMark x1="49160" y1="16841" x2="35038" y2="14226"/>
+                        <a14:foregroundMark x1="74122" y1="30858" x2="57023" y2="45502"/>
+                        <a14:foregroundMark x1="57023" y1="45502" x2="49084" y2="90063"/>
+                        <a14:foregroundMark x1="49084" y1="90063" x2="78473" y2="91109"/>
+                        <a14:foregroundMark x1="78473" y1="91109" x2="87023" y2="73326"/>
+                        <a14:foregroundMark x1="87023" y1="73326" x2="75191" y2="55021"/>
+                        <a14:foregroundMark x1="75191" y1="55021" x2="73817" y2="54289"/>
+                        <a14:foregroundMark x1="88015" y1="49477" x2="84656" y2="60042"/>
+                        <a14:foregroundMark x1="84656" y1="60042" x2="90229" y2="79289"/>
+                        <a14:foregroundMark x1="90229" y1="79289" x2="95115" y2="59833"/>
+                        <a14:foregroundMark x1="95115" y1="59833" x2="89389" y2="15900"/>
+                        <a14:foregroundMark x1="89389" y1="15900" x2="83969" y2="33682"/>
+                        <a14:foregroundMark x1="83969" y1="33682" x2="84122" y2="51569"/>
+                        <a14:foregroundMark x1="84122" y1="51569" x2="83893" y2="51987"/>
+                        <a14:foregroundMark x1="85802" y1="14331" x2="76412" y2="16527"/>
+                        <a14:foregroundMark x1="76412" y1="16527" x2="74427" y2="40167"/>
+                        <a14:foregroundMark x1="74427" y1="40167" x2="81527" y2="14435"/>
+                        <a14:foregroundMark x1="81527" y1="14435" x2="70992" y2="14017"/>
+                        <a14:foregroundMark x1="52977" y1="5439" x2="60611" y2="10146"/>
+                        <a14:foregroundMark x1="60611" y1="10146" x2="49084" y2="5439"/>
+                        <a14:foregroundMark x1="49084" y1="5439" x2="52748" y2="9833"/>
+                        <a14:foregroundMark x1="17481" y1="60774" x2="14275" y2="70607"/>
+                        <a14:foregroundMark x1="14275" y1="70607" x2="25954" y2="80230"/>
+                        <a14:foregroundMark x1="25954" y1="80230" x2="16031" y2="63598"/>
+                        <a14:foregroundMark x1="16031" y1="63598" x2="11450" y2="66004"/>
+                        <a14:foregroundMark x1="11450" y1="66004" x2="11603" y2="66004"/>
+                        <a14:foregroundMark x1="11603" y1="76464" x2="8473" y2="84414"/>
+                        <a14:foregroundMark x1="8473" y1="84414" x2="15038" y2="87552"/>
+                        <a14:foregroundMark x1="15038" y1="87552" x2="7786" y2="78243"/>
+                        <a14:foregroundMark x1="7786" y1="78243" x2="7252" y2="78661"/>
+                        <a14:foregroundMark x1="4504" y1="63703" x2="2595" y2="79707"/>
+                        <a14:foregroundMark x1="2595" y1="79707" x2="6031" y2="73013"/>
+                        <a14:foregroundMark x1="6031" y1="73013" x2="5573" y2="63494"/>
+                        <a14:foregroundMark x1="5573" y1="63494" x2="4656" y2="63180"/>
+                        <a14:foregroundMark x1="5191" y1="86402" x2="5420" y2="92469"/>
+                        <a14:foregroundMark x1="5420" y1="92469" x2="10763" y2="91004"/>
+                        <a14:foregroundMark x1="10763" y1="91004" x2="6107" y2="89958"/>
+                        <a14:foregroundMark x1="6107" y1="89958" x2="5725" y2="91423"/>
+                        <a14:foregroundMark x1="3664" y1="92364" x2="4351" y2="94247"/>
+                        <a14:foregroundMark x1="90687" y1="88389" x2="91298" y2="90272"/>
+                        <a14:foregroundMark x1="93359" y1="87343" x2="92214" y2="87029"/>
+                        <a14:foregroundMark x1="97863" y1="93410" x2="92901" y2="86297"/>
+                        <a14:foregroundMark x1="92901" y1="86297" x2="83282" y2="88075"/>
+                        <a14:foregroundMark x1="83282" y1="88075" x2="92290" y2="89331"/>
+                        <a14:foregroundMark x1="92290" y1="89331" x2="94275" y2="92469"/>
+                        <a14:foregroundMark x1="93893" y1="7950" x2="88092" y2="9519"/>
+                        <a14:foregroundMark x1="7481" y1="8891" x2="13511" y2="8054"/>
+                        <a14:foregroundMark x1="13511" y1="8054" x2="9389" y2="7950"/>
+                      </a14:backgroundRemoval>
+                    </a14:imgEffect>
+                  </a14:imgLayer>
+                </a14:imgProps>
+              </a:ext>
+            </a:extLst>
+          </a:blip>
+          <a:stretch>
+            <a:fillRect/>
+          </a:stretch>
+        </p:blipFill>
+        <p:spPr>
+          <a:xfrm>
+            <a:off x="7332667" y="2226398"/>
+            <a:ext cx="6539424" cy="4772281"/>
+          </a:xfrm>
+          <a:prstGeom prst="rect">
+            <a:avLst/>
+          </a:prstGeom>
+        </p:spPr>
+      </p:pic>
+      <p:sp>
+        <p:nvSpPr>
+          <p:cNvPr id="9" name="Text 2">
+            <a:extLst>
+              <a:ext uri="{FF2B5EF4-FFF2-40B4-BE49-F238E27FC236}">
+                <a16:creationId xmlns:a16="http://schemas.microsoft.com/office/drawing/2014/main" id="{EFBD6B3A-3742-0301-82D5-700258739A7A}"/>
+              </a:ext>
+            </a:extLst>
+          </p:cNvPr>
+          <p:cNvSpPr/>
+          <p:nvPr/>
+        </p:nvSpPr>
+        <p:spPr>
+          <a:xfrm>
+            <a:off x="791051" y="1471149"/>
+            <a:ext cx="11608615" cy="457059"/>
+          </a:xfrm>
+          <a:prstGeom prst="rect">
+            <a:avLst/>
+          </a:prstGeom>
+          <a:noFill/>
+          <a:ln/>
+        </p:spPr>
+        <p:txBody>
+          <a:bodyPr wrap="none" lIns="0" tIns="0" rIns="0" bIns="0" rtlCol="0" anchor="t"/>
+          <a:lstStyle/>
+          <a:p>
+            <a:pPr marL="0" indent="0" algn="l">
+              <a:lnSpc>
+                <a:spcPts val="2700"/>
+              </a:lnSpc>
+              <a:buNone/>
+            </a:pPr>
+            <a:r>
+              <a:rPr lang="ru-RU" sz="2400" dirty="0">
+                <a:solidFill>
+                  <a:srgbClr val="384653"/>
+                </a:solidFill>
+                <a:latin typeface="Montserrat" pitchFamily="34" charset="0"/>
+              </a:rPr>
+              <a:t>Формы выставления текущих и аттестационных оценок</a:t>
+            </a:r>
+            <a:endParaRPr lang="en-US" sz="2400" dirty="0"/>
+          </a:p>
+        </p:txBody>
+      </p:sp>
+      <p:sp>
+        <p:nvSpPr>
+          <p:cNvPr id="4" name="Овал 3">
+            <a:extLst>
+              <a:ext uri="{FF2B5EF4-FFF2-40B4-BE49-F238E27FC236}">
+                <a16:creationId xmlns:a16="http://schemas.microsoft.com/office/drawing/2014/main" id="{C8FDC251-FF17-3133-38A5-EDD373AD58AC}"/>
+              </a:ext>
+            </a:extLst>
+          </p:cNvPr>
+          <p:cNvSpPr/>
+          <p:nvPr/>
+        </p:nvSpPr>
+        <p:spPr>
+          <a:xfrm>
+            <a:off x="13821273" y="7454726"/>
+            <a:ext cx="557917" cy="483472"/>
+          </a:xfrm>
+          <a:prstGeom prst="ellipse">
+            <a:avLst/>
+          </a:prstGeom>
+          <a:solidFill>
+            <a:srgbClr val="D4E9F7"/>
+          </a:solidFill>
+          <a:ln>
+            <a:noFill/>
+          </a:ln>
+        </p:spPr>
+        <p:style>
+          <a:lnRef idx="1">
+            <a:schemeClr val="accent5"/>
+          </a:lnRef>
+          <a:fillRef idx="2">
+            <a:schemeClr val="accent5"/>
+          </a:fillRef>
+          <a:effectRef idx="1">
+            <a:schemeClr val="accent5"/>
+          </a:effectRef>
+          <a:fontRef idx="minor">
+            <a:schemeClr val="dk1"/>
+          </a:fontRef>
+        </p:style>
+        <p:txBody>
+          <a:bodyPr rtlCol="0" anchor="ctr"/>
+          <a:lstStyle/>
+          <a:p>
+            <a:pPr algn="ctr"/>
+            <a:r>
+              <a:rPr lang="en-US" sz="1600" dirty="0"/>
+              <a:t>8</a:t>
+            </a:r>
+            <a:endParaRPr lang="ru-RU" dirty="0"/>
+          </a:p>
+        </p:txBody>
+      </p:sp>
+    </p:spTree>
+  </p:cSld>
+  <p:clrMapOvr>
+    <a:masterClrMapping/>
+  </p:clrMapOvr>
+</p:sld>
+</file>
+
+<file path=ppt/slides/slide9.xml><?xml version="1.0" encoding="utf-8"?>
+<p:sld xmlns:a="http://schemas.openxmlformats.org/drawingml/2006/main" xmlns:r="http://schemas.openxmlformats.org/officeDocument/2006/relationships" xmlns:p="http://schemas.openxmlformats.org/presentationml/2006/main">
+  <p:cSld>
+    <p:spTree>
+      <p:nvGrpSpPr>
+        <p:cNvPr id="1" name="">
+          <a:extLst>
+            <a:ext uri="{FF2B5EF4-FFF2-40B4-BE49-F238E27FC236}">
+              <a16:creationId xmlns:a16="http://schemas.microsoft.com/office/drawing/2014/main" id="{FF6B6AC4-C82F-FF9E-5A62-E26866120144}"/>
+            </a:ext>
+          </a:extLst>
+        </p:cNvPr>
+        <p:cNvGrpSpPr/>
+        <p:nvPr/>
+      </p:nvGrpSpPr>
+      <p:grpSpPr>
+        <a:xfrm>
+          <a:off x="0" y="0"/>
+          <a:ext cx="0" cy="0"/>
+          <a:chOff x="0" y="0"/>
+          <a:chExt cx="0" cy="0"/>
+        </a:xfrm>
+      </p:grpSpPr>
       <p:sp>
         <p:nvSpPr>
           <p:cNvPr id="12" name="Прямоугольник 11">
             <a:extLst>
               <a:ext uri="{FF2B5EF4-FFF2-40B4-BE49-F238E27FC236}">
-                <a16:creationId xmlns:a16="http://schemas.microsoft.com/office/drawing/2014/main" id="{B99AB82B-1CB4-A303-7448-1D6B7E93EB76}"/>
+                <a16:creationId xmlns:a16="http://schemas.microsoft.com/office/drawing/2014/main" id="{9E5B1472-3370-13A5-21AE-0D33BECB8B30}"/>
               </a:ext>
             </a:extLst>
           </p:cNvPr>
@@ -6499,10 +8914,10 @@
       </p:sp>
       <p:sp>
         <p:nvSpPr>
-          <p:cNvPr id="13" name="Shape 1">
+          <p:cNvPr id="20" name="Прямоугольник 19">
             <a:extLst>
               <a:ext uri="{FF2B5EF4-FFF2-40B4-BE49-F238E27FC236}">
-                <a16:creationId xmlns:a16="http://schemas.microsoft.com/office/drawing/2014/main" id="{05AA4F5E-BDB2-CA3E-5790-AF791E72F763}"/>
+                <a16:creationId xmlns:a16="http://schemas.microsoft.com/office/drawing/2014/main" id="{55A4D1CB-BD1B-4DFD-0F4D-D5A0A4715F06}"/>
               </a:ext>
             </a:extLst>
           </p:cNvPr>
@@ -6511,31 +8926,50 @@
         </p:nvSpPr>
         <p:spPr>
           <a:xfrm>
-            <a:off x="8754970" y="1498640"/>
-            <a:ext cx="4725101" cy="6106358"/>
-          </a:xfrm>
-          <a:prstGeom prst="roundRect">
-            <a:avLst>
-              <a:gd name="adj" fmla="val 25366"/>
-            </a:avLst>
+            <a:off x="1061294" y="1382114"/>
+            <a:ext cx="12423212" cy="6600572"/>
+          </a:xfrm>
+          <a:prstGeom prst="rect">
+            <a:avLst/>
           </a:prstGeom>
           <a:solidFill>
             <a:srgbClr val="D4E9F7"/>
           </a:solidFill>
-          <a:ln w="7620">
-            <a:solidFill>
-              <a:srgbClr val="BACFDD"/>
-            </a:solidFill>
-            <a:prstDash val="solid"/>
+          <a:ln>
+            <a:noFill/>
           </a:ln>
         </p:spPr>
+        <p:style>
+          <a:lnRef idx="2">
+            <a:schemeClr val="accent5">
+              <a:shade val="15000"/>
+            </a:schemeClr>
+          </a:lnRef>
+          <a:fillRef idx="1">
+            <a:schemeClr val="accent5"/>
+          </a:fillRef>
+          <a:effectRef idx="0">
+            <a:schemeClr val="accent5"/>
+          </a:effectRef>
+          <a:fontRef idx="minor">
+            <a:schemeClr val="lt1"/>
+          </a:fontRef>
+        </p:style>
+        <p:txBody>
+          <a:bodyPr rtlCol="0" anchor="ctr"/>
+          <a:lstStyle/>
+          <a:p>
+            <a:pPr algn="ctr"/>
+            <a:endParaRPr lang="ru-RU"/>
+          </a:p>
+        </p:txBody>
       </p:sp>
       <p:pic>
         <p:nvPicPr>
           <p:cNvPr id="10" name="Рисунок 9">
             <a:extLst>
               <a:ext uri="{FF2B5EF4-FFF2-40B4-BE49-F238E27FC236}">
-                <a16:creationId xmlns:a16="http://schemas.microsoft.com/office/drawing/2014/main" id="{A9B64B3E-B27F-62D3-8A7F-AC19DBBA308F}"/>
+                <a16:creationId xmlns:a16="http://schemas.microsoft.com/office/drawing/2014/main" id="{A4B4EEA5-6FA5-112E-5A69-9AD403570B1B}"/>
               </a:ext>
             </a:extLst>
           </p:cNvPr>
@@ -6545,11 +8979,11 @@
           <p:nvPr/>
         </p:nvPicPr>
         <p:blipFill>
-          <a:blip r:embed="rId5">
+          <a:blip r:embed="rId3">
             <a:extLst>
               <a:ext uri="{BEBA8EAE-BF5A-486C-A8C5-ECC9F3942E4B}">
                 <a14:imgProps xmlns:a14="http://schemas.microsoft.com/office/drawing/2010/main">
-                  <a14:imgLayer r:embed="rId6">
+                  <a14:imgLayer r:embed="rId4">
                     <a14:imgEffect>
                       <a14:backgroundRemoval t="3794" b="96813" l="3232" r="95437">
                         <a14:foregroundMark x1="8365" y1="4856" x2="64259" y2="14112"/>
@@ -6588,49 +9022,323 @@
         </p:blipFill>
         <p:spPr>
           <a:xfrm>
-            <a:off x="9120254" y="2042755"/>
-            <a:ext cx="3994531" cy="5004556"/>
+            <a:off x="9991687" y="3670624"/>
+            <a:ext cx="3334543" cy="4177689"/>
           </a:xfrm>
           <a:prstGeom prst="rect">
             <a:avLst/>
           </a:prstGeom>
         </p:spPr>
       </p:pic>
-    </p:spTree>
-  </p:cSld>
-  <p:clrMapOvr>
-    <a:masterClrMapping/>
-  </p:clrMapOvr>
-</p:sld>
-</file>
-
-<file path=ppt/slides/slide9.xml><?xml version="1.0" encoding="utf-8"?>
-<p:sld xmlns:a="http://schemas.openxmlformats.org/drawingml/2006/main" xmlns:r="http://schemas.openxmlformats.org/officeDocument/2006/relationships" xmlns:p="http://schemas.openxmlformats.org/presentationml/2006/main">
-  <p:cSld name="Slide 9">
-    <p:spTree>
-      <p:nvGrpSpPr>
-        <p:cNvPr id="1" name=""/>
-        <p:cNvGrpSpPr/>
-        <p:nvPr/>
-      </p:nvGrpSpPr>
-      <p:grpSpPr>
-        <a:xfrm>
-          <a:off x="0" y="0"/>
-          <a:ext cx="0" cy="0"/>
-          <a:chOff x="0" y="0"/>
-          <a:chExt cx="0" cy="0"/>
-        </a:xfrm>
-      </p:grpSpPr>
-      <p:sp>
-        <p:nvSpPr>
-          <p:cNvPr id="2" name="Text 0"/>
-          <p:cNvSpPr/>
-          <p:nvPr/>
-        </p:nvSpPr>
-        <p:spPr>
-          <a:xfrm>
-            <a:off x="758309" y="1516856"/>
-            <a:ext cx="7374969" cy="712708"/>
+      <p:pic>
+        <p:nvPicPr>
+          <p:cNvPr id="6" name="Рисунок 5">
+            <a:extLst>
+              <a:ext uri="{FF2B5EF4-FFF2-40B4-BE49-F238E27FC236}">
+                <a16:creationId xmlns:a16="http://schemas.microsoft.com/office/drawing/2014/main" id="{984C71A0-019A-B778-8952-2874EE05F6A3}"/>
+              </a:ext>
+            </a:extLst>
+          </p:cNvPr>
+          <p:cNvPicPr>
+            <a:picLocks noChangeAspect="1"/>
+          </p:cNvPicPr>
+          <p:nvPr/>
+        </p:nvPicPr>
+        <p:blipFill>
+          <a:blip r:embed="rId5">
+            <a:extLst>
+              <a:ext uri="{BEBA8EAE-BF5A-486C-A8C5-ECC9F3942E4B}">
+                <a14:imgProps xmlns:a14="http://schemas.microsoft.com/office/drawing/2010/main">
+                  <a14:imgLayer r:embed="rId6">
+                    <a14:imgEffect>
+                      <a14:backgroundRemoval t="10000" b="90000" l="8257" r="92890">
+                        <a14:foregroundMark x1="8486" y1="10667" x2="21560" y2="19333"/>
+                        <a14:foregroundMark x1="21560" y1="19333" x2="68349" y2="25333"/>
+                        <a14:foregroundMark x1="68349" y1="25333" x2="64450" y2="42667"/>
+                        <a14:foregroundMark x1="64450" y1="42667" x2="49541" y2="54333"/>
+                        <a14:foregroundMark x1="49541" y1="54333" x2="40596" y2="70667"/>
+                        <a14:foregroundMark x1="40596" y1="70667" x2="25688" y2="78667"/>
+                        <a14:foregroundMark x1="25688" y1="78667" x2="13991" y2="71333"/>
+                        <a14:foregroundMark x1="13991" y1="71333" x2="11697" y2="34333"/>
+                        <a14:foregroundMark x1="11697" y1="34333" x2="53211" y2="22000"/>
+                        <a14:foregroundMark x1="53211" y1="22000" x2="54358" y2="63333"/>
+                        <a14:foregroundMark x1="54358" y1="63333" x2="75459" y2="53333"/>
+                        <a14:foregroundMark x1="75459" y1="53333" x2="83716" y2="76333"/>
+                        <a14:foregroundMark x1="83716" y1="76333" x2="88303" y2="21667"/>
+                        <a14:foregroundMark x1="88303" y1="21667" x2="92890" y2="40667"/>
+                        <a14:foregroundMark x1="92890" y1="40667" x2="89908" y2="50333"/>
+                        <a14:foregroundMark x1="85321" y1="82000" x2="87156" y2="58333"/>
+                        <a14:foregroundMark x1="90596" y1="67000" x2="71330" y2="83667"/>
+                        <a14:foregroundMark x1="71330" y1="83667" x2="14908" y2="88667"/>
+                        <a14:foregroundMark x1="14908" y1="88667" x2="8716" y2="64333"/>
+                        <a14:foregroundMark x1="8716" y1="64333" x2="11927" y2="43667"/>
+                        <a14:foregroundMark x1="86239" y1="77667" x2="91284" y2="60000"/>
+                        <a14:foregroundMark x1="91284" y1="60000" x2="91284" y2="56333"/>
+                        <a14:foregroundMark x1="87615" y1="81000" x2="78899" y2="87667"/>
+                        <a14:foregroundMark x1="90826" y1="77000" x2="88761" y2="85000"/>
+                        <a14:foregroundMark x1="52294" y1="67000" x2="37385" y2="50333"/>
+                        <a14:foregroundMark x1="37385" y1="50333" x2="54128" y2="56333"/>
+                        <a14:foregroundMark x1="54128" y1="56333" x2="72936" y2="39333"/>
+                        <a14:foregroundMark x1="72936" y1="39333" x2="72706" y2="22000"/>
+                        <a14:foregroundMark x1="72706" y1="22000" x2="38991" y2="20667"/>
+                        <a14:foregroundMark x1="64908" y1="23667" x2="79587" y2="25333"/>
+                        <a14:foregroundMark x1="79587" y1="25333" x2="71101" y2="50667"/>
+                        <a14:foregroundMark x1="71101" y1="50667" x2="70872" y2="55667"/>
+                        <a14:foregroundMark x1="82110" y1="28667" x2="77982" y2="59667"/>
+                        <a14:foregroundMark x1="57569" y1="68333" x2="78670" y2="61000"/>
+                        <a14:foregroundMark x1="33257" y1="52000" x2="22248" y2="61000"/>
+                        <a14:foregroundMark x1="22248" y1="61000" x2="38073" y2="51333"/>
+                        <a14:foregroundMark x1="38073" y1="51333" x2="25229" y2="38000"/>
+                        <a14:foregroundMark x1="25229" y1="38000" x2="17202" y2="46667"/>
+                        <a14:foregroundMark x1="10550" y1="20667" x2="13073" y2="67333"/>
+                        <a14:foregroundMark x1="13073" y1="67333" x2="32110" y2="48333"/>
+                        <a14:foregroundMark x1="32110" y1="48333" x2="23624" y2="19000"/>
+                        <a14:foregroundMark x1="23624" y1="19000" x2="10780" y2="21333"/>
+                        <a14:foregroundMark x1="29817" y1="37333" x2="20413" y2="49000"/>
+                        <a14:foregroundMark x1="20413" y1="49000" x2="40826" y2="70333"/>
+                        <a14:foregroundMark x1="40826" y1="70333" x2="35092" y2="37667"/>
+                        <a14:foregroundMark x1="35092" y1="37667" x2="18578" y2="51000"/>
+                        <a14:foregroundMark x1="59174" y1="40000" x2="40826" y2="52667"/>
+                        <a14:foregroundMark x1="40826" y1="52667" x2="32569" y2="42000"/>
+                        <a14:foregroundMark x1="25688" y1="16333" x2="87844" y2="15000"/>
+                        <a14:foregroundMark x1="27982" y1="59333" x2="25917" y2="65667"/>
+                        <a14:foregroundMark x1="29587" y1="66333" x2="31881" y2="59667"/>
+                        <a14:foregroundMark x1="18578" y1="67333" x2="17431" y2="69000"/>
+                        <a14:foregroundMark x1="24771" y1="66000" x2="25459" y2="66667"/>
+                        <a14:foregroundMark x1="9174" y1="82333" x2="8257" y2="83333"/>
+                        <a14:foregroundMark x1="8716" y1="79333" x2="8716" y2="77000"/>
+                      </a14:backgroundRemoval>
+                    </a14:imgEffect>
+                  </a14:imgLayer>
+                </a14:imgProps>
+              </a:ext>
+            </a:extLst>
+          </a:blip>
+          <a:stretch>
+            <a:fillRect/>
+          </a:stretch>
+        </p:blipFill>
+        <p:spPr>
+          <a:xfrm>
+            <a:off x="9798327" y="1286663"/>
+            <a:ext cx="3686179" cy="2536361"/>
+          </a:xfrm>
+          <a:prstGeom prst="rect">
+            <a:avLst/>
+          </a:prstGeom>
+        </p:spPr>
+      </p:pic>
+      <p:pic>
+        <p:nvPicPr>
+          <p:cNvPr id="17" name="Рисунок 16">
+            <a:extLst>
+              <a:ext uri="{FF2B5EF4-FFF2-40B4-BE49-F238E27FC236}">
+                <a16:creationId xmlns:a16="http://schemas.microsoft.com/office/drawing/2014/main" id="{CD06FB39-6FCF-BE3E-D308-A4F1B9A7FA39}"/>
+              </a:ext>
+            </a:extLst>
+          </p:cNvPr>
+          <p:cNvPicPr>
+            <a:picLocks noChangeAspect="1"/>
+          </p:cNvPicPr>
+          <p:nvPr/>
+        </p:nvPicPr>
+        <p:blipFill>
+          <a:blip r:embed="rId7">
+            <a:extLst>
+              <a:ext uri="{BEBA8EAE-BF5A-486C-A8C5-ECC9F3942E4B}">
+                <a14:imgProps xmlns:a14="http://schemas.microsoft.com/office/drawing/2010/main">
+                  <a14:imgLayer r:embed="rId8">
+                    <a14:imgEffect>
+                      <a14:backgroundRemoval t="5428" b="93737" l="4917" r="96899">
+                        <a14:foregroundMark x1="3026" y1="3445" x2="10893" y2="7516"/>
+                        <a14:foregroundMark x1="10893" y1="7516" x2="4690" y2="27766"/>
+                        <a14:foregroundMark x1="4690" y1="27766" x2="8548" y2="31837"/>
+                        <a14:foregroundMark x1="8548" y1="31837" x2="6354" y2="41023"/>
+                        <a14:foregroundMark x1="6354" y1="41023" x2="9228" y2="50731"/>
+                        <a14:foregroundMark x1="9228" y1="50731" x2="24130" y2="52505"/>
+                        <a14:foregroundMark x1="24130" y1="52505" x2="64675" y2="81002"/>
+                        <a14:foregroundMark x1="64675" y1="81002" x2="66793" y2="59499"/>
+                        <a14:foregroundMark x1="66793" y1="59499" x2="57262" y2="71190"/>
+                        <a14:foregroundMark x1="57262" y1="71190" x2="70877" y2="85595"/>
+                        <a14:foregroundMark x1="70877" y1="85595" x2="92511" y2="91441"/>
+                        <a14:foregroundMark x1="92511" y1="91441" x2="95764" y2="95511"/>
+                        <a14:foregroundMark x1="95764" y1="95511" x2="97731" y2="81420"/>
+                        <a14:foregroundMark x1="97731" y1="81420" x2="94554" y2="3132"/>
+                        <a14:foregroundMark x1="94554" y1="3132" x2="40998" y2="7933"/>
+                        <a14:foregroundMark x1="40998" y1="7933" x2="14750" y2="3967"/>
+                        <a14:foregroundMark x1="14750" y1="3967" x2="7867" y2="5115"/>
+                        <a14:foregroundMark x1="7867" y1="5115" x2="7413" y2="83299"/>
+                        <a14:foregroundMark x1="7413" y1="83299" x2="2345" y2="95303"/>
+                        <a14:foregroundMark x1="2345" y1="95303" x2="3707" y2="28184"/>
+                        <a14:foregroundMark x1="3707" y1="28184" x2="15507" y2="17015"/>
+                        <a14:foregroundMark x1="15507" y1="17015" x2="22088" y2="27453"/>
+                        <a14:foregroundMark x1="22088" y1="27453" x2="45461" y2="38622"/>
+                        <a14:foregroundMark x1="45461" y1="38622" x2="42436" y2="23695"/>
+                        <a14:foregroundMark x1="42436" y1="23695" x2="50378" y2="13048"/>
+                        <a14:foregroundMark x1="50378" y1="13048" x2="46899" y2="33820"/>
+                        <a14:foregroundMark x1="46899" y1="33820" x2="49697" y2="71190"/>
+                        <a14:foregroundMark x1="49697" y1="71190" x2="54312" y2="80793"/>
+                        <a14:foregroundMark x1="54312" y1="80793" x2="25416" y2="87370"/>
+                        <a14:foregroundMark x1="25416" y1="87370" x2="18003" y2="93841"/>
+                        <a14:foregroundMark x1="18003" y1="93841" x2="11800" y2="96242"/>
+                        <a14:foregroundMark x1="11800" y1="96242" x2="18079" y2="96660"/>
+                        <a14:foregroundMark x1="18079" y1="96660" x2="36687" y2="93633"/>
+                        <a14:foregroundMark x1="36687" y1="93633" x2="44402" y2="93737"/>
+                        <a14:foregroundMark x1="81089" y1="52505" x2="62784" y2="54593"/>
+                        <a14:foregroundMark x1="62784" y1="54593" x2="48109" y2="46138"/>
+                        <a14:foregroundMark x1="48109" y1="46138" x2="68457" y2="25678"/>
+                        <a14:foregroundMark x1="68457" y1="25678" x2="73449" y2="24322"/>
+                        <a14:foregroundMark x1="73828" y1="61378" x2="80106" y2="55115"/>
+                        <a14:foregroundMark x1="80106" y1="55115" x2="84569" y2="28079"/>
+                        <a14:foregroundMark x1="84569" y1="28079" x2="81770" y2="18580"/>
+                        <a14:foregroundMark x1="92587" y1="40292" x2="92965" y2="52923"/>
+                        <a14:foregroundMark x1="92965" y1="52923" x2="76929" y2="76096"/>
+                        <a14:foregroundMark x1="76929" y1="76096" x2="62330" y2="42380"/>
+                        <a14:foregroundMark x1="62330" y1="42380" x2="83207" y2="28914"/>
+                        <a14:foregroundMark x1="83207" y1="28914" x2="84342" y2="67641"/>
+                        <a14:foregroundMark x1="38351" y1="31628" x2="28215" y2="24739"/>
+                        <a14:foregroundMark x1="28215" y1="24739" x2="11044" y2="48225"/>
+                        <a14:foregroundMark x1="11044" y1="48225" x2="38654" y2="70146"/>
+                        <a14:foregroundMark x1="38654" y1="70146" x2="55673" y2="50418"/>
+                        <a14:foregroundMark x1="55673" y1="50418" x2="55219" y2="45094"/>
+                        <a14:foregroundMark x1="35250" y1="39562" x2="20651" y2="52714"/>
+                        <a14:foregroundMark x1="20651" y1="52714" x2="33207" y2="80376"/>
+                        <a14:foregroundMark x1="33207" y1="80376" x2="39486" y2="42902"/>
+                        <a14:foregroundMark x1="39486" y1="42902" x2="8245" y2="59812"/>
+                        <a14:foregroundMark x1="8245" y1="59812" x2="9834" y2="68789"/>
+                        <a14:foregroundMark x1="30560" y1="54071" x2="18381" y2="65031"/>
+                        <a14:foregroundMark x1="18381" y1="65031" x2="26248" y2="86430"/>
+                        <a14:foregroundMark x1="26248" y1="86430" x2="15734" y2="62109"/>
+                        <a14:foregroundMark x1="15734" y1="62109" x2="5068" y2="81420"/>
+                        <a14:foregroundMark x1="5068" y1="81420" x2="7640" y2="83612"/>
+                        <a14:foregroundMark x1="8775" y1="8768" x2="63389" y2="4071"/>
+                        <a14:foregroundMark x1="63389" y1="4071" x2="84796" y2="5532"/>
+                        <a14:foregroundMark x1="84796" y1="5532" x2="85023" y2="5637"/>
+                        <a14:foregroundMark x1="85779" y1="11795" x2="18457" y2="14405"/>
+                        <a14:foregroundMark x1="18457" y1="14405" x2="79123" y2="10647"/>
+                        <a14:foregroundMark x1="79123" y1="10647" x2="75038" y2="11587"/>
+                        <a14:foregroundMark x1="95537" y1="5846" x2="96899" y2="46347"/>
+                        <a14:foregroundMark x1="93646" y1="75052" x2="92057" y2="17537"/>
+                        <a14:foregroundMark x1="85779" y1="78706" x2="84115" y2="86117"/>
+                        <a14:foregroundMark x1="84115" y1="86117" x2="86157" y2="73382"/>
+                        <a14:foregroundMark x1="86157" y1="73382" x2="74433" y2="75783"/>
+                        <a14:foregroundMark x1="74433" y1="75783" x2="62935" y2="90084"/>
+                        <a14:foregroundMark x1="62935" y1="90084" x2="34947" y2="88309"/>
+                        <a14:foregroundMark x1="34947" y1="88309" x2="34796" y2="87474"/>
+                        <a14:foregroundMark x1="12405" y1="31837" x2="20802" y2="33299"/>
+                        <a14:foregroundMark x1="20802" y1="33299" x2="54539" y2="30063"/>
+                        <a14:foregroundMark x1="54539" y1="30063" x2="47428" y2="32881"/>
+                        <a14:foregroundMark x1="65582" y1="21503" x2="47352" y2="26200"/>
+                        <a14:foregroundMark x1="47352" y1="26200" x2="57564" y2="29436"/>
+                        <a14:foregroundMark x1="57564" y1="29436" x2="60363" y2="17745"/>
+                        <a14:foregroundMark x1="60363" y1="17745" x2="35325" y2="19729"/>
+                        <a14:foregroundMark x1="13011" y1="23904" x2="17322" y2="22025"/>
+                        <a14:foregroundMark x1="17322" y1="22025" x2="12405" y2="24948"/>
+                        <a14:backgroundMark x1="1135" y1="6472" x2="1059" y2="939"/>
+                        <a14:backgroundMark x1="908" y1="9395" x2="378" y2="36013"/>
+                      </a14:backgroundRemoval>
+                    </a14:imgEffect>
+                  </a14:imgLayer>
+                </a14:imgProps>
+              </a:ext>
+            </a:extLst>
+          </a:blip>
+          <a:stretch>
+            <a:fillRect/>
+          </a:stretch>
+        </p:blipFill>
+        <p:spPr>
+          <a:xfrm>
+            <a:off x="1061294" y="1426897"/>
+            <a:ext cx="8923088" cy="6466202"/>
+          </a:xfrm>
+          <a:prstGeom prst="rect">
+            <a:avLst/>
+          </a:prstGeom>
+        </p:spPr>
+      </p:pic>
+      <p:pic>
+        <p:nvPicPr>
+          <p:cNvPr id="21" name="Рисунок 20">
+            <a:extLst>
+              <a:ext uri="{FF2B5EF4-FFF2-40B4-BE49-F238E27FC236}">
+                <a16:creationId xmlns:a16="http://schemas.microsoft.com/office/drawing/2014/main" id="{7017DDBB-294C-1327-485C-353618F3DB0D}"/>
+              </a:ext>
+            </a:extLst>
+          </p:cNvPr>
+          <p:cNvPicPr>
+            <a:picLocks noChangeAspect="1"/>
+          </p:cNvPicPr>
+          <p:nvPr/>
+        </p:nvPicPr>
+        <p:blipFill>
+          <a:blip r:embed="rId3">
+            <a:extLst>
+              <a:ext uri="{BEBA8EAE-BF5A-486C-A8C5-ECC9F3942E4B}">
+                <a14:imgProps xmlns:a14="http://schemas.microsoft.com/office/drawing/2010/main">
+                  <a14:imgLayer r:embed="rId4">
+                    <a14:imgEffect>
+                      <a14:backgroundRemoval t="3794" b="96813" l="3232" r="95437">
+                        <a14:foregroundMark x1="8365" y1="4856" x2="64259" y2="14112"/>
+                        <a14:foregroundMark x1="64259" y1="14112" x2="35551" y2="80880"/>
+                        <a14:foregroundMark x1="35551" y1="80880" x2="40304" y2="92716"/>
+                        <a14:foregroundMark x1="40304" y1="92716" x2="45437" y2="95144"/>
+                        <a14:foregroundMark x1="68251" y1="90440" x2="64639" y2="79059"/>
+                        <a14:foregroundMark x1="64639" y1="79059" x2="66350" y2="23672"/>
+                        <a14:foregroundMark x1="57224" y1="42944" x2="29468" y2="53566"/>
+                        <a14:foregroundMark x1="29468" y1="53566" x2="12928" y2="75873"/>
+                        <a14:foregroundMark x1="12928" y1="75873" x2="9316" y2="88771"/>
+                        <a14:foregroundMark x1="9316" y1="88771" x2="6274" y2="18665"/>
+                        <a14:foregroundMark x1="6274" y1="18665" x2="7985" y2="9256"/>
+                        <a14:foregroundMark x1="7985" y1="9256" x2="29278" y2="6525"/>
+                        <a14:foregroundMark x1="29278" y1="6525" x2="45437" y2="23217"/>
+                        <a14:foregroundMark x1="45437" y1="23217" x2="28137" y2="43854"/>
+                        <a14:foregroundMark x1="5133" y1="10167" x2="3612" y2="28225"/>
+                        <a14:foregroundMark x1="3612" y1="28225" x2="3992" y2="29439"/>
+                        <a14:foregroundMark x1="5703" y1="7284" x2="16920" y2="3794"/>
+                        <a14:foregroundMark x1="16920" y1="3794" x2="19582" y2="3945"/>
+                        <a14:foregroundMark x1="95247" y1="5008" x2="95247" y2="17299"/>
+                        <a14:foregroundMark x1="12167" y1="92716" x2="14639" y2="95296"/>
+                        <a14:foregroundMark x1="17871" y1="96965" x2="24715" y2="92716"/>
+                        <a14:foregroundMark x1="15589" y1="93020" x2="20722" y2="93020"/>
+                        <a14:foregroundMark x1="95437" y1="39454" x2="94106" y2="35357"/>
+                      </a14:backgroundRemoval>
+                    </a14:imgEffect>
+                  </a14:imgLayer>
+                </a14:imgProps>
+              </a:ext>
+            </a:extLst>
+          </a:blip>
+          <a:stretch>
+            <a:fillRect/>
+          </a:stretch>
+        </p:blipFill>
+        <p:spPr>
+          <a:xfrm>
+            <a:off x="9984382" y="3618380"/>
+            <a:ext cx="3334543" cy="4177689"/>
+          </a:xfrm>
+          <a:prstGeom prst="rect">
+            <a:avLst/>
+          </a:prstGeom>
+        </p:spPr>
+      </p:pic>
+      <p:sp>
+        <p:nvSpPr>
+          <p:cNvPr id="22" name="Text 0">
+            <a:extLst>
+              <a:ext uri="{FF2B5EF4-FFF2-40B4-BE49-F238E27FC236}">
+                <a16:creationId xmlns:a16="http://schemas.microsoft.com/office/drawing/2014/main" id="{509C6B68-36CF-690F-2E26-D7FFFB732230}"/>
+              </a:ext>
+            </a:extLst>
+          </p:cNvPr>
+          <p:cNvSpPr/>
+          <p:nvPr/>
+        </p:nvSpPr>
+        <p:spPr>
+          <a:xfrm>
+            <a:off x="1061294" y="260410"/>
+            <a:ext cx="12423212" cy="712708"/>
           </a:xfrm>
           <a:prstGeom prst="rect">
             <a:avLst/>
@@ -6649,7 +9357,7 @@
               <a:buNone/>
             </a:pPr>
             <a:r>
-              <a:rPr lang="en-US" sz="4450" b="1" dirty="0">
+              <a:rPr lang="ru-RU" sz="4450" b="1" dirty="0">
                 <a:solidFill>
                   <a:srgbClr val="2E3C4E"/>
                 </a:solidFill>
@@ -6657,88 +9365,28 @@
                 <a:ea typeface="Barlow Bold" pitchFamily="34" charset="-122"/>
                 <a:cs typeface="Barlow Bold" pitchFamily="34" charset="-120"/>
               </a:rPr>
-              <a:t>Преимущества решения</a:t>
+              <a:t>Статистика и взаимодействие с ведомостями</a:t>
             </a:r>
             <a:endParaRPr lang="en-US" sz="4450" dirty="0"/>
           </a:p>
         </p:txBody>
       </p:sp>
-      <p:pic>
-        <p:nvPicPr>
-          <p:cNvPr id="3" name="Image 0" descr="preencoded.png"/>
-          <p:cNvPicPr>
-            <a:picLocks noChangeAspect="1"/>
-          </p:cNvPicPr>
-          <p:nvPr/>
-        </p:nvPicPr>
-        <p:blipFill>
-          <a:blip r:embed="rId3"/>
-          <a:stretch>
-            <a:fillRect/>
-          </a:stretch>
-        </p:blipFill>
-        <p:spPr>
-          <a:xfrm>
-            <a:off x="758309" y="2662833"/>
-            <a:ext cx="4190762" cy="2590086"/>
-          </a:xfrm>
-          <a:prstGeom prst="rect">
-            <a:avLst/>
-          </a:prstGeom>
-        </p:spPr>
-      </p:pic>
-      <p:sp>
-        <p:nvSpPr>
-          <p:cNvPr id="4" name="Text 1"/>
-          <p:cNvSpPr/>
-          <p:nvPr/>
-        </p:nvSpPr>
-        <p:spPr>
-          <a:xfrm>
-            <a:off x="758309" y="5523667"/>
-            <a:ext cx="2910245" cy="356235"/>
-          </a:xfrm>
-          <a:prstGeom prst="rect">
-            <a:avLst/>
-          </a:prstGeom>
-          <a:noFill/>
-          <a:ln/>
-        </p:spPr>
-        <p:txBody>
-          <a:bodyPr wrap="none" lIns="0" tIns="0" rIns="0" bIns="0" rtlCol="0" anchor="t"/>
-          <a:lstStyle/>
-          <a:p>
-            <a:pPr marL="0" indent="0" algn="l">
-              <a:lnSpc>
-                <a:spcPts val="2800"/>
-              </a:lnSpc>
-              <a:buNone/>
-            </a:pPr>
-            <a:r>
-              <a:rPr lang="en-US" sz="2200" b="1" dirty="0">
-                <a:solidFill>
-                  <a:srgbClr val="384653"/>
-                </a:solidFill>
-                <a:latin typeface="Barlow Bold" pitchFamily="34" charset="0"/>
-                <a:ea typeface="Barlow Bold" pitchFamily="34" charset="-122"/>
-                <a:cs typeface="Barlow Bold" pitchFamily="34" charset="-120"/>
-              </a:rPr>
-              <a:t>Экономия времени</a:t>
-            </a:r>
-            <a:endParaRPr lang="en-US" sz="2200" dirty="0"/>
-          </a:p>
-        </p:txBody>
-      </p:sp>
-      <p:sp>
-        <p:nvSpPr>
-          <p:cNvPr id="5" name="Text 2"/>
-          <p:cNvSpPr/>
-          <p:nvPr/>
-        </p:nvSpPr>
-        <p:spPr>
-          <a:xfrm>
-            <a:off x="758309" y="6009799"/>
-            <a:ext cx="4190762" cy="346710"/>
+      <p:sp>
+        <p:nvSpPr>
+          <p:cNvPr id="23" name="Text 2">
+            <a:extLst>
+              <a:ext uri="{FF2B5EF4-FFF2-40B4-BE49-F238E27FC236}">
+                <a16:creationId xmlns:a16="http://schemas.microsoft.com/office/drawing/2014/main" id="{4999EDB9-CCEC-7B3D-65AC-71E1B62F9F1D}"/>
+              </a:ext>
+            </a:extLst>
+          </p:cNvPr>
+          <p:cNvSpPr/>
+          <p:nvPr/>
+        </p:nvSpPr>
+        <p:spPr>
+          <a:xfrm>
+            <a:off x="1145894" y="908383"/>
+            <a:ext cx="11608615" cy="457059"/>
           </a:xfrm>
           <a:prstGeom prst="rect">
             <a:avLst/>
@@ -6757,242 +9405,24 @@
               <a:buNone/>
             </a:pPr>
             <a:r>
-              <a:rPr lang="en-US" sz="1700" dirty="0">
+              <a:rPr lang="ru-RU" sz="2400" dirty="0">
                 <a:solidFill>
                   <a:srgbClr val="384653"/>
                 </a:solidFill>
                 <a:latin typeface="Montserrat" pitchFamily="34" charset="0"/>
-                <a:ea typeface="Montserrat" pitchFamily="34" charset="-122"/>
-                <a:cs typeface="Montserrat" pitchFamily="34" charset="-120"/>
-              </a:rPr>
-              <a:t>Сокращение рутинных операций</a:t>
-            </a:r>
-            <a:endParaRPr lang="en-US" sz="1700" dirty="0"/>
-          </a:p>
-        </p:txBody>
-      </p:sp>
-      <p:pic>
-        <p:nvPicPr>
-          <p:cNvPr id="6" name="Image 1" descr="preencoded.png"/>
-          <p:cNvPicPr>
-            <a:picLocks noChangeAspect="1"/>
-          </p:cNvPicPr>
-          <p:nvPr/>
-        </p:nvPicPr>
-        <p:blipFill>
-          <a:blip r:embed="rId4"/>
-          <a:stretch>
-            <a:fillRect/>
-          </a:stretch>
-        </p:blipFill>
-        <p:spPr>
-          <a:xfrm>
-            <a:off x="5219819" y="2662833"/>
-            <a:ext cx="4190762" cy="2590086"/>
-          </a:xfrm>
-          <a:prstGeom prst="rect">
-            <a:avLst/>
-          </a:prstGeom>
-        </p:spPr>
-      </p:pic>
-      <p:sp>
-        <p:nvSpPr>
-          <p:cNvPr id="7" name="Text 3"/>
-          <p:cNvSpPr/>
-          <p:nvPr/>
-        </p:nvSpPr>
-        <p:spPr>
-          <a:xfrm>
-            <a:off x="5219819" y="5523667"/>
-            <a:ext cx="4039672" cy="356235"/>
-          </a:xfrm>
-          <a:prstGeom prst="rect">
-            <a:avLst/>
-          </a:prstGeom>
-          <a:noFill/>
-          <a:ln/>
-        </p:spPr>
-        <p:txBody>
-          <a:bodyPr wrap="none" lIns="0" tIns="0" rIns="0" bIns="0" rtlCol="0" anchor="t"/>
-          <a:lstStyle/>
-          <a:p>
-            <a:pPr marL="0" indent="0" algn="l">
-              <a:lnSpc>
-                <a:spcPts val="2800"/>
-              </a:lnSpc>
-              <a:buNone/>
-            </a:pPr>
-            <a:r>
-              <a:rPr lang="en-US" sz="2200" b="1" dirty="0">
-                <a:solidFill>
-                  <a:srgbClr val="384653"/>
-                </a:solidFill>
-                <a:latin typeface="Barlow Bold" pitchFamily="34" charset="0"/>
-                <a:ea typeface="Barlow Bold" pitchFamily="34" charset="-122"/>
-                <a:cs typeface="Barlow Bold" pitchFamily="34" charset="-120"/>
-              </a:rPr>
-              <a:t>Локальное развертывание</a:t>
-            </a:r>
-            <a:endParaRPr lang="en-US" sz="2200" dirty="0"/>
-          </a:p>
-        </p:txBody>
-      </p:sp>
-      <p:sp>
-        <p:nvSpPr>
-          <p:cNvPr id="8" name="Text 4"/>
-          <p:cNvSpPr/>
-          <p:nvPr/>
-        </p:nvSpPr>
-        <p:spPr>
-          <a:xfrm>
-            <a:off x="5219819" y="6009799"/>
-            <a:ext cx="4190762" cy="693420"/>
-          </a:xfrm>
-          <a:prstGeom prst="rect">
-            <a:avLst/>
-          </a:prstGeom>
-          <a:noFill/>
-          <a:ln/>
-        </p:spPr>
-        <p:txBody>
-          <a:bodyPr wrap="square" lIns="0" tIns="0" rIns="0" bIns="0" rtlCol="0" anchor="t"/>
-          <a:lstStyle/>
-          <a:p>
-            <a:pPr marL="0" indent="0" algn="l">
-              <a:lnSpc>
-                <a:spcPts val="2700"/>
-              </a:lnSpc>
-              <a:buNone/>
-            </a:pPr>
-            <a:r>
-              <a:rPr lang="en-US" sz="1700" dirty="0">
-                <a:solidFill>
-                  <a:srgbClr val="384653"/>
-                </a:solidFill>
-                <a:latin typeface="Montserrat" pitchFamily="34" charset="0"/>
-                <a:ea typeface="Montserrat" pitchFamily="34" charset="-122"/>
-                <a:cs typeface="Montserrat" pitchFamily="34" charset="-120"/>
-              </a:rPr>
-              <a:t>Независимость от внешних сервисов</a:t>
-            </a:r>
-            <a:endParaRPr lang="en-US" sz="1700" dirty="0"/>
-          </a:p>
-        </p:txBody>
-      </p:sp>
-      <p:pic>
-        <p:nvPicPr>
-          <p:cNvPr id="9" name="Image 2" descr="preencoded.png"/>
-          <p:cNvPicPr>
-            <a:picLocks noChangeAspect="1"/>
-          </p:cNvPicPr>
-          <p:nvPr/>
-        </p:nvPicPr>
-        <p:blipFill>
-          <a:blip r:embed="rId5"/>
-          <a:stretch>
-            <a:fillRect/>
-          </a:stretch>
-        </p:blipFill>
-        <p:spPr>
-          <a:xfrm>
-            <a:off x="9681329" y="2662833"/>
-            <a:ext cx="4190762" cy="2590086"/>
-          </a:xfrm>
-          <a:prstGeom prst="rect">
-            <a:avLst/>
-          </a:prstGeom>
-        </p:spPr>
-      </p:pic>
-      <p:sp>
-        <p:nvSpPr>
-          <p:cNvPr id="10" name="Text 5"/>
-          <p:cNvSpPr/>
-          <p:nvPr/>
-        </p:nvSpPr>
-        <p:spPr>
-          <a:xfrm>
-            <a:off x="9681329" y="5523667"/>
-            <a:ext cx="4190762" cy="486132"/>
-          </a:xfrm>
-          <a:prstGeom prst="rect">
-            <a:avLst/>
-          </a:prstGeom>
-          <a:noFill/>
-          <a:ln/>
-        </p:spPr>
-        <p:txBody>
-          <a:bodyPr wrap="square" lIns="0" tIns="0" rIns="0" bIns="0" rtlCol="0" anchor="t"/>
-          <a:lstStyle/>
-          <a:p>
-            <a:pPr marL="0" indent="0" algn="l">
-              <a:lnSpc>
-                <a:spcPts val="2800"/>
-              </a:lnSpc>
-              <a:buNone/>
-            </a:pPr>
-            <a:r>
-              <a:rPr lang="en-US" sz="2200" b="1" dirty="0">
-                <a:solidFill>
-                  <a:srgbClr val="384653"/>
-                </a:solidFill>
-                <a:latin typeface="Barlow Bold" pitchFamily="34" charset="0"/>
-                <a:ea typeface="Barlow Bold" pitchFamily="34" charset="-122"/>
-                <a:cs typeface="Barlow Bold" pitchFamily="34" charset="-120"/>
-              </a:rPr>
-              <a:t>Повышение эффективности</a:t>
-            </a:r>
-            <a:endParaRPr lang="en-US" sz="2200" dirty="0"/>
-          </a:p>
-        </p:txBody>
-      </p:sp>
-      <p:sp>
-        <p:nvSpPr>
-          <p:cNvPr id="11" name="Text 6"/>
-          <p:cNvSpPr/>
-          <p:nvPr/>
-        </p:nvSpPr>
-        <p:spPr>
-          <a:xfrm>
-            <a:off x="9681329" y="6009799"/>
-            <a:ext cx="4190762" cy="346710"/>
-          </a:xfrm>
-          <a:prstGeom prst="rect">
-            <a:avLst/>
-          </a:prstGeom>
-          <a:noFill/>
-          <a:ln/>
-        </p:spPr>
-        <p:txBody>
-          <a:bodyPr wrap="none" lIns="0" tIns="0" rIns="0" bIns="0" rtlCol="0" anchor="t"/>
-          <a:lstStyle/>
-          <a:p>
-            <a:pPr marL="0" indent="0" algn="l">
-              <a:lnSpc>
-                <a:spcPts val="2700"/>
-              </a:lnSpc>
-              <a:buNone/>
-            </a:pPr>
-            <a:r>
-              <a:rPr lang="en-US" sz="1700" dirty="0">
-                <a:solidFill>
-                  <a:srgbClr val="384653"/>
-                </a:solidFill>
-                <a:latin typeface="Montserrat" pitchFamily="34" charset="0"/>
-                <a:ea typeface="Montserrat" pitchFamily="34" charset="-122"/>
-                <a:cs typeface="Montserrat" pitchFamily="34" charset="-120"/>
-              </a:rPr>
-              <a:t>Минимизация ошибок при учете</a:t>
-            </a:r>
-            <a:endParaRPr lang="en-US" sz="1700" dirty="0"/>
-          </a:p>
-        </p:txBody>
-      </p:sp>
-      <p:sp>
-        <p:nvSpPr>
-          <p:cNvPr id="12" name="Прямоугольник 11">
+              </a:rPr>
+              <a:t>Формы статистики, скачивания и электронной рассылки ведомостей</a:t>
+            </a:r>
+            <a:endParaRPr lang="en-US" sz="2400" dirty="0"/>
+          </a:p>
+        </p:txBody>
+      </p:sp>
+      <p:sp>
+        <p:nvSpPr>
+          <p:cNvPr id="3" name="Овал 2">
             <a:extLst>
               <a:ext uri="{FF2B5EF4-FFF2-40B4-BE49-F238E27FC236}">
-                <a16:creationId xmlns:a16="http://schemas.microsoft.com/office/drawing/2014/main" id="{B48C373F-13EC-E30D-77FE-6C8059EB637E}"/>
+                <a16:creationId xmlns:a16="http://schemas.microsoft.com/office/drawing/2014/main" id="{FDFF9FCF-7723-769E-B0E0-1429A529AD76}"/>
               </a:ext>
             </a:extLst>
           </p:cNvPr>
@@ -7001,30 +9431,28 @@
         </p:nvSpPr>
         <p:spPr>
           <a:xfrm>
-            <a:off x="12601575" y="7591425"/>
-            <a:ext cx="1933575" cy="531495"/>
-          </a:xfrm>
-          <a:prstGeom prst="rect">
+            <a:off x="13821273" y="7454726"/>
+            <a:ext cx="557917" cy="483472"/>
+          </a:xfrm>
+          <a:prstGeom prst="ellipse">
             <a:avLst/>
           </a:prstGeom>
           <a:solidFill>
-            <a:schemeClr val="bg1"/>
+            <a:srgbClr val="D4E9F7"/>
           </a:solidFill>
           <a:ln>
-            <a:solidFill>
-              <a:schemeClr val="bg1"/>
-            </a:solidFill>
+            <a:noFill/>
           </a:ln>
         </p:spPr>
         <p:style>
-          <a:lnRef idx="2">
-            <a:schemeClr val="dk1"/>
+          <a:lnRef idx="1">
+            <a:schemeClr val="accent5"/>
           </a:lnRef>
-          <a:fillRef idx="1">
-            <a:schemeClr val="lt1"/>
+          <a:fillRef idx="2">
+            <a:schemeClr val="accent5"/>
           </a:fillRef>
-          <a:effectRef idx="0">
-            <a:schemeClr val="dk1"/>
+          <a:effectRef idx="1">
+            <a:schemeClr val="accent5"/>
           </a:effectRef>
           <a:fontRef idx="minor">
             <a:schemeClr val="dk1"/>
@@ -7035,11 +9463,20 @@
           <a:lstStyle/>
           <a:p>
             <a:pPr algn="ctr"/>
-            <a:endParaRPr lang="ru-RU"/>
+            <a:r>
+              <a:rPr lang="en-US" sz="1600" dirty="0"/>
+              <a:t>9</a:t>
+            </a:r>
+            <a:endParaRPr lang="ru-RU" dirty="0"/>
           </a:p>
         </p:txBody>
       </p:sp>
     </p:spTree>
+    <p:extLst>
+      <p:ext uri="{BB962C8B-B14F-4D97-AF65-F5344CB8AC3E}">
+        <p14:creationId xmlns:p14="http://schemas.microsoft.com/office/powerpoint/2010/main" val="938653340"/>
+      </p:ext>
+    </p:extLst>
   </p:cSld>
   <p:clrMapOvr>
     <a:masterClrMapping/>
@@ -7655,4 +10092,319 @@
     </a:ext>
   </a:extLst>
 </a:theme>
+</file>
+
+<file path=ppt/theme/theme3.xml><?xml version="1.0" encoding="utf-8"?>
+<a:theme xmlns:a="http://schemas.openxmlformats.org/drawingml/2006/main" name="Тема Office">
+  <a:themeElements>
+    <a:clrScheme name="Стандартная">
+      <a:dk1>
+        <a:sysClr val="windowText" lastClr="000000"/>
+      </a:dk1>
+      <a:lt1>
+        <a:sysClr val="window" lastClr="FFFFFF"/>
+      </a:lt1>
+      <a:dk2>
+        <a:srgbClr val="0E2841"/>
+      </a:dk2>
+      <a:lt2>
+        <a:srgbClr val="E8E8E8"/>
+      </a:lt2>
+      <a:accent1>
+        <a:srgbClr val="156082"/>
+      </a:accent1>
+      <a:accent2>
+        <a:srgbClr val="E97132"/>
+      </a:accent2>
+      <a:accent3>
+        <a:srgbClr val="196B24"/>
+      </a:accent3>
+      <a:accent4>
+        <a:srgbClr val="0F9ED5"/>
+      </a:accent4>
+      <a:accent5>
+        <a:srgbClr val="A02B93"/>
+      </a:accent5>
+      <a:accent6>
+        <a:srgbClr val="4EA72E"/>
+      </a:accent6>
+      <a:hlink>
+        <a:srgbClr val="467886"/>
+      </a:hlink>
+      <a:folHlink>
+        <a:srgbClr val="96607D"/>
+      </a:folHlink>
+    </a:clrScheme>
+    <a:fontScheme name="Стандартная">
+      <a:majorFont>
+        <a:latin typeface="Aptos Display" panose="02110004020202020204"/>
+        <a:ea typeface=""/>
+        <a:cs typeface=""/>
+        <a:font script="Jpan" typeface="游ゴシック Light"/>
+        <a:font script="Hang" typeface="맑은 고딕"/>
+        <a:font script="Hans" typeface="等线 Light"/>
+        <a:font script="Hant" typeface="新細明體"/>
+        <a:font script="Arab" typeface="Times New Roman"/>
+        <a:font script="Hebr" typeface="Times New Roman"/>
+        <a:font script="Thai" typeface="Angsana New"/>
+        <a:font script="Ethi" typeface="Nyala"/>
+        <a:font script="Beng" typeface="Vrinda"/>
+        <a:font script="Gujr" typeface="Shruti"/>
+        <a:font script="Khmr" typeface="MoolBoran"/>
+        <a:font script="Knda" typeface="Tunga"/>
+        <a:font script="Guru" typeface="Raavi"/>
+        <a:font script="Cans" typeface="Euphemia"/>
+        <a:font script="Cher" typeface="Plantagenet Cherokee"/>
+        <a:font script="Yiii" typeface="Microsoft Yi Baiti"/>
+        <a:font script="Tibt" typeface="Microsoft Himalaya"/>
+        <a:font script="Thaa" typeface="MV Boli"/>
+        <a:font script="Deva" typeface="Mangal"/>
+        <a:font script="Telu" typeface="Gautami"/>
+        <a:font script="Taml" typeface="Latha"/>
+        <a:font script="Syrc" typeface="Estrangelo Edessa"/>
+        <a:font script="Orya" typeface="Kalinga"/>
+        <a:font script="Mlym" typeface="Kartika"/>
+        <a:font script="Laoo" typeface="DokChampa"/>
+        <a:font script="Sinh" typeface="Iskoola Pota"/>
+        <a:font script="Mong" typeface="Mongolian Baiti"/>
+        <a:font script="Viet" typeface="Times New Roman"/>
+        <a:font script="Uigh" typeface="Microsoft Uighur"/>
+        <a:font script="Geor" typeface="Sylfaen"/>
+        <a:font script="Armn" typeface="Arial"/>
+        <a:font script="Bugi" typeface="Leelawadee UI"/>
+        <a:font script="Bopo" typeface="Microsoft JhengHei"/>
+        <a:font script="Java" typeface="Javanese Text"/>
+        <a:font script="Lisu" typeface="Segoe UI"/>
+        <a:font script="Mymr" typeface="Myanmar Text"/>
+        <a:font script="Nkoo" typeface="Ebrima"/>
+        <a:font script="Olck" typeface="Nirmala UI"/>
+        <a:font script="Osma" typeface="Ebrima"/>
+        <a:font script="Phag" typeface="Phagspa"/>
+        <a:font script="Syrn" typeface="Estrangelo Edessa"/>
+        <a:font script="Syrj" typeface="Estrangelo Edessa"/>
+        <a:font script="Syre" typeface="Estrangelo Edessa"/>
+        <a:font script="Sora" typeface="Nirmala UI"/>
+        <a:font script="Tale" typeface="Microsoft Tai Le"/>
+        <a:font script="Talu" typeface="Microsoft New Tai Lue"/>
+        <a:font script="Tfng" typeface="Ebrima"/>
+      </a:majorFont>
+      <a:minorFont>
+        <a:latin typeface="Aptos" panose="02110004020202020204"/>
+        <a:ea typeface=""/>
+        <a:cs typeface=""/>
+        <a:font script="Jpan" typeface="游ゴシック"/>
+        <a:font script="Hang" typeface="맑은 고딕"/>
+        <a:font script="Hans" typeface="等线"/>
+        <a:font script="Hant" typeface="新細明體"/>
+        <a:font script="Arab" typeface="Arial"/>
+        <a:font script="Hebr" typeface="Arial"/>
+        <a:font script="Thai" typeface="Cordia New"/>
+        <a:font script="Ethi" typeface="Nyala"/>
+        <a:font script="Beng" typeface="Vrinda"/>
+        <a:font script="Gujr" typeface="Shruti"/>
+        <a:font script="Khmr" typeface="DaunPenh"/>
+        <a:font script="Knda" typeface="Tunga"/>
+        <a:font script="Guru" typeface="Raavi"/>
+        <a:font script="Cans" typeface="Euphemia"/>
+        <a:font script="Cher" typeface="Plantagenet Cherokee"/>
+        <a:font script="Yiii" typeface="Microsoft Yi Baiti"/>
+        <a:font script="Tibt" typeface="Microsoft Himalaya"/>
+        <a:font script="Thaa" typeface="MV Boli"/>
+        <a:font script="Deva" typeface="Mangal"/>
+        <a:font script="Telu" typeface="Gautami"/>
+        <a:font script="Taml" typeface="Latha"/>
+        <a:font script="Syrc" typeface="Estrangelo Edessa"/>
+        <a:font script="Orya" typeface="Kalinga"/>
+        <a:font script="Mlym" typeface="Kartika"/>
+        <a:font script="Laoo" typeface="DokChampa"/>
+        <a:font script="Sinh" typeface="Iskoola Pota"/>
+        <a:font script="Mong" typeface="Mongolian Baiti"/>
+        <a:font script="Viet" typeface="Arial"/>
+        <a:font script="Uigh" typeface="Microsoft Uighur"/>
+        <a:font script="Geor" typeface="Sylfaen"/>
+        <a:font script="Armn" typeface="Arial"/>
+        <a:font script="Bugi" typeface="Leelawadee UI"/>
+        <a:font script="Bopo" typeface="Microsoft JhengHei"/>
+        <a:font script="Java" typeface="Javanese Text"/>
+        <a:font script="Lisu" typeface="Segoe UI"/>
+        <a:font script="Mymr" typeface="Myanmar Text"/>
+        <a:font script="Nkoo" typeface="Ebrima"/>
+        <a:font script="Olck" typeface="Nirmala UI"/>
+        <a:font script="Osma" typeface="Ebrima"/>
+        <a:font script="Phag" typeface="Phagspa"/>
+        <a:font script="Syrn" typeface="Estrangelo Edessa"/>
+        <a:font script="Syrj" typeface="Estrangelo Edessa"/>
+        <a:font script="Syre" typeface="Estrangelo Edessa"/>
+        <a:font script="Sora" typeface="Nirmala UI"/>
+        <a:font script="Tale" typeface="Microsoft Tai Le"/>
+        <a:font script="Talu" typeface="Microsoft New Tai Lue"/>
+        <a:font script="Tfng" typeface="Ebrima"/>
+      </a:minorFont>
+    </a:fontScheme>
+    <a:fmtScheme name="Стандартная">
+      <a:fillStyleLst>
+        <a:solidFill>
+          <a:schemeClr val="phClr"/>
+        </a:solidFill>
+        <a:gradFill rotWithShape="1">
+          <a:gsLst>
+            <a:gs pos="0">
+              <a:schemeClr val="phClr">
+                <a:lumMod val="110000"/>
+                <a:satMod val="105000"/>
+                <a:tint val="67000"/>
+              </a:schemeClr>
+            </a:gs>
+            <a:gs pos="50000">
+              <a:schemeClr val="phClr">
+                <a:lumMod val="105000"/>
+                <a:satMod val="103000"/>
+                <a:tint val="73000"/>
+              </a:schemeClr>
+            </a:gs>
+            <a:gs pos="100000">
+              <a:schemeClr val="phClr">
+                <a:lumMod val="105000"/>
+                <a:satMod val="109000"/>
+                <a:tint val="81000"/>
+              </a:schemeClr>
+            </a:gs>
+          </a:gsLst>
+          <a:lin ang="5400000" scaled="0"/>
+        </a:gradFill>
+        <a:gradFill rotWithShape="1">
+          <a:gsLst>
+            <a:gs pos="0">
+              <a:schemeClr val="phClr">
+                <a:satMod val="103000"/>
+                <a:lumMod val="102000"/>
+                <a:tint val="94000"/>
+              </a:schemeClr>
+            </a:gs>
+            <a:gs pos="50000">
+              <a:schemeClr val="phClr">
+                <a:satMod val="110000"/>
+                <a:lumMod val="100000"/>
+                <a:shade val="100000"/>
+              </a:schemeClr>
+            </a:gs>
+            <a:gs pos="100000">
+              <a:schemeClr val="phClr">
+                <a:lumMod val="99000"/>
+                <a:satMod val="120000"/>
+                <a:shade val="78000"/>
+              </a:schemeClr>
+            </a:gs>
+          </a:gsLst>
+          <a:lin ang="5400000" scaled="0"/>
+        </a:gradFill>
+      </a:fillStyleLst>
+      <a:lnStyleLst>
+        <a:ln w="12700" cap="flat" cmpd="sng" algn="ctr">
+          <a:solidFill>
+            <a:schemeClr val="phClr"/>
+          </a:solidFill>
+          <a:prstDash val="solid"/>
+          <a:miter lim="800000"/>
+        </a:ln>
+        <a:ln w="19050" cap="flat" cmpd="sng" algn="ctr">
+          <a:solidFill>
+            <a:schemeClr val="phClr"/>
+          </a:solidFill>
+          <a:prstDash val="solid"/>
+          <a:miter lim="800000"/>
+        </a:ln>
+        <a:ln w="25400" cap="flat" cmpd="sng" algn="ctr">
+          <a:solidFill>
+            <a:schemeClr val="phClr"/>
+          </a:solidFill>
+          <a:prstDash val="solid"/>
+          <a:miter lim="800000"/>
+        </a:ln>
+      </a:lnStyleLst>
+      <a:effectStyleLst>
+        <a:effectStyle>
+          <a:effectLst/>
+        </a:effectStyle>
+        <a:effectStyle>
+          <a:effectLst/>
+        </a:effectStyle>
+        <a:effectStyle>
+          <a:effectLst>
+            <a:outerShdw blurRad="57150" dist="19050" dir="5400000" algn="ctr" rotWithShape="0">
+              <a:srgbClr val="000000">
+                <a:alpha val="63000"/>
+              </a:srgbClr>
+            </a:outerShdw>
+          </a:effectLst>
+        </a:effectStyle>
+      </a:effectStyleLst>
+      <a:bgFillStyleLst>
+        <a:solidFill>
+          <a:schemeClr val="phClr"/>
+        </a:solidFill>
+        <a:solidFill>
+          <a:schemeClr val="phClr">
+            <a:tint val="95000"/>
+            <a:satMod val="170000"/>
+          </a:schemeClr>
+        </a:solidFill>
+        <a:gradFill rotWithShape="1">
+          <a:gsLst>
+            <a:gs pos="0">
+              <a:schemeClr val="phClr">
+                <a:tint val="93000"/>
+                <a:satMod val="150000"/>
+                <a:shade val="98000"/>
+                <a:lumMod val="102000"/>
+              </a:schemeClr>
+            </a:gs>
+            <a:gs pos="50000">
+              <a:schemeClr val="phClr">
+                <a:tint val="98000"/>
+                <a:satMod val="130000"/>
+                <a:shade val="90000"/>
+                <a:lumMod val="103000"/>
+              </a:schemeClr>
+            </a:gs>
+            <a:gs pos="100000">
+              <a:schemeClr val="phClr">
+                <a:shade val="63000"/>
+                <a:satMod val="120000"/>
+              </a:schemeClr>
+            </a:gs>
+          </a:gsLst>
+          <a:lin ang="5400000" scaled="0"/>
+        </a:gradFill>
+      </a:bgFillStyleLst>
+    </a:fmtScheme>
+  </a:themeElements>
+  <a:objectDefaults>
+    <a:lnDef>
+      <a:spPr/>
+      <a:bodyPr/>
+      <a:lstStyle/>
+      <a:style>
+        <a:lnRef idx="2">
+          <a:schemeClr val="accent1"/>
+        </a:lnRef>
+        <a:fillRef idx="0">
+          <a:schemeClr val="accent1"/>
+        </a:fillRef>
+        <a:effectRef idx="1">
+          <a:schemeClr val="accent1"/>
+        </a:effectRef>
+        <a:fontRef idx="minor">
+          <a:schemeClr val="tx1"/>
+        </a:fontRef>
+      </a:style>
+    </a:lnDef>
+  </a:objectDefaults>
+  <a:extraClrSchemeLst/>
+  <a:extLst>
+    <a:ext uri="{05A4C25C-085E-4340-85A3-A5531E510DB2}">
+      <thm15:themeFamily xmlns:thm15="http://schemas.microsoft.com/office/thememl/2012/main" name="Office Theme" id="{2E142A2C-CD16-42D6-873A-C26D2A0506FA}" vid="{1BDDFF52-6CD6-40A5-AB3C-68EB2F1E4D0A}"/>
+    </a:ext>
+  </a:extLst>
+</a:theme>
 </file>